--- a/Processamento de Imagens/Slides/06 - Filtros de Realce.pptx
+++ b/Processamento de Imagens/Slides/06 - Filtros de Realce.pptx
@@ -6,7 +6,7 @@
     <p:sldMasterId id="2147483684" r:id="rId2"/>
   </p:sldMasterIdLst>
   <p:notesMasterIdLst>
-    <p:notesMasterId r:id="rId14"/>
+    <p:notesMasterId r:id="rId18"/>
   </p:notesMasterIdLst>
   <p:sldIdLst>
     <p:sldId id="320" r:id="rId3"/>
@@ -19,7 +19,11 @@
     <p:sldId id="363" r:id="rId10"/>
     <p:sldId id="364" r:id="rId11"/>
     <p:sldId id="365" r:id="rId12"/>
-    <p:sldId id="357" r:id="rId13"/>
+    <p:sldId id="366" r:id="rId13"/>
+    <p:sldId id="367" r:id="rId14"/>
+    <p:sldId id="369" r:id="rId15"/>
+    <p:sldId id="368" r:id="rId16"/>
+    <p:sldId id="370" r:id="rId17"/>
   </p:sldIdLst>
   <p:sldSz cx="12192000" cy="6858000"/>
   <p:notesSz cx="6858000" cy="9144000"/>
@@ -220,7 +224,7 @@
           <a:p>
             <a:fld id="{6ED03497-8374-466E-85FA-95E1138D8F6E}" type="datetimeFigureOut">
               <a:rPr lang="pt-BR" smtClean="0"/>
-              <a:t>17/10/2026</a:t>
+              <a:t>21/10/2026</a:t>
             </a:fld>
             <a:endParaRPr lang="pt-BR"/>
           </a:p>
@@ -675,6 +679,43 @@
               <a:buFont typeface="Arial" panose="020B0604020202020204" pitchFamily="34" charset="0"/>
               <a:buChar char="•"/>
             </a:pPr>
+            <a:r>
+              <a:rPr lang="pt-BR" dirty="0"/>
+              <a:t>Ele mede a diferença entre o valor de uma função em um ponto e a média dos valores dessa função ao redor desse ponto.</a:t>
+            </a:r>
+          </a:p>
+          <a:p>
+            <a:pPr marL="171450" indent="-171450">
+              <a:buFont typeface="Arial" panose="020B0604020202020204" pitchFamily="34" charset="0"/>
+              <a:buChar char="•"/>
+            </a:pPr>
+            <a:endParaRPr lang="pt-BR" b="0" dirty="0"/>
+          </a:p>
+          <a:p>
+            <a:pPr marL="514350" indent="-514350">
+              <a:buFont typeface="+mj-lt"/>
+              <a:buAutoNum type="romanUcPeriod"/>
+            </a:pPr>
+            <a:r>
+              <a:rPr lang="pt-BR" sz="1200" dirty="0"/>
+              <a:t>Em uma região uniforme, a intensidade permanece constante.  </a:t>
+            </a:r>
+          </a:p>
+          <a:p>
+            <a:pPr marL="514350" indent="-514350">
+              <a:buFont typeface="+mj-lt"/>
+              <a:buAutoNum type="romanUcPeriod"/>
+            </a:pPr>
+            <a:r>
+              <a:rPr lang="pt-BR" sz="1200" dirty="0"/>
+              <a:t>Ao atravessar o limite entre um objeto escuro e um fundo claro, a intensidade muda rapidamente.</a:t>
+            </a:r>
+          </a:p>
+          <a:p>
+            <a:pPr marL="171450" indent="-171450">
+              <a:buFont typeface="Arial" panose="020B0604020202020204" pitchFamily="34" charset="0"/>
+              <a:buChar char="•"/>
+            </a:pPr>
             <a:endParaRPr lang="pt-BR" b="0" dirty="0"/>
           </a:p>
         </p:txBody>
@@ -729,7 +770,7 @@
         <p:cNvPr id="1" name="">
           <a:extLst>
             <a:ext uri="{FF2B5EF4-FFF2-40B4-BE49-F238E27FC236}">
-              <a16:creationId xmlns:a16="http://schemas.microsoft.com/office/drawing/2014/main" id="{3B974C56-D4B8-DB47-86E7-DB7800CAD52F}"/>
+              <a16:creationId xmlns:a16="http://schemas.microsoft.com/office/drawing/2014/main" id="{61E21F11-59D7-BD6F-B0CA-4D7A41BACAD2}"/>
             </a:ext>
           </a:extLst>
         </p:cNvPr>
@@ -749,7 +790,7 @@
           <p:cNvPr id="2" name="Espaço Reservado para Imagem de Slide 1">
             <a:extLst>
               <a:ext uri="{FF2B5EF4-FFF2-40B4-BE49-F238E27FC236}">
-                <a16:creationId xmlns:a16="http://schemas.microsoft.com/office/drawing/2014/main" id="{9B6AAC08-AE73-660B-BAE7-1513299AB882}"/>
+                <a16:creationId xmlns:a16="http://schemas.microsoft.com/office/drawing/2014/main" id="{3027C2F0-320D-7874-6240-50FBB2591ACA}"/>
               </a:ext>
             </a:extLst>
           </p:cNvPr>
@@ -774,7 +815,7 @@
           <p:cNvPr id="3" name="Espaço Reservado para Anotações 2">
             <a:extLst>
               <a:ext uri="{FF2B5EF4-FFF2-40B4-BE49-F238E27FC236}">
-                <a16:creationId xmlns:a16="http://schemas.microsoft.com/office/drawing/2014/main" id="{08F312BA-556B-30E7-8265-679AD2A3D3E8}"/>
+                <a16:creationId xmlns:a16="http://schemas.microsoft.com/office/drawing/2014/main" id="{14821681-1DF6-DC2C-D18D-7C6D1B063526}"/>
               </a:ext>
             </a:extLst>
           </p:cNvPr>
@@ -790,7 +831,11 @@
           <a:bodyPr/>
           <a:lstStyle/>
           <a:p>
-            <a:endParaRPr lang="pt-BR" dirty="0"/>
+            <a:pPr marL="171450" indent="-171450">
+              <a:buFont typeface="Arial" panose="020B0604020202020204" pitchFamily="34" charset="0"/>
+              <a:buChar char="•"/>
+            </a:pPr>
+            <a:endParaRPr lang="pt-BR" b="0" dirty="0"/>
           </a:p>
         </p:txBody>
       </p:sp>
@@ -799,7 +844,7 @@
           <p:cNvPr id="4" name="Espaço Reservado para Número de Slide 3">
             <a:extLst>
               <a:ext uri="{FF2B5EF4-FFF2-40B4-BE49-F238E27FC236}">
-                <a16:creationId xmlns:a16="http://schemas.microsoft.com/office/drawing/2014/main" id="{C410BE6E-9254-DE6A-FBB8-750E9F377CC4}"/>
+                <a16:creationId xmlns:a16="http://schemas.microsoft.com/office/drawing/2014/main" id="{DF30C09C-E4CD-5E58-EABB-81B74CD5BD79}"/>
               </a:ext>
             </a:extLst>
           </p:cNvPr>
@@ -826,7 +871,561 @@
     </p:spTree>
     <p:extLst>
       <p:ext uri="{BB962C8B-B14F-4D97-AF65-F5344CB8AC3E}">
-        <p14:creationId xmlns:p14="http://schemas.microsoft.com/office/powerpoint/2010/main" val="267947010"/>
+        <p14:creationId xmlns:p14="http://schemas.microsoft.com/office/powerpoint/2010/main" val="578845372"/>
+      </p:ext>
+    </p:extLst>
+  </p:cSld>
+  <p:clrMapOvr>
+    <a:masterClrMapping/>
+  </p:clrMapOvr>
+</p:notes>
+</file>
+
+<file path=ppt/notesSlides/notesSlide12.xml><?xml version="1.0" encoding="utf-8"?>
+<p:notes xmlns:a="http://schemas.openxmlformats.org/drawingml/2006/main" xmlns:r="http://schemas.openxmlformats.org/officeDocument/2006/relationships" xmlns:p="http://schemas.openxmlformats.org/presentationml/2006/main">
+  <p:cSld>
+    <p:spTree>
+      <p:nvGrpSpPr>
+        <p:cNvPr id="1" name="">
+          <a:extLst>
+            <a:ext uri="{FF2B5EF4-FFF2-40B4-BE49-F238E27FC236}">
+              <a16:creationId xmlns:a16="http://schemas.microsoft.com/office/drawing/2014/main" id="{C987BBBB-7E0C-C83A-2F71-558EB5D33D2E}"/>
+            </a:ext>
+          </a:extLst>
+        </p:cNvPr>
+        <p:cNvGrpSpPr/>
+        <p:nvPr/>
+      </p:nvGrpSpPr>
+      <p:grpSpPr>
+        <a:xfrm>
+          <a:off x="0" y="0"/>
+          <a:ext cx="0" cy="0"/>
+          <a:chOff x="0" y="0"/>
+          <a:chExt cx="0" cy="0"/>
+        </a:xfrm>
+      </p:grpSpPr>
+      <p:sp>
+        <p:nvSpPr>
+          <p:cNvPr id="2" name="Espaço Reservado para Imagem de Slide 1">
+            <a:extLst>
+              <a:ext uri="{FF2B5EF4-FFF2-40B4-BE49-F238E27FC236}">
+                <a16:creationId xmlns:a16="http://schemas.microsoft.com/office/drawing/2014/main" id="{445A5662-B65B-990C-1EE2-19B901200FF4}"/>
+              </a:ext>
+            </a:extLst>
+          </p:cNvPr>
+          <p:cNvSpPr>
+            <a:spLocks noGrp="1" noRot="1" noChangeAspect="1"/>
+          </p:cNvSpPr>
+          <p:nvPr>
+            <p:ph type="sldImg"/>
+          </p:nvPr>
+        </p:nvSpPr>
+        <p:spPr/>
+        <p:txBody>
+          <a:bodyPr/>
+          <a:lstStyle/>
+          <a:p>
+            <a:endParaRPr lang="pt-BR"/>
+          </a:p>
+        </p:txBody>
+      </p:sp>
+      <p:sp>
+        <p:nvSpPr>
+          <p:cNvPr id="3" name="Espaço Reservado para Anotações 2">
+            <a:extLst>
+              <a:ext uri="{FF2B5EF4-FFF2-40B4-BE49-F238E27FC236}">
+                <a16:creationId xmlns:a16="http://schemas.microsoft.com/office/drawing/2014/main" id="{A4A494BB-4178-7732-B6F6-E6F493229906}"/>
+              </a:ext>
+            </a:extLst>
+          </p:cNvPr>
+          <p:cNvSpPr>
+            <a:spLocks noGrp="1"/>
+          </p:cNvSpPr>
+          <p:nvPr>
+            <p:ph type="body" idx="1"/>
+          </p:nvPr>
+        </p:nvSpPr>
+        <p:spPr/>
+        <p:txBody>
+          <a:bodyPr/>
+          <a:lstStyle/>
+          <a:p>
+            <a:pPr marL="171450" indent="-171450">
+              <a:buFont typeface="Arial" panose="020B0604020202020204" pitchFamily="34" charset="0"/>
+              <a:buChar char="•"/>
+            </a:pPr>
+            <a:r>
+              <a:rPr lang="pt-BR" dirty="0"/>
+              <a:t>Ele mede a diferença entre o valor de uma função em um ponto e a média dos valores dessa função ao redor desse ponto.</a:t>
+            </a:r>
+            <a:endParaRPr lang="pt-BR" b="0" dirty="0"/>
+          </a:p>
+        </p:txBody>
+      </p:sp>
+      <p:sp>
+        <p:nvSpPr>
+          <p:cNvPr id="4" name="Espaço Reservado para Número de Slide 3">
+            <a:extLst>
+              <a:ext uri="{FF2B5EF4-FFF2-40B4-BE49-F238E27FC236}">
+                <a16:creationId xmlns:a16="http://schemas.microsoft.com/office/drawing/2014/main" id="{2F8DE19C-B1DE-B0A9-5222-B7F39B91D7BA}"/>
+              </a:ext>
+            </a:extLst>
+          </p:cNvPr>
+          <p:cNvSpPr>
+            <a:spLocks noGrp="1"/>
+          </p:cNvSpPr>
+          <p:nvPr>
+            <p:ph type="sldNum" sz="quarter" idx="5"/>
+          </p:nvPr>
+        </p:nvSpPr>
+        <p:spPr/>
+        <p:txBody>
+          <a:bodyPr/>
+          <a:lstStyle/>
+          <a:p>
+            <a:fld id="{80F36A49-A1DD-40F8-B8AD-E6F5365256CB}" type="slidenum">
+              <a:rPr lang="pt-BR" smtClean="0"/>
+              <a:t>12</a:t>
+            </a:fld>
+            <a:endParaRPr lang="pt-BR"/>
+          </a:p>
+        </p:txBody>
+      </p:sp>
+    </p:spTree>
+    <p:extLst>
+      <p:ext uri="{BB962C8B-B14F-4D97-AF65-F5344CB8AC3E}">
+        <p14:creationId xmlns:p14="http://schemas.microsoft.com/office/powerpoint/2010/main" val="713664131"/>
+      </p:ext>
+    </p:extLst>
+  </p:cSld>
+  <p:clrMapOvr>
+    <a:masterClrMapping/>
+  </p:clrMapOvr>
+</p:notes>
+</file>
+
+<file path=ppt/notesSlides/notesSlide13.xml><?xml version="1.0" encoding="utf-8"?>
+<p:notes xmlns:a="http://schemas.openxmlformats.org/drawingml/2006/main" xmlns:r="http://schemas.openxmlformats.org/officeDocument/2006/relationships" xmlns:p="http://schemas.openxmlformats.org/presentationml/2006/main">
+  <p:cSld>
+    <p:spTree>
+      <p:nvGrpSpPr>
+        <p:cNvPr id="1" name="">
+          <a:extLst>
+            <a:ext uri="{FF2B5EF4-FFF2-40B4-BE49-F238E27FC236}">
+              <a16:creationId xmlns:a16="http://schemas.microsoft.com/office/drawing/2014/main" id="{E0BC7D69-3865-C280-AE9D-BB75074087EF}"/>
+            </a:ext>
+          </a:extLst>
+        </p:cNvPr>
+        <p:cNvGrpSpPr/>
+        <p:nvPr/>
+      </p:nvGrpSpPr>
+      <p:grpSpPr>
+        <a:xfrm>
+          <a:off x="0" y="0"/>
+          <a:ext cx="0" cy="0"/>
+          <a:chOff x="0" y="0"/>
+          <a:chExt cx="0" cy="0"/>
+        </a:xfrm>
+      </p:grpSpPr>
+      <p:sp>
+        <p:nvSpPr>
+          <p:cNvPr id="2" name="Espaço Reservado para Imagem de Slide 1">
+            <a:extLst>
+              <a:ext uri="{FF2B5EF4-FFF2-40B4-BE49-F238E27FC236}">
+                <a16:creationId xmlns:a16="http://schemas.microsoft.com/office/drawing/2014/main" id="{E90301BC-4AAE-0EAA-1E50-808D0A963680}"/>
+              </a:ext>
+            </a:extLst>
+          </p:cNvPr>
+          <p:cNvSpPr>
+            <a:spLocks noGrp="1" noRot="1" noChangeAspect="1"/>
+          </p:cNvSpPr>
+          <p:nvPr>
+            <p:ph type="sldImg"/>
+          </p:nvPr>
+        </p:nvSpPr>
+        <p:spPr/>
+        <p:txBody>
+          <a:bodyPr/>
+          <a:lstStyle/>
+          <a:p>
+            <a:endParaRPr lang="pt-BR"/>
+          </a:p>
+        </p:txBody>
+      </p:sp>
+      <p:sp>
+        <p:nvSpPr>
+          <p:cNvPr id="3" name="Espaço Reservado para Anotações 2">
+            <a:extLst>
+              <a:ext uri="{FF2B5EF4-FFF2-40B4-BE49-F238E27FC236}">
+                <a16:creationId xmlns:a16="http://schemas.microsoft.com/office/drawing/2014/main" id="{0B27E231-B836-63E8-4DD0-E2E346F0A55D}"/>
+              </a:ext>
+            </a:extLst>
+          </p:cNvPr>
+          <p:cNvSpPr>
+            <a:spLocks noGrp="1"/>
+          </p:cNvSpPr>
+          <p:nvPr>
+            <p:ph type="body" idx="1"/>
+          </p:nvPr>
+        </p:nvSpPr>
+        <p:spPr/>
+        <p:txBody>
+          <a:bodyPr/>
+          <a:lstStyle/>
+          <a:p>
+            <a:pPr marL="171450" indent="-171450">
+              <a:buFont typeface="Arial" panose="020B0604020202020204" pitchFamily="34" charset="0"/>
+              <a:buChar char="•"/>
+            </a:pPr>
+            <a:r>
+              <a:rPr lang="pt-BR" dirty="0"/>
+              <a:t>Ele mede a diferença entre o valor de uma função em um ponto e a média dos valores dessa função ao redor desse ponto.</a:t>
+            </a:r>
+          </a:p>
+          <a:p>
+            <a:pPr marL="171450" indent="-171450">
+              <a:buFont typeface="Arial" panose="020B0604020202020204" pitchFamily="34" charset="0"/>
+              <a:buChar char="•"/>
+            </a:pPr>
+            <a:endParaRPr lang="pt-BR" b="0" dirty="0"/>
+          </a:p>
+          <a:p>
+            <a:pPr marL="514350" indent="-514350">
+              <a:buFont typeface="+mj-lt"/>
+              <a:buAutoNum type="romanUcPeriod"/>
+            </a:pPr>
+            <a:r>
+              <a:rPr lang="pt-BR" sz="1200" dirty="0"/>
+              <a:t>Em uma região uniforme, a intensidade permanece constante.  </a:t>
+            </a:r>
+          </a:p>
+          <a:p>
+            <a:pPr marL="514350" indent="-514350">
+              <a:buFont typeface="+mj-lt"/>
+              <a:buAutoNum type="romanUcPeriod"/>
+            </a:pPr>
+            <a:r>
+              <a:rPr lang="pt-BR" sz="1200" dirty="0"/>
+              <a:t>Ao atravessar o limite entre um objeto escuro e um fundo claro, a intensidade muda rapidamente.</a:t>
+            </a:r>
+          </a:p>
+          <a:p>
+            <a:pPr marL="171450" indent="-171450">
+              <a:buFont typeface="Arial" panose="020B0604020202020204" pitchFamily="34" charset="0"/>
+              <a:buChar char="•"/>
+            </a:pPr>
+            <a:endParaRPr lang="pt-BR" b="0" dirty="0"/>
+          </a:p>
+        </p:txBody>
+      </p:sp>
+      <p:sp>
+        <p:nvSpPr>
+          <p:cNvPr id="4" name="Espaço Reservado para Número de Slide 3">
+            <a:extLst>
+              <a:ext uri="{FF2B5EF4-FFF2-40B4-BE49-F238E27FC236}">
+                <a16:creationId xmlns:a16="http://schemas.microsoft.com/office/drawing/2014/main" id="{464AB194-767C-D322-94B6-2D6A0209904B}"/>
+              </a:ext>
+            </a:extLst>
+          </p:cNvPr>
+          <p:cNvSpPr>
+            <a:spLocks noGrp="1"/>
+          </p:cNvSpPr>
+          <p:nvPr>
+            <p:ph type="sldNum" sz="quarter" idx="5"/>
+          </p:nvPr>
+        </p:nvSpPr>
+        <p:spPr/>
+        <p:txBody>
+          <a:bodyPr/>
+          <a:lstStyle/>
+          <a:p>
+            <a:fld id="{80F36A49-A1DD-40F8-B8AD-E6F5365256CB}" type="slidenum">
+              <a:rPr lang="pt-BR" smtClean="0"/>
+              <a:t>13</a:t>
+            </a:fld>
+            <a:endParaRPr lang="pt-BR"/>
+          </a:p>
+        </p:txBody>
+      </p:sp>
+    </p:spTree>
+    <p:extLst>
+      <p:ext uri="{BB962C8B-B14F-4D97-AF65-F5344CB8AC3E}">
+        <p14:creationId xmlns:p14="http://schemas.microsoft.com/office/powerpoint/2010/main" val="3329122009"/>
+      </p:ext>
+    </p:extLst>
+  </p:cSld>
+  <p:clrMapOvr>
+    <a:masterClrMapping/>
+  </p:clrMapOvr>
+</p:notes>
+</file>
+
+<file path=ppt/notesSlides/notesSlide14.xml><?xml version="1.0" encoding="utf-8"?>
+<p:notes xmlns:a="http://schemas.openxmlformats.org/drawingml/2006/main" xmlns:r="http://schemas.openxmlformats.org/officeDocument/2006/relationships" xmlns:p="http://schemas.openxmlformats.org/presentationml/2006/main">
+  <p:cSld>
+    <p:spTree>
+      <p:nvGrpSpPr>
+        <p:cNvPr id="1" name="">
+          <a:extLst>
+            <a:ext uri="{FF2B5EF4-FFF2-40B4-BE49-F238E27FC236}">
+              <a16:creationId xmlns:a16="http://schemas.microsoft.com/office/drawing/2014/main" id="{44DE0404-1FFF-E8C6-924E-C5351C5802DC}"/>
+            </a:ext>
+          </a:extLst>
+        </p:cNvPr>
+        <p:cNvGrpSpPr/>
+        <p:nvPr/>
+      </p:nvGrpSpPr>
+      <p:grpSpPr>
+        <a:xfrm>
+          <a:off x="0" y="0"/>
+          <a:ext cx="0" cy="0"/>
+          <a:chOff x="0" y="0"/>
+          <a:chExt cx="0" cy="0"/>
+        </a:xfrm>
+      </p:grpSpPr>
+      <p:sp>
+        <p:nvSpPr>
+          <p:cNvPr id="2" name="Espaço Reservado para Imagem de Slide 1">
+            <a:extLst>
+              <a:ext uri="{FF2B5EF4-FFF2-40B4-BE49-F238E27FC236}">
+                <a16:creationId xmlns:a16="http://schemas.microsoft.com/office/drawing/2014/main" id="{84992B2B-9F74-EEF3-30CD-3FC4E77F3EC1}"/>
+              </a:ext>
+            </a:extLst>
+          </p:cNvPr>
+          <p:cNvSpPr>
+            <a:spLocks noGrp="1" noRot="1" noChangeAspect="1"/>
+          </p:cNvSpPr>
+          <p:nvPr>
+            <p:ph type="sldImg"/>
+          </p:nvPr>
+        </p:nvSpPr>
+        <p:spPr/>
+        <p:txBody>
+          <a:bodyPr/>
+          <a:lstStyle/>
+          <a:p>
+            <a:endParaRPr lang="pt-BR"/>
+          </a:p>
+        </p:txBody>
+      </p:sp>
+      <p:sp>
+        <p:nvSpPr>
+          <p:cNvPr id="3" name="Espaço Reservado para Anotações 2">
+            <a:extLst>
+              <a:ext uri="{FF2B5EF4-FFF2-40B4-BE49-F238E27FC236}">
+                <a16:creationId xmlns:a16="http://schemas.microsoft.com/office/drawing/2014/main" id="{A52FFCFF-A0F1-25CE-1467-C9E3B5B1DA46}"/>
+              </a:ext>
+            </a:extLst>
+          </p:cNvPr>
+          <p:cNvSpPr>
+            <a:spLocks noGrp="1"/>
+          </p:cNvSpPr>
+          <p:nvPr>
+            <p:ph type="body" idx="1"/>
+          </p:nvPr>
+        </p:nvSpPr>
+        <p:spPr/>
+        <p:txBody>
+          <a:bodyPr/>
+          <a:lstStyle/>
+          <a:p>
+            <a:pPr marL="171450" indent="-171450">
+              <a:buFont typeface="Arial" panose="020B0604020202020204" pitchFamily="34" charset="0"/>
+              <a:buChar char="•"/>
+            </a:pPr>
+            <a:r>
+              <a:rPr lang="pt-BR" dirty="0"/>
+              <a:t>Ele mede a diferença entre o valor de uma função em um ponto e a média dos valores dessa função ao redor desse ponto.</a:t>
+            </a:r>
+          </a:p>
+          <a:p>
+            <a:pPr marL="171450" indent="-171450">
+              <a:buFont typeface="Arial" panose="020B0604020202020204" pitchFamily="34" charset="0"/>
+              <a:buChar char="•"/>
+            </a:pPr>
+            <a:endParaRPr lang="pt-BR" b="0" dirty="0"/>
+          </a:p>
+          <a:p>
+            <a:pPr marL="514350" indent="-514350">
+              <a:buFont typeface="+mj-lt"/>
+              <a:buAutoNum type="romanUcPeriod"/>
+            </a:pPr>
+            <a:r>
+              <a:rPr lang="pt-BR" sz="1200" dirty="0"/>
+              <a:t>Em uma região uniforme, a intensidade permanece constante.  </a:t>
+            </a:r>
+          </a:p>
+          <a:p>
+            <a:pPr marL="514350" indent="-514350">
+              <a:buFont typeface="+mj-lt"/>
+              <a:buAutoNum type="romanUcPeriod"/>
+            </a:pPr>
+            <a:r>
+              <a:rPr lang="pt-BR" sz="1200" dirty="0"/>
+              <a:t>Ao atravessar o limite entre um objeto escuro e um fundo claro, a intensidade muda rapidamente.</a:t>
+            </a:r>
+          </a:p>
+          <a:p>
+            <a:pPr marL="171450" indent="-171450">
+              <a:buFont typeface="Arial" panose="020B0604020202020204" pitchFamily="34" charset="0"/>
+              <a:buChar char="•"/>
+            </a:pPr>
+            <a:endParaRPr lang="pt-BR" b="0" dirty="0"/>
+          </a:p>
+        </p:txBody>
+      </p:sp>
+      <p:sp>
+        <p:nvSpPr>
+          <p:cNvPr id="4" name="Espaço Reservado para Número de Slide 3">
+            <a:extLst>
+              <a:ext uri="{FF2B5EF4-FFF2-40B4-BE49-F238E27FC236}">
+                <a16:creationId xmlns:a16="http://schemas.microsoft.com/office/drawing/2014/main" id="{73918235-F018-3232-C88E-BD456E9AC2F8}"/>
+              </a:ext>
+            </a:extLst>
+          </p:cNvPr>
+          <p:cNvSpPr>
+            <a:spLocks noGrp="1"/>
+          </p:cNvSpPr>
+          <p:nvPr>
+            <p:ph type="sldNum" sz="quarter" idx="5"/>
+          </p:nvPr>
+        </p:nvSpPr>
+        <p:spPr/>
+        <p:txBody>
+          <a:bodyPr/>
+          <a:lstStyle/>
+          <a:p>
+            <a:fld id="{80F36A49-A1DD-40F8-B8AD-E6F5365256CB}" type="slidenum">
+              <a:rPr lang="pt-BR" smtClean="0"/>
+              <a:t>14</a:t>
+            </a:fld>
+            <a:endParaRPr lang="pt-BR"/>
+          </a:p>
+        </p:txBody>
+      </p:sp>
+    </p:spTree>
+    <p:extLst>
+      <p:ext uri="{BB962C8B-B14F-4D97-AF65-F5344CB8AC3E}">
+        <p14:creationId xmlns:p14="http://schemas.microsoft.com/office/powerpoint/2010/main" val="1674519386"/>
+      </p:ext>
+    </p:extLst>
+  </p:cSld>
+  <p:clrMapOvr>
+    <a:masterClrMapping/>
+  </p:clrMapOvr>
+</p:notes>
+</file>
+
+<file path=ppt/notesSlides/notesSlide15.xml><?xml version="1.0" encoding="utf-8"?>
+<p:notes xmlns:a="http://schemas.openxmlformats.org/drawingml/2006/main" xmlns:r="http://schemas.openxmlformats.org/officeDocument/2006/relationships" xmlns:p="http://schemas.openxmlformats.org/presentationml/2006/main">
+  <p:cSld>
+    <p:spTree>
+      <p:nvGrpSpPr>
+        <p:cNvPr id="1" name="">
+          <a:extLst>
+            <a:ext uri="{FF2B5EF4-FFF2-40B4-BE49-F238E27FC236}">
+              <a16:creationId xmlns:a16="http://schemas.microsoft.com/office/drawing/2014/main" id="{1F03724A-E03F-431A-E442-6148A6C4E347}"/>
+            </a:ext>
+          </a:extLst>
+        </p:cNvPr>
+        <p:cNvGrpSpPr/>
+        <p:nvPr/>
+      </p:nvGrpSpPr>
+      <p:grpSpPr>
+        <a:xfrm>
+          <a:off x="0" y="0"/>
+          <a:ext cx="0" cy="0"/>
+          <a:chOff x="0" y="0"/>
+          <a:chExt cx="0" cy="0"/>
+        </a:xfrm>
+      </p:grpSpPr>
+      <p:sp>
+        <p:nvSpPr>
+          <p:cNvPr id="2" name="Espaço Reservado para Imagem de Slide 1">
+            <a:extLst>
+              <a:ext uri="{FF2B5EF4-FFF2-40B4-BE49-F238E27FC236}">
+                <a16:creationId xmlns:a16="http://schemas.microsoft.com/office/drawing/2014/main" id="{2160C610-F06C-8123-CE72-562CD67742E3}"/>
+              </a:ext>
+            </a:extLst>
+          </p:cNvPr>
+          <p:cNvSpPr>
+            <a:spLocks noGrp="1" noRot="1" noChangeAspect="1"/>
+          </p:cNvSpPr>
+          <p:nvPr>
+            <p:ph type="sldImg"/>
+          </p:nvPr>
+        </p:nvSpPr>
+        <p:spPr/>
+        <p:txBody>
+          <a:bodyPr/>
+          <a:lstStyle/>
+          <a:p>
+            <a:endParaRPr lang="pt-BR"/>
+          </a:p>
+        </p:txBody>
+      </p:sp>
+      <p:sp>
+        <p:nvSpPr>
+          <p:cNvPr id="3" name="Espaço Reservado para Anotações 2">
+            <a:extLst>
+              <a:ext uri="{FF2B5EF4-FFF2-40B4-BE49-F238E27FC236}">
+                <a16:creationId xmlns:a16="http://schemas.microsoft.com/office/drawing/2014/main" id="{58006D89-1F46-85F4-413C-B9D2BB4EAC13}"/>
+              </a:ext>
+            </a:extLst>
+          </p:cNvPr>
+          <p:cNvSpPr>
+            <a:spLocks noGrp="1"/>
+          </p:cNvSpPr>
+          <p:nvPr>
+            <p:ph type="body" idx="1"/>
+          </p:nvPr>
+        </p:nvSpPr>
+        <p:spPr/>
+        <p:txBody>
+          <a:bodyPr/>
+          <a:lstStyle/>
+          <a:p>
+            <a:pPr marL="171450" indent="-171450">
+              <a:buFont typeface="Arial" panose="020B0604020202020204" pitchFamily="34" charset="0"/>
+              <a:buChar char="•"/>
+            </a:pPr>
+            <a:endParaRPr lang="pt-BR" b="0" dirty="0"/>
+          </a:p>
+        </p:txBody>
+      </p:sp>
+      <p:sp>
+        <p:nvSpPr>
+          <p:cNvPr id="4" name="Espaço Reservado para Número de Slide 3">
+            <a:extLst>
+              <a:ext uri="{FF2B5EF4-FFF2-40B4-BE49-F238E27FC236}">
+                <a16:creationId xmlns:a16="http://schemas.microsoft.com/office/drawing/2014/main" id="{935C6AC3-C713-FAAF-698A-C2924D6B3923}"/>
+              </a:ext>
+            </a:extLst>
+          </p:cNvPr>
+          <p:cNvSpPr>
+            <a:spLocks noGrp="1"/>
+          </p:cNvSpPr>
+          <p:nvPr>
+            <p:ph type="sldNum" sz="quarter" idx="5"/>
+          </p:nvPr>
+        </p:nvSpPr>
+        <p:spPr/>
+        <p:txBody>
+          <a:bodyPr/>
+          <a:lstStyle/>
+          <a:p>
+            <a:fld id="{80F36A49-A1DD-40F8-B8AD-E6F5365256CB}" type="slidenum">
+              <a:rPr lang="pt-BR" smtClean="0"/>
+              <a:t>15</a:t>
+            </a:fld>
+            <a:endParaRPr lang="pt-BR"/>
+          </a:p>
+        </p:txBody>
+      </p:sp>
+    </p:spTree>
+    <p:extLst>
+      <p:ext uri="{BB962C8B-B14F-4D97-AF65-F5344CB8AC3E}">
+        <p14:creationId xmlns:p14="http://schemas.microsoft.com/office/powerpoint/2010/main" val="2656215203"/>
       </p:ext>
     </p:extLst>
   </p:cSld>
@@ -1935,7 +2534,7 @@
           <a:p>
             <a:fld id="{A87E3B6E-8316-4A1C-BADA-DB7F3456EEF1}" type="datetimeFigureOut">
               <a:rPr lang="pt-BR" smtClean="0"/>
-              <a:t>17/10/2026</a:t>
+              <a:t>21/10/2026</a:t>
             </a:fld>
             <a:endParaRPr lang="pt-BR"/>
           </a:p>
@@ -2133,7 +2732,7 @@
           <a:p>
             <a:fld id="{A87E3B6E-8316-4A1C-BADA-DB7F3456EEF1}" type="datetimeFigureOut">
               <a:rPr lang="pt-BR" smtClean="0"/>
-              <a:t>17/10/2026</a:t>
+              <a:t>21/10/2026</a:t>
             </a:fld>
             <a:endParaRPr lang="pt-BR"/>
           </a:p>
@@ -2341,7 +2940,7 @@
           <a:p>
             <a:fld id="{A87E3B6E-8316-4A1C-BADA-DB7F3456EEF1}" type="datetimeFigureOut">
               <a:rPr lang="pt-BR" smtClean="0"/>
-              <a:t>17/10/2026</a:t>
+              <a:t>21/10/2026</a:t>
             </a:fld>
             <a:endParaRPr lang="pt-BR"/>
           </a:p>
@@ -2577,7 +3176,7 @@
           <a:p>
             <a:fld id="{A87E3B6E-8316-4A1C-BADA-DB7F3456EEF1}" type="datetimeFigureOut">
               <a:rPr lang="pt-BR" smtClean="0"/>
-              <a:t>17/10/2026</a:t>
+              <a:t>21/10/2026</a:t>
             </a:fld>
             <a:endParaRPr lang="pt-BR"/>
           </a:p>
@@ -2747,7 +3346,7 @@
           <a:p>
             <a:fld id="{A87E3B6E-8316-4A1C-BADA-DB7F3456EEF1}" type="datetimeFigureOut">
               <a:rPr lang="pt-BR" smtClean="0"/>
-              <a:t>17/10/2026</a:t>
+              <a:t>21/10/2026</a:t>
             </a:fld>
             <a:endParaRPr lang="pt-BR"/>
           </a:p>
@@ -3015,7 +3614,7 @@
           <a:p>
             <a:fld id="{A87E3B6E-8316-4A1C-BADA-DB7F3456EEF1}" type="datetimeFigureOut">
               <a:rPr lang="pt-BR" smtClean="0"/>
-              <a:t>17/10/2026</a:t>
+              <a:t>21/10/2026</a:t>
             </a:fld>
             <a:endParaRPr lang="pt-BR"/>
           </a:p>
@@ -3247,7 +3846,7 @@
           <a:p>
             <a:fld id="{A87E3B6E-8316-4A1C-BADA-DB7F3456EEF1}" type="datetimeFigureOut">
               <a:rPr lang="pt-BR" smtClean="0"/>
-              <a:t>17/10/2026</a:t>
+              <a:t>21/10/2026</a:t>
             </a:fld>
             <a:endParaRPr lang="pt-BR"/>
           </a:p>
@@ -3602,7 +4201,7 @@
           <a:p>
             <a:fld id="{A87E3B6E-8316-4A1C-BADA-DB7F3456EEF1}" type="datetimeFigureOut">
               <a:rPr lang="pt-BR" smtClean="0"/>
-              <a:t>17/10/2026</a:t>
+              <a:t>21/10/2026</a:t>
             </a:fld>
             <a:endParaRPr lang="pt-BR"/>
           </a:p>
@@ -3743,7 +4342,7 @@
           <a:p>
             <a:fld id="{A87E3B6E-8316-4A1C-BADA-DB7F3456EEF1}" type="datetimeFigureOut">
               <a:rPr lang="pt-BR" smtClean="0"/>
-              <a:t>17/10/2026</a:t>
+              <a:t>21/10/2026</a:t>
             </a:fld>
             <a:endParaRPr lang="pt-BR"/>
           </a:p>
@@ -3838,7 +4437,7 @@
           <a:p>
             <a:fld id="{A87E3B6E-8316-4A1C-BADA-DB7F3456EEF1}" type="datetimeFigureOut">
               <a:rPr lang="pt-BR" smtClean="0"/>
-              <a:t>17/10/2026</a:t>
+              <a:t>21/10/2026</a:t>
             </a:fld>
             <a:endParaRPr lang="pt-BR"/>
           </a:p>
@@ -4202,7 +4801,7 @@
           <a:p>
             <a:fld id="{A87E3B6E-8316-4A1C-BADA-DB7F3456EEF1}" type="datetimeFigureOut">
               <a:rPr lang="pt-BR" smtClean="0"/>
-              <a:t>17/10/2026</a:t>
+              <a:t>21/10/2026</a:t>
             </a:fld>
             <a:endParaRPr lang="pt-BR"/>
           </a:p>
@@ -4403,7 +5002,7 @@
           <a:p>
             <a:fld id="{A87E3B6E-8316-4A1C-BADA-DB7F3456EEF1}" type="datetimeFigureOut">
               <a:rPr lang="pt-BR" smtClean="0"/>
-              <a:t>17/10/2026</a:t>
+              <a:t>21/10/2026</a:t>
             </a:fld>
             <a:endParaRPr lang="pt-BR"/>
           </a:p>
@@ -4763,7 +5362,7 @@
           <a:p>
             <a:fld id="{A87E3B6E-8316-4A1C-BADA-DB7F3456EEF1}" type="datetimeFigureOut">
               <a:rPr lang="pt-BR" smtClean="0"/>
-              <a:t>17/10/2026</a:t>
+              <a:t>21/10/2026</a:t>
             </a:fld>
             <a:endParaRPr lang="pt-BR"/>
           </a:p>
@@ -4948,7 +5547,7 @@
           <a:p>
             <a:fld id="{A87E3B6E-8316-4A1C-BADA-DB7F3456EEF1}" type="datetimeFigureOut">
               <a:rPr lang="pt-BR" smtClean="0"/>
-              <a:t>17/10/2026</a:t>
+              <a:t>21/10/2026</a:t>
             </a:fld>
             <a:endParaRPr lang="pt-BR"/>
           </a:p>
@@ -5128,7 +5727,7 @@
           <a:p>
             <a:fld id="{A87E3B6E-8316-4A1C-BADA-DB7F3456EEF1}" type="datetimeFigureOut">
               <a:rPr lang="pt-BR" smtClean="0"/>
-              <a:t>17/10/2026</a:t>
+              <a:t>21/10/2026</a:t>
             </a:fld>
             <a:endParaRPr lang="pt-BR"/>
           </a:p>
@@ -5391,7 +5990,7 @@
           <a:p>
             <a:fld id="{A87E3B6E-8316-4A1C-BADA-DB7F3456EEF1}" type="datetimeFigureOut">
               <a:rPr lang="pt-BR" smtClean="0"/>
-              <a:t>17/10/2026</a:t>
+              <a:t>21/10/2026</a:t>
             </a:fld>
             <a:endParaRPr lang="pt-BR"/>
           </a:p>
@@ -5656,7 +6255,7 @@
           <a:p>
             <a:fld id="{A87E3B6E-8316-4A1C-BADA-DB7F3456EEF1}" type="datetimeFigureOut">
               <a:rPr lang="pt-BR" smtClean="0"/>
-              <a:t>17/10/2026</a:t>
+              <a:t>21/10/2026</a:t>
             </a:fld>
             <a:endParaRPr lang="pt-BR"/>
           </a:p>
@@ -6068,7 +6667,7 @@
           <a:p>
             <a:fld id="{A87E3B6E-8316-4A1C-BADA-DB7F3456EEF1}" type="datetimeFigureOut">
               <a:rPr lang="pt-BR" smtClean="0"/>
-              <a:t>17/10/2026</a:t>
+              <a:t>21/10/2026</a:t>
             </a:fld>
             <a:endParaRPr lang="pt-BR"/>
           </a:p>
@@ -6209,7 +6808,7 @@
           <a:p>
             <a:fld id="{A87E3B6E-8316-4A1C-BADA-DB7F3456EEF1}" type="datetimeFigureOut">
               <a:rPr lang="pt-BR" smtClean="0"/>
-              <a:t>17/10/2026</a:t>
+              <a:t>21/10/2026</a:t>
             </a:fld>
             <a:endParaRPr lang="pt-BR"/>
           </a:p>
@@ -6322,7 +6921,7 @@
           <a:p>
             <a:fld id="{A87E3B6E-8316-4A1C-BADA-DB7F3456EEF1}" type="datetimeFigureOut">
               <a:rPr lang="pt-BR" smtClean="0"/>
-              <a:t>17/10/2026</a:t>
+              <a:t>21/10/2026</a:t>
             </a:fld>
             <a:endParaRPr lang="pt-BR"/>
           </a:p>
@@ -6633,7 +7232,7 @@
           <a:p>
             <a:fld id="{A87E3B6E-8316-4A1C-BADA-DB7F3456EEF1}" type="datetimeFigureOut">
               <a:rPr lang="pt-BR" smtClean="0"/>
-              <a:t>17/10/2026</a:t>
+              <a:t>21/10/2026</a:t>
             </a:fld>
             <a:endParaRPr lang="pt-BR"/>
           </a:p>
@@ -6921,7 +7520,7 @@
           <a:p>
             <a:fld id="{A87E3B6E-8316-4A1C-BADA-DB7F3456EEF1}" type="datetimeFigureOut">
               <a:rPr lang="pt-BR" smtClean="0"/>
-              <a:t>17/10/2026</a:t>
+              <a:t>21/10/2026</a:t>
             </a:fld>
             <a:endParaRPr lang="pt-BR"/>
           </a:p>
@@ -7162,7 +7761,7 @@
           <a:p>
             <a:fld id="{A87E3B6E-8316-4A1C-BADA-DB7F3456EEF1}" type="datetimeFigureOut">
               <a:rPr lang="pt-BR" smtClean="0"/>
-              <a:t>17/10/2026</a:t>
+              <a:t>21/10/2026</a:t>
             </a:fld>
             <a:endParaRPr lang="pt-BR"/>
           </a:p>
@@ -7726,7 +8325,7 @@
           <a:p>
             <a:fld id="{A87E3B6E-8316-4A1C-BADA-DB7F3456EEF1}" type="datetimeFigureOut">
               <a:rPr lang="pt-BR" smtClean="0"/>
-              <a:t>17/10/2026</a:t>
+              <a:t>21/10/2026</a:t>
             </a:fld>
             <a:endParaRPr lang="pt-BR"/>
           </a:p>
@@ -8486,39 +9085,210 @@
           </a:p>
         </p:txBody>
       </p:sp>
-      <p:sp>
-        <p:nvSpPr>
-          <p:cNvPr id="6" name="Espaço Reservado para Conteúdo 5">
-            <a:extLst>
-              <a:ext uri="{FF2B5EF4-FFF2-40B4-BE49-F238E27FC236}">
-                <a16:creationId xmlns:a16="http://schemas.microsoft.com/office/drawing/2014/main" id="{83E7F139-EFF8-8953-93F9-BA73F8E68666}"/>
-              </a:ext>
-            </a:extLst>
-          </p:cNvPr>
-          <p:cNvSpPr>
-            <a:spLocks noGrp="1"/>
-          </p:cNvSpPr>
-          <p:nvPr>
-            <p:ph idx="1"/>
-          </p:nvPr>
-        </p:nvSpPr>
+      <mc:AlternateContent xmlns:mc="http://schemas.openxmlformats.org/markup-compatibility/2006">
+        <mc:Choice xmlns:a14="http://schemas.microsoft.com/office/drawing/2010/main" Requires="a14">
+          <p:sp>
+            <p:nvSpPr>
+              <p:cNvPr id="6" name="Espaço Reservado para Conteúdo 5">
+                <a:extLst>
+                  <a:ext uri="{FF2B5EF4-FFF2-40B4-BE49-F238E27FC236}">
+                    <a16:creationId xmlns:a16="http://schemas.microsoft.com/office/drawing/2014/main" id="{83E7F139-EFF8-8953-93F9-BA73F8E68666}"/>
+                  </a:ext>
+                </a:extLst>
+              </p:cNvPr>
+              <p:cNvSpPr>
+                <a:spLocks noGrp="1"/>
+              </p:cNvSpPr>
+              <p:nvPr>
+                <p:ph idx="1"/>
+              </p:nvPr>
+            </p:nvSpPr>
+            <p:spPr>
+              <a:xfrm>
+                <a:off x="125826" y="1870037"/>
+                <a:ext cx="6743060" cy="4593771"/>
+              </a:xfrm>
+            </p:spPr>
+            <p:txBody>
+              <a:bodyPr>
+                <a:normAutofit/>
+              </a:bodyPr>
+              <a:lstStyle/>
+              <a:p>
+                <a:pPr algn="just"/>
+                <a:r>
+                  <a:rPr lang="pt-BR" sz="2200" dirty="0"/>
+                  <a:t>O Laplaciano é um operador de segunda derivada aplicado sobre a função de intensidade de uma imagem</a:t>
+                </a:r>
+              </a:p>
+              <a:p>
+                <a:pPr algn="just"/>
+                <a:endParaRPr lang="pt-BR" sz="2200" i="1" dirty="0"/>
+              </a:p>
+              <a:p>
+                <a:pPr marL="0" indent="0" algn="ctr">
+                  <a:buNone/>
+                </a:pPr>
+                <a14:m>
+                  <m:oMath xmlns:m="http://schemas.openxmlformats.org/officeDocument/2006/math">
+                    <m:r>
+                      <a:rPr lang="pt-BR" sz="2400" b="0" i="1" smtClean="0">
+                        <a:latin typeface="Cambria Math" panose="02040503050406030204" pitchFamily="18" charset="0"/>
+                      </a:rPr>
+                      <m:t>𝐼</m:t>
+                    </m:r>
+                    <m:r>
+                      <a:rPr lang="pt-BR" sz="2400" b="0" i="1" smtClean="0">
+                        <a:latin typeface="Cambria Math" panose="02040503050406030204" pitchFamily="18" charset="0"/>
+                      </a:rPr>
+                      <m:t>(</m:t>
+                    </m:r>
+                    <m:r>
+                      <a:rPr lang="pt-BR" sz="2400" b="0" i="1" smtClean="0">
+                        <a:latin typeface="Cambria Math" panose="02040503050406030204" pitchFamily="18" charset="0"/>
+                      </a:rPr>
+                      <m:t>𝑥</m:t>
+                    </m:r>
+                    <m:r>
+                      <a:rPr lang="pt-BR" sz="2400" b="0" i="1" smtClean="0">
+                        <a:latin typeface="Cambria Math" panose="02040503050406030204" pitchFamily="18" charset="0"/>
+                      </a:rPr>
+                      <m:t>,</m:t>
+                    </m:r>
+                    <m:r>
+                      <a:rPr lang="pt-BR" sz="2400" b="0" i="1" smtClean="0">
+                        <a:latin typeface="Cambria Math" panose="02040503050406030204" pitchFamily="18" charset="0"/>
+                      </a:rPr>
+                      <m:t>𝑦</m:t>
+                    </m:r>
+                    <m:r>
+                      <a:rPr lang="pt-BR" sz="2400" b="0" i="1" smtClean="0">
+                        <a:latin typeface="Cambria Math" panose="02040503050406030204" pitchFamily="18" charset="0"/>
+                      </a:rPr>
+                      <m:t>)</m:t>
+                    </m:r>
+                  </m:oMath>
+                </a14:m>
+                <a:r>
+                  <a:rPr lang="pt-BR" sz="2400" i="1" dirty="0"/>
+                  <a:t> </a:t>
+                </a:r>
+                <a:r>
+                  <a:rPr lang="pt-BR" sz="2400" i="1" dirty="0">
+                    <a:sym typeface="Wingdings" panose="05000000000000000000" pitchFamily="2" charset="2"/>
+                  </a:rPr>
+                  <a:t> Função de intensidade</a:t>
+                </a:r>
+                <a:endParaRPr lang="pt-BR" sz="2400" i="1" dirty="0"/>
+              </a:p>
+              <a:p>
+                <a:pPr algn="just"/>
+                <a:endParaRPr lang="pt-BR" sz="2200" i="1" dirty="0"/>
+              </a:p>
+              <a:p>
+                <a:pPr algn="just"/>
+                <a:r>
+                  <a:rPr lang="pt-BR" sz="2200" dirty="0"/>
+                  <a:t>O filtro mede a diferença entre o valor de uma função em um ponto e a média dos valores dessa função ao redor desse ponto.</a:t>
+                </a:r>
+              </a:p>
+              <a:p>
+                <a:pPr marL="0" indent="0">
+                  <a:buNone/>
+                </a:pPr>
+                <a:endParaRPr lang="pt-BR" sz="2200" dirty="0"/>
+              </a:p>
+              <a:p>
+                <a:r>
+                  <a:rPr lang="pt-BR" sz="2200" dirty="0"/>
+                  <a:t>Para detectar essas mudanças, utilizamos </a:t>
+                </a:r>
+                <a:r>
+                  <a:rPr lang="pt-BR" sz="2200" u="sng" dirty="0"/>
+                  <a:t>derivadas</a:t>
+                </a:r>
+              </a:p>
+              <a:p>
+                <a:pPr algn="just"/>
+                <a:endParaRPr lang="pt-BR" sz="2200" i="1" dirty="0"/>
+              </a:p>
+            </p:txBody>
+          </p:sp>
+        </mc:Choice>
+        <mc:Fallback>
+          <p:sp>
+            <p:nvSpPr>
+              <p:cNvPr id="6" name="Espaço Reservado para Conteúdo 5">
+                <a:extLst>
+                  <a:ext uri="{FF2B5EF4-FFF2-40B4-BE49-F238E27FC236}">
+                    <a16:creationId xmlns:a16="http://schemas.microsoft.com/office/drawing/2014/main" id="{83E7F139-EFF8-8953-93F9-BA73F8E68666}"/>
+                  </a:ext>
+                </a:extLst>
+              </p:cNvPr>
+              <p:cNvSpPr>
+                <a:spLocks noGrp="1" noRot="1" noChangeAspect="1" noMove="1" noResize="1" noEditPoints="1" noAdjustHandles="1" noChangeArrowheads="1" noChangeShapeType="1" noTextEdit="1"/>
+              </p:cNvSpPr>
+              <p:nvPr>
+                <p:ph idx="1"/>
+              </p:nvPr>
+            </p:nvSpPr>
+            <p:spPr>
+              <a:xfrm>
+                <a:off x="125826" y="1870037"/>
+                <a:ext cx="6743060" cy="4593771"/>
+              </a:xfrm>
+              <a:blipFill>
+                <a:blip r:embed="rId3"/>
+                <a:stretch>
+                  <a:fillRect l="-1085" t="-1726" r="-1175"/>
+                </a:stretch>
+              </a:blipFill>
+            </p:spPr>
+            <p:txBody>
+              <a:bodyPr/>
+              <a:lstStyle/>
+              <a:p>
+                <a:r>
+                  <a:rPr lang="pt-BR">
+                    <a:noFill/>
+                  </a:rPr>
+                  <a:t> </a:t>
+                </a:r>
+              </a:p>
+            </p:txBody>
+          </p:sp>
+        </mc:Fallback>
+      </mc:AlternateContent>
+      <p:pic>
+        <p:nvPicPr>
+          <p:cNvPr id="3" name="Imagem 2">
+            <a:extLst>
+              <a:ext uri="{FF2B5EF4-FFF2-40B4-BE49-F238E27FC236}">
+                <a16:creationId xmlns:a16="http://schemas.microsoft.com/office/drawing/2014/main" id="{9C1C62BF-D507-FC27-51BA-97694D8CCAE6}"/>
+              </a:ext>
+            </a:extLst>
+          </p:cNvPr>
+          <p:cNvPicPr>
+            <a:picLocks noChangeAspect="1"/>
+          </p:cNvPicPr>
+          <p:nvPr/>
+        </p:nvPicPr>
+        <p:blipFill>
+          <a:blip r:embed="rId4"/>
+          <a:stretch>
+            <a:fillRect/>
+          </a:stretch>
+        </p:blipFill>
         <p:spPr>
           <a:xfrm>
-            <a:off x="321769" y="1541161"/>
-            <a:ext cx="8680717" cy="5142668"/>
+            <a:off x="7315673" y="2013857"/>
+            <a:ext cx="4750501" cy="4049486"/>
           </a:xfrm>
+          <a:prstGeom prst="rect">
+            <a:avLst/>
+          </a:prstGeom>
         </p:spPr>
-        <p:txBody>
-          <a:bodyPr>
-            <a:normAutofit/>
-          </a:bodyPr>
-          <a:lstStyle/>
-          <a:p>
-            <a:pPr algn="just"/>
-            <a:endParaRPr lang="pt-BR" sz="2200" dirty="0"/>
-          </a:p>
-        </p:txBody>
-      </p:sp>
+      </p:pic>
     </p:spTree>
     <p:extLst>
       <p:ext uri="{BB962C8B-B14F-4D97-AF65-F5344CB8AC3E}">
@@ -8540,7 +9310,7 @@
         <p:cNvPr id="1" name="">
           <a:extLst>
             <a:ext uri="{FF2B5EF4-FFF2-40B4-BE49-F238E27FC236}">
-              <a16:creationId xmlns:a16="http://schemas.microsoft.com/office/drawing/2014/main" id="{8C4C2815-8139-EF80-2958-B8F8BEAC18C9}"/>
+              <a16:creationId xmlns:a16="http://schemas.microsoft.com/office/drawing/2014/main" id="{1DF4C5B5-6F30-AE09-BCDB-E5AD04B15B74}"/>
             </a:ext>
           </a:extLst>
         </p:cNvPr>
@@ -8557,114 +9327,114 @@
       </p:grpSpPr>
       <p:sp>
         <p:nvSpPr>
-          <p:cNvPr id="2" name="Título 1">
-            <a:extLst>
-              <a:ext uri="{FF2B5EF4-FFF2-40B4-BE49-F238E27FC236}">
-                <a16:creationId xmlns:a16="http://schemas.microsoft.com/office/drawing/2014/main" id="{F24E6A63-8555-F62B-4E66-81EDEADB8161}"/>
-              </a:ext>
-            </a:extLst>
-          </p:cNvPr>
-          <p:cNvSpPr>
-            <a:spLocks noGrp="1"/>
-          </p:cNvSpPr>
-          <p:nvPr>
-            <p:ph type="ctrTitle"/>
-          </p:nvPr>
+          <p:cNvPr id="5" name="Retângulo 4">
+            <a:extLst>
+              <a:ext uri="{FF2B5EF4-FFF2-40B4-BE49-F238E27FC236}">
+                <a16:creationId xmlns:a16="http://schemas.microsoft.com/office/drawing/2014/main" id="{BF242AA2-D4A0-E92C-DCD5-F999A6CFE027}"/>
+              </a:ext>
+            </a:extLst>
+          </p:cNvPr>
+          <p:cNvSpPr/>
+          <p:nvPr/>
         </p:nvSpPr>
         <p:spPr>
           <a:xfrm>
-            <a:off x="0" y="2524919"/>
-            <a:ext cx="12192000" cy="1808162"/>
+            <a:off x="0" y="-2"/>
+            <a:ext cx="12192000" cy="1325563"/>
           </a:xfrm>
+          <a:prstGeom prst="rect">
+            <a:avLst/>
+          </a:prstGeom>
+          <a:solidFill>
+            <a:schemeClr val="accent2"/>
+          </a:solidFill>
           <a:ln>
-            <a:noFill/>
+            <a:solidFill>
+              <a:srgbClr val="418AB3"/>
+            </a:solidFill>
           </a:ln>
         </p:spPr>
+        <p:style>
+          <a:lnRef idx="2">
+            <a:schemeClr val="accent1">
+              <a:shade val="15000"/>
+            </a:schemeClr>
+          </a:lnRef>
+          <a:fillRef idx="1">
+            <a:schemeClr val="accent1"/>
+          </a:fillRef>
+          <a:effectRef idx="0">
+            <a:schemeClr val="accent1"/>
+          </a:effectRef>
+          <a:fontRef idx="minor">
+            <a:schemeClr val="lt1"/>
+          </a:fontRef>
+        </p:style>
+        <p:txBody>
+          <a:bodyPr rtlCol="0" anchor="ctr"/>
+          <a:lstStyle/>
+          <a:p>
+            <a:pPr algn="ctr"/>
+            <a:endParaRPr lang="pt-BR" dirty="0"/>
+          </a:p>
+        </p:txBody>
+      </p:sp>
+      <p:sp>
+        <p:nvSpPr>
+          <p:cNvPr id="2" name="Título 1">
+            <a:extLst>
+              <a:ext uri="{FF2B5EF4-FFF2-40B4-BE49-F238E27FC236}">
+                <a16:creationId xmlns:a16="http://schemas.microsoft.com/office/drawing/2014/main" id="{2C058E62-EFB6-7688-5C3F-9216D2B0E373}"/>
+              </a:ext>
+            </a:extLst>
+          </p:cNvPr>
+          <p:cNvSpPr>
+            <a:spLocks noGrp="1"/>
+          </p:cNvSpPr>
+          <p:nvPr>
+            <p:ph type="title"/>
+          </p:nvPr>
+        </p:nvSpPr>
+        <p:spPr>
+          <a:xfrm>
+            <a:off x="0" y="-1"/>
+            <a:ext cx="12192000" cy="1325563"/>
+          </a:xfrm>
+        </p:spPr>
         <p:txBody>
           <a:bodyPr/>
           <a:lstStyle/>
           <a:p>
+            <a:pPr algn="ctr"/>
             <a:r>
               <a:rPr lang="pt-BR" dirty="0">
                 <a:solidFill>
                   <a:schemeClr val="bg1"/>
                 </a:solidFill>
               </a:rPr>
-              <a:t>módulo 6.5 – detecção de bordas</a:t>
-            </a:r>
-          </a:p>
-        </p:txBody>
-      </p:sp>
-      <p:sp>
-        <p:nvSpPr>
-          <p:cNvPr id="3" name="Subtítulo 2">
-            <a:extLst>
-              <a:ext uri="{FF2B5EF4-FFF2-40B4-BE49-F238E27FC236}">
-                <a16:creationId xmlns:a16="http://schemas.microsoft.com/office/drawing/2014/main" id="{048E78B1-6931-F0B4-F153-468699E9C247}"/>
-              </a:ext>
-            </a:extLst>
-          </p:cNvPr>
-          <p:cNvSpPr>
-            <a:spLocks noGrp="1"/>
-          </p:cNvSpPr>
-          <p:nvPr>
-            <p:ph type="subTitle" idx="1"/>
-          </p:nvPr>
-        </p:nvSpPr>
-        <p:spPr>
-          <a:xfrm>
-            <a:off x="2695192" y="5207000"/>
-            <a:ext cx="6801612" cy="1651000"/>
-          </a:xfrm>
-        </p:spPr>
-        <p:txBody>
-          <a:bodyPr/>
-          <a:lstStyle/>
-          <a:p>
-            <a:r>
-              <a:rPr lang="pt-BR" dirty="0"/>
-              <a:t>Universidade de Uberaba</a:t>
-            </a:r>
-          </a:p>
-          <a:p>
-            <a:r>
-              <a:rPr lang="pt-BR" dirty="0"/>
-              <a:t>Marcio Salmazo Ramos</a:t>
-            </a:r>
-          </a:p>
-        </p:txBody>
-      </p:sp>
-      <p:pic>
-        <p:nvPicPr>
-          <p:cNvPr id="8194" name="Picture 2">
-            <a:extLst>
-              <a:ext uri="{FF2B5EF4-FFF2-40B4-BE49-F238E27FC236}">
-                <a16:creationId xmlns:a16="http://schemas.microsoft.com/office/drawing/2014/main" id="{6BF76EA7-6FE4-5567-EDB5-5E4D323C7AF8}"/>
-              </a:ext>
-            </a:extLst>
-          </p:cNvPr>
-          <p:cNvPicPr>
-            <a:picLocks noChangeAspect="1" noChangeArrowheads="1"/>
-          </p:cNvPicPr>
+              <a:t>Filtro Laplaciano</a:t>
+            </a:r>
+          </a:p>
+        </p:txBody>
+      </p:sp>
+      <p:sp>
+        <p:nvSpPr>
+          <p:cNvPr id="12" name="AutoShape 6" descr="Lógica Proposicional x Lógica de Argumento ⋆ Colaborae">
+            <a:extLst>
+              <a:ext uri="{FF2B5EF4-FFF2-40B4-BE49-F238E27FC236}">
+                <a16:creationId xmlns:a16="http://schemas.microsoft.com/office/drawing/2014/main" id="{44D9699A-92D5-1C31-1C32-7126663D30D0}"/>
+              </a:ext>
+            </a:extLst>
+          </p:cNvPr>
+          <p:cNvSpPr>
+            <a:spLocks noChangeAspect="1" noChangeArrowheads="1"/>
+          </p:cNvSpPr>
           <p:nvPr/>
-        </p:nvPicPr>
-        <p:blipFill>
-          <a:blip r:embed="rId3">
-            <a:extLst>
-              <a:ext uri="{28A0092B-C50C-407E-A947-70E740481C1C}">
-                <a14:useLocalDpi xmlns:a14="http://schemas.microsoft.com/office/drawing/2010/main" val="0"/>
-              </a:ext>
-            </a:extLst>
-          </a:blip>
-          <a:srcRect/>
-          <a:stretch>
-            <a:fillRect/>
-          </a:stretch>
-        </p:blipFill>
+        </p:nvSpPr>
         <p:spPr bwMode="auto">
           <a:xfrm>
-            <a:off x="4337048" y="447153"/>
-            <a:ext cx="3517900" cy="972919"/>
+            <a:off x="5943600" y="-1707776"/>
+            <a:ext cx="5289176" cy="5289176"/>
           </a:xfrm>
           <a:prstGeom prst="rect">
             <a:avLst/>
@@ -8680,11 +9450,3394 @@
             </a:ext>
           </a:extLst>
         </p:spPr>
+        <p:txBody>
+          <a:bodyPr vert="horz" wrap="square" lIns="91440" tIns="45720" rIns="91440" bIns="45720" numCol="1" anchor="t" anchorCtr="0" compatLnSpc="1">
+            <a:prstTxWarp prst="textNoShape">
+              <a:avLst/>
+            </a:prstTxWarp>
+          </a:bodyPr>
+          <a:lstStyle/>
+          <a:p>
+            <a:endParaRPr lang="pt-BR"/>
+          </a:p>
+        </p:txBody>
+      </p:sp>
+      <mc:AlternateContent xmlns:mc="http://schemas.openxmlformats.org/markup-compatibility/2006">
+        <mc:Choice xmlns:a14="http://schemas.microsoft.com/office/drawing/2010/main" Requires="a14">
+          <p:sp>
+            <p:nvSpPr>
+              <p:cNvPr id="6" name="Espaço Reservado para Conteúdo 5">
+                <a:extLst>
+                  <a:ext uri="{FF2B5EF4-FFF2-40B4-BE49-F238E27FC236}">
+                    <a16:creationId xmlns:a16="http://schemas.microsoft.com/office/drawing/2014/main" id="{8FBB1A52-8588-A75C-3D2C-3BAB73E6CDD1}"/>
+                  </a:ext>
+                </a:extLst>
+              </p:cNvPr>
+              <p:cNvSpPr>
+                <a:spLocks noGrp="1"/>
+              </p:cNvSpPr>
+              <p:nvPr>
+                <p:ph idx="1"/>
+              </p:nvPr>
+            </p:nvSpPr>
+            <p:spPr>
+              <a:xfrm>
+                <a:off x="878421" y="1512507"/>
+                <a:ext cx="10130357" cy="5289176"/>
+              </a:xfrm>
+            </p:spPr>
+            <p:txBody>
+              <a:bodyPr>
+                <a:normAutofit/>
+              </a:bodyPr>
+              <a:lstStyle/>
+              <a:p>
+                <a:r>
+                  <a:rPr lang="pt-BR" sz="2400" b="1" i="1" dirty="0"/>
+                  <a:t>Primeira derivada: </a:t>
+                </a:r>
+                <a:r>
+                  <a:rPr lang="pt-BR" sz="2400" i="1" dirty="0"/>
+                  <a:t>“como a intensidade varia?”</a:t>
+                </a:r>
+                <a:endParaRPr lang="pt-BR" sz="2000" dirty="0"/>
+              </a:p>
+              <a:p>
+                <a:pPr lvl="1">
+                  <a:buFont typeface="Courier New" panose="02070309020205020404" pitchFamily="49" charset="0"/>
+                  <a:buChar char="o"/>
+                </a:pPr>
+                <a:r>
+                  <a:rPr lang="pt-BR" sz="2000" dirty="0"/>
+                  <a:t>Mede a taxa de variação da intensidade </a:t>
+                </a:r>
+                <a:r>
+                  <a:rPr lang="pt-BR" sz="2000" u="sng" dirty="0"/>
+                  <a:t>em uma direção</a:t>
+                </a:r>
+                <a:r>
+                  <a:rPr lang="pt-BR" sz="2000" dirty="0"/>
+                  <a:t>.</a:t>
+                </a:r>
+              </a:p>
+              <a:p>
+                <a:pPr lvl="1">
+                  <a:buFont typeface="Courier New" panose="02070309020205020404" pitchFamily="49" charset="0"/>
+                  <a:buChar char="o"/>
+                </a:pPr>
+                <a:endParaRPr lang="pt-BR" sz="2000" i="1" dirty="0"/>
+              </a:p>
+              <a:p>
+                <a:pPr marL="457200" lvl="1" indent="0">
+                  <a:buNone/>
+                </a:pPr>
+                <a14:m>
+                  <m:oMathPara xmlns:m="http://schemas.openxmlformats.org/officeDocument/2006/math">
+                    <m:oMathParaPr>
+                      <m:jc m:val="centerGroup"/>
+                    </m:oMathParaPr>
+                    <m:oMath xmlns:m="http://schemas.openxmlformats.org/officeDocument/2006/math">
+                      <m:r>
+                        <m:rPr>
+                          <m:sty m:val="p"/>
+                        </m:rPr>
+                        <a:rPr lang="pt-BR" sz="2000" i="1" smtClean="0">
+                          <a:latin typeface="Cambria Math" panose="02040503050406030204" pitchFamily="18" charset="0"/>
+                          <a:ea typeface="Cambria Math" panose="02040503050406030204" pitchFamily="18" charset="0"/>
+                        </a:rPr>
+                        <m:t>∇</m:t>
+                      </m:r>
+                      <m:r>
+                        <a:rPr lang="pt-BR" sz="2000" b="0" i="1" smtClean="0">
+                          <a:latin typeface="Cambria Math" panose="02040503050406030204" pitchFamily="18" charset="0"/>
+                          <a:ea typeface="Cambria Math" panose="02040503050406030204" pitchFamily="18" charset="0"/>
+                        </a:rPr>
+                        <m:t> </m:t>
+                      </m:r>
+                      <m:r>
+                        <a:rPr lang="pt-BR" sz="2000" i="1">
+                          <a:latin typeface="Cambria Math" panose="02040503050406030204" pitchFamily="18" charset="0"/>
+                          <a:ea typeface="Cambria Math" panose="02040503050406030204" pitchFamily="18" charset="0"/>
+                        </a:rPr>
+                        <m:t>=</m:t>
+                      </m:r>
+                      <m:f>
+                        <m:fPr>
+                          <m:ctrlPr>
+                            <a:rPr lang="pt-BR" sz="2000" b="0" i="1" smtClean="0">
+                              <a:latin typeface="Cambria Math" panose="02040503050406030204" pitchFamily="18" charset="0"/>
+                              <a:ea typeface="Cambria Math" panose="02040503050406030204" pitchFamily="18" charset="0"/>
+                            </a:rPr>
+                          </m:ctrlPr>
+                        </m:fPr>
+                        <m:num>
+                          <m:r>
+                            <a:rPr lang="pt-BR" sz="2000" i="1">
+                              <a:latin typeface="Cambria Math" panose="02040503050406030204" pitchFamily="18" charset="0"/>
+                              <a:ea typeface="Cambria Math" panose="02040503050406030204" pitchFamily="18" charset="0"/>
+                            </a:rPr>
+                            <m:t>𝜕</m:t>
+                          </m:r>
+                          <m:r>
+                            <a:rPr lang="pt-BR" sz="2000" i="1">
+                              <a:latin typeface="Cambria Math" panose="02040503050406030204" pitchFamily="18" charset="0"/>
+                              <a:ea typeface="Cambria Math" panose="02040503050406030204" pitchFamily="18" charset="0"/>
+                            </a:rPr>
+                            <m:t>𝐼</m:t>
+                          </m:r>
+                        </m:num>
+                        <m:den>
+                          <m:r>
+                            <a:rPr lang="pt-BR" sz="2000" i="1">
+                              <a:latin typeface="Cambria Math" panose="02040503050406030204" pitchFamily="18" charset="0"/>
+                              <a:ea typeface="Cambria Math" panose="02040503050406030204" pitchFamily="18" charset="0"/>
+                            </a:rPr>
+                            <m:t>𝜕</m:t>
+                          </m:r>
+                          <m:r>
+                            <a:rPr lang="pt-BR" sz="2000" b="0" i="1" smtClean="0">
+                              <a:latin typeface="Cambria Math" panose="02040503050406030204" pitchFamily="18" charset="0"/>
+                              <a:ea typeface="Cambria Math" panose="02040503050406030204" pitchFamily="18" charset="0"/>
+                            </a:rPr>
+                            <m:t>𝑥</m:t>
+                          </m:r>
+                        </m:den>
+                      </m:f>
+                      <m:r>
+                        <a:rPr lang="pt-BR" sz="2000" b="0" i="1" smtClean="0">
+                          <a:latin typeface="Cambria Math" panose="02040503050406030204" pitchFamily="18" charset="0"/>
+                          <a:ea typeface="Cambria Math" panose="02040503050406030204" pitchFamily="18" charset="0"/>
+                        </a:rPr>
+                        <m:t>+ </m:t>
+                      </m:r>
+                      <m:f>
+                        <m:fPr>
+                          <m:ctrlPr>
+                            <a:rPr lang="pt-BR" sz="2000" i="1">
+                              <a:latin typeface="Cambria Math" panose="02040503050406030204" pitchFamily="18" charset="0"/>
+                              <a:ea typeface="Cambria Math" panose="02040503050406030204" pitchFamily="18" charset="0"/>
+                            </a:rPr>
+                          </m:ctrlPr>
+                        </m:fPr>
+                        <m:num>
+                          <m:r>
+                            <a:rPr lang="pt-BR" sz="2000" i="1">
+                              <a:latin typeface="Cambria Math" panose="02040503050406030204" pitchFamily="18" charset="0"/>
+                              <a:ea typeface="Cambria Math" panose="02040503050406030204" pitchFamily="18" charset="0"/>
+                            </a:rPr>
+                            <m:t>𝜕</m:t>
+                          </m:r>
+                          <m:r>
+                            <a:rPr lang="pt-BR" sz="2000" i="1">
+                              <a:latin typeface="Cambria Math" panose="02040503050406030204" pitchFamily="18" charset="0"/>
+                              <a:ea typeface="Cambria Math" panose="02040503050406030204" pitchFamily="18" charset="0"/>
+                            </a:rPr>
+                            <m:t>𝐼</m:t>
+                          </m:r>
+                        </m:num>
+                        <m:den>
+                          <m:r>
+                            <a:rPr lang="pt-BR" sz="2000" i="1">
+                              <a:latin typeface="Cambria Math" panose="02040503050406030204" pitchFamily="18" charset="0"/>
+                              <a:ea typeface="Cambria Math" panose="02040503050406030204" pitchFamily="18" charset="0"/>
+                            </a:rPr>
+                            <m:t>𝜕</m:t>
+                          </m:r>
+                          <m:r>
+                            <a:rPr lang="pt-BR" sz="2000" b="0" i="1" smtClean="0">
+                              <a:latin typeface="Cambria Math" panose="02040503050406030204" pitchFamily="18" charset="0"/>
+                              <a:ea typeface="Cambria Math" panose="02040503050406030204" pitchFamily="18" charset="0"/>
+                            </a:rPr>
+                            <m:t>𝑦</m:t>
+                          </m:r>
+                        </m:den>
+                      </m:f>
+                    </m:oMath>
+                  </m:oMathPara>
+                </a14:m>
+                <a:endParaRPr lang="pt-BR" sz="2000" i="1" dirty="0"/>
+              </a:p>
+              <a:p>
+                <a:pPr marL="457200" lvl="1" indent="0">
+                  <a:buNone/>
+                </a:pPr>
+                <a:endParaRPr lang="pt-BR" sz="2200" i="1" dirty="0"/>
+              </a:p>
+              <a:p>
+                <a:pPr lvl="1">
+                  <a:buFont typeface="Courier New" panose="02070309020205020404" pitchFamily="49" charset="0"/>
+                  <a:buChar char="o"/>
+                </a:pPr>
+                <a:r>
+                  <a:rPr lang="pt-BR" sz="2000" i="1" dirty="0"/>
+                  <a:t>“Se os pixels passam de valores baixos para valores altos, a derivada será positiva”. </a:t>
+                </a:r>
+              </a:p>
+              <a:p>
+                <a:pPr lvl="1">
+                  <a:buFont typeface="Courier New" panose="02070309020205020404" pitchFamily="49" charset="0"/>
+                  <a:buChar char="o"/>
+                </a:pPr>
+                <a:r>
+                  <a:rPr lang="pt-BR" sz="2000" i="1" dirty="0"/>
+                  <a:t>“Se passam de valores altos para baixos, será negativa”. </a:t>
+                </a:r>
+              </a:p>
+              <a:p>
+                <a:pPr lvl="1">
+                  <a:buFont typeface="Courier New" panose="02070309020205020404" pitchFamily="49" charset="0"/>
+                  <a:buChar char="o"/>
+                </a:pPr>
+                <a:r>
+                  <a:rPr lang="pt-BR" sz="2000" i="1" dirty="0"/>
+                  <a:t>“Se a intensidade permanecer constante, a derivada será zero”.</a:t>
+                </a:r>
+              </a:p>
+              <a:p>
+                <a:pPr lvl="1">
+                  <a:buFont typeface="Courier New" panose="02070309020205020404" pitchFamily="49" charset="0"/>
+                  <a:buChar char="o"/>
+                </a:pPr>
+                <a:endParaRPr lang="pt-BR" sz="2000" i="1" dirty="0"/>
+              </a:p>
+              <a:p>
+                <a:r>
+                  <a:rPr lang="pt-BR" sz="2200" b="1" i="1" dirty="0"/>
+                  <a:t>Segunda derivada: </a:t>
+                </a:r>
+                <a:r>
+                  <a:rPr lang="pt-BR" sz="2200" i="1" dirty="0"/>
+                  <a:t>“como a variação de intensidade muda de um ponto para outro?”</a:t>
+                </a:r>
+              </a:p>
+              <a:p>
+                <a:pPr marL="0" indent="0">
+                  <a:buNone/>
+                </a:pPr>
+                <a:endParaRPr lang="pt-BR" sz="2400" i="1" dirty="0"/>
+              </a:p>
+              <a:p>
+                <a:pPr marL="457200" lvl="1" indent="0">
+                  <a:buNone/>
+                </a:pPr>
+                <a14:m>
+                  <m:oMathPara xmlns:m="http://schemas.openxmlformats.org/officeDocument/2006/math">
+                    <m:oMathParaPr>
+                      <m:jc m:val="centerGroup"/>
+                    </m:oMathParaPr>
+                    <m:oMath xmlns:m="http://schemas.openxmlformats.org/officeDocument/2006/math">
+                      <m:sSup>
+                        <m:sSupPr>
+                          <m:ctrlPr>
+                            <a:rPr lang="pt-BR" sz="2000" b="0" i="1" smtClean="0">
+                              <a:latin typeface="Cambria Math" panose="02040503050406030204" pitchFamily="18" charset="0"/>
+                              <a:ea typeface="Cambria Math" panose="02040503050406030204" pitchFamily="18" charset="0"/>
+                            </a:rPr>
+                          </m:ctrlPr>
+                        </m:sSupPr>
+                        <m:e>
+                          <m:r>
+                            <m:rPr>
+                              <m:sty m:val="p"/>
+                            </m:rPr>
+                            <a:rPr lang="pt-BR" sz="2000" i="1">
+                              <a:latin typeface="Cambria Math" panose="02040503050406030204" pitchFamily="18" charset="0"/>
+                              <a:ea typeface="Cambria Math" panose="02040503050406030204" pitchFamily="18" charset="0"/>
+                            </a:rPr>
+                            <m:t>∇</m:t>
+                          </m:r>
+                        </m:e>
+                        <m:sup>
+                          <m:r>
+                            <a:rPr lang="pt-BR" sz="2000" b="0" i="1" smtClean="0">
+                              <a:latin typeface="Cambria Math" panose="02040503050406030204" pitchFamily="18" charset="0"/>
+                              <a:ea typeface="Cambria Math" panose="02040503050406030204" pitchFamily="18" charset="0"/>
+                            </a:rPr>
+                            <m:t>2</m:t>
+                          </m:r>
+                        </m:sup>
+                      </m:sSup>
+                      <m:r>
+                        <a:rPr lang="pt-BR" sz="2000" b="0" i="1" smtClean="0">
+                          <a:latin typeface="Cambria Math" panose="02040503050406030204" pitchFamily="18" charset="0"/>
+                          <a:ea typeface="Cambria Math" panose="02040503050406030204" pitchFamily="18" charset="0"/>
+                        </a:rPr>
+                        <m:t>=</m:t>
+                      </m:r>
+                      <m:f>
+                        <m:fPr>
+                          <m:ctrlPr>
+                            <a:rPr lang="pt-BR" sz="2000" i="1">
+                              <a:latin typeface="Cambria Math" panose="02040503050406030204" pitchFamily="18" charset="0"/>
+                              <a:ea typeface="Cambria Math" panose="02040503050406030204" pitchFamily="18" charset="0"/>
+                            </a:rPr>
+                          </m:ctrlPr>
+                        </m:fPr>
+                        <m:num>
+                          <m:sSup>
+                            <m:sSupPr>
+                              <m:ctrlPr>
+                                <a:rPr lang="pt-BR" sz="2000" i="1" smtClean="0">
+                                  <a:latin typeface="Cambria Math" panose="02040503050406030204" pitchFamily="18" charset="0"/>
+                                  <a:ea typeface="Cambria Math" panose="02040503050406030204" pitchFamily="18" charset="0"/>
+                                </a:rPr>
+                              </m:ctrlPr>
+                            </m:sSupPr>
+                            <m:e>
+                              <m:r>
+                                <a:rPr lang="pt-BR" sz="2000" i="1">
+                                  <a:latin typeface="Cambria Math" panose="02040503050406030204" pitchFamily="18" charset="0"/>
+                                  <a:ea typeface="Cambria Math" panose="02040503050406030204" pitchFamily="18" charset="0"/>
+                                </a:rPr>
+                                <m:t>𝜕</m:t>
+                              </m:r>
+                            </m:e>
+                            <m:sup>
+                              <m:r>
+                                <a:rPr lang="pt-BR" sz="2000" b="0" i="1" smtClean="0">
+                                  <a:latin typeface="Cambria Math" panose="02040503050406030204" pitchFamily="18" charset="0"/>
+                                  <a:ea typeface="Cambria Math" panose="02040503050406030204" pitchFamily="18" charset="0"/>
+                                </a:rPr>
+                                <m:t>2</m:t>
+                              </m:r>
+                            </m:sup>
+                          </m:sSup>
+                          <m:r>
+                            <a:rPr lang="pt-BR" sz="2000" i="1">
+                              <a:latin typeface="Cambria Math" panose="02040503050406030204" pitchFamily="18" charset="0"/>
+                              <a:ea typeface="Cambria Math" panose="02040503050406030204" pitchFamily="18" charset="0"/>
+                            </a:rPr>
+                            <m:t>𝐼</m:t>
+                          </m:r>
+                        </m:num>
+                        <m:den>
+                          <m:sSup>
+                            <m:sSupPr>
+                              <m:ctrlPr>
+                                <a:rPr lang="pt-BR" sz="2000" i="1">
+                                  <a:latin typeface="Cambria Math" panose="02040503050406030204" pitchFamily="18" charset="0"/>
+                                  <a:ea typeface="Cambria Math" panose="02040503050406030204" pitchFamily="18" charset="0"/>
+                                </a:rPr>
+                              </m:ctrlPr>
+                            </m:sSupPr>
+                            <m:e>
+                              <m:r>
+                                <a:rPr lang="pt-BR" sz="2000" i="1">
+                                  <a:latin typeface="Cambria Math" panose="02040503050406030204" pitchFamily="18" charset="0"/>
+                                  <a:ea typeface="Cambria Math" panose="02040503050406030204" pitchFamily="18" charset="0"/>
+                                </a:rPr>
+                                <m:t>𝜕</m:t>
+                              </m:r>
+                            </m:e>
+                            <m:sup>
+                              <m:r>
+                                <a:rPr lang="pt-BR" sz="2000" i="1">
+                                  <a:latin typeface="Cambria Math" panose="02040503050406030204" pitchFamily="18" charset="0"/>
+                                  <a:ea typeface="Cambria Math" panose="02040503050406030204" pitchFamily="18" charset="0"/>
+                                </a:rPr>
+                                <m:t>2</m:t>
+                              </m:r>
+                            </m:sup>
+                          </m:sSup>
+                          <m:r>
+                            <a:rPr lang="pt-BR" sz="2000" b="0" i="1" smtClean="0">
+                              <a:latin typeface="Cambria Math" panose="02040503050406030204" pitchFamily="18" charset="0"/>
+                              <a:ea typeface="Cambria Math" panose="02040503050406030204" pitchFamily="18" charset="0"/>
+                            </a:rPr>
+                            <m:t>𝑥</m:t>
+                          </m:r>
+                        </m:den>
+                      </m:f>
+                      <m:r>
+                        <a:rPr lang="pt-BR" sz="2000" b="0" i="1" smtClean="0">
+                          <a:latin typeface="Cambria Math" panose="02040503050406030204" pitchFamily="18" charset="0"/>
+                          <a:ea typeface="Cambria Math" panose="02040503050406030204" pitchFamily="18" charset="0"/>
+                        </a:rPr>
+                        <m:t>+</m:t>
+                      </m:r>
+                      <m:f>
+                        <m:fPr>
+                          <m:ctrlPr>
+                            <a:rPr lang="pt-BR" sz="2000" i="1">
+                              <a:latin typeface="Cambria Math" panose="02040503050406030204" pitchFamily="18" charset="0"/>
+                              <a:ea typeface="Cambria Math" panose="02040503050406030204" pitchFamily="18" charset="0"/>
+                            </a:rPr>
+                          </m:ctrlPr>
+                        </m:fPr>
+                        <m:num>
+                          <m:sSup>
+                            <m:sSupPr>
+                              <m:ctrlPr>
+                                <a:rPr lang="pt-BR" sz="2000" i="1">
+                                  <a:latin typeface="Cambria Math" panose="02040503050406030204" pitchFamily="18" charset="0"/>
+                                  <a:ea typeface="Cambria Math" panose="02040503050406030204" pitchFamily="18" charset="0"/>
+                                </a:rPr>
+                              </m:ctrlPr>
+                            </m:sSupPr>
+                            <m:e>
+                              <m:r>
+                                <a:rPr lang="pt-BR" sz="2000" i="1">
+                                  <a:latin typeface="Cambria Math" panose="02040503050406030204" pitchFamily="18" charset="0"/>
+                                  <a:ea typeface="Cambria Math" panose="02040503050406030204" pitchFamily="18" charset="0"/>
+                                </a:rPr>
+                                <m:t>𝜕</m:t>
+                              </m:r>
+                            </m:e>
+                            <m:sup>
+                              <m:r>
+                                <a:rPr lang="pt-BR" sz="2000" i="1">
+                                  <a:latin typeface="Cambria Math" panose="02040503050406030204" pitchFamily="18" charset="0"/>
+                                  <a:ea typeface="Cambria Math" panose="02040503050406030204" pitchFamily="18" charset="0"/>
+                                </a:rPr>
+                                <m:t>2</m:t>
+                              </m:r>
+                            </m:sup>
+                          </m:sSup>
+                          <m:r>
+                            <a:rPr lang="pt-BR" sz="2000" i="1">
+                              <a:latin typeface="Cambria Math" panose="02040503050406030204" pitchFamily="18" charset="0"/>
+                              <a:ea typeface="Cambria Math" panose="02040503050406030204" pitchFamily="18" charset="0"/>
+                            </a:rPr>
+                            <m:t>𝐼</m:t>
+                          </m:r>
+                        </m:num>
+                        <m:den>
+                          <m:sSup>
+                            <m:sSupPr>
+                              <m:ctrlPr>
+                                <a:rPr lang="pt-BR" sz="2000" i="1">
+                                  <a:latin typeface="Cambria Math" panose="02040503050406030204" pitchFamily="18" charset="0"/>
+                                  <a:ea typeface="Cambria Math" panose="02040503050406030204" pitchFamily="18" charset="0"/>
+                                </a:rPr>
+                              </m:ctrlPr>
+                            </m:sSupPr>
+                            <m:e>
+                              <m:r>
+                                <a:rPr lang="pt-BR" sz="2000" i="1">
+                                  <a:latin typeface="Cambria Math" panose="02040503050406030204" pitchFamily="18" charset="0"/>
+                                  <a:ea typeface="Cambria Math" panose="02040503050406030204" pitchFamily="18" charset="0"/>
+                                </a:rPr>
+                                <m:t>𝜕</m:t>
+                              </m:r>
+                            </m:e>
+                            <m:sup>
+                              <m:r>
+                                <a:rPr lang="pt-BR" sz="2000" i="1">
+                                  <a:latin typeface="Cambria Math" panose="02040503050406030204" pitchFamily="18" charset="0"/>
+                                  <a:ea typeface="Cambria Math" panose="02040503050406030204" pitchFamily="18" charset="0"/>
+                                </a:rPr>
+                                <m:t>2</m:t>
+                              </m:r>
+                            </m:sup>
+                          </m:sSup>
+                          <m:r>
+                            <a:rPr lang="pt-BR" sz="2000" b="0" i="1" smtClean="0">
+                              <a:latin typeface="Cambria Math" panose="02040503050406030204" pitchFamily="18" charset="0"/>
+                              <a:ea typeface="Cambria Math" panose="02040503050406030204" pitchFamily="18" charset="0"/>
+                            </a:rPr>
+                            <m:t>𝑦</m:t>
+                          </m:r>
+                        </m:den>
+                      </m:f>
+                    </m:oMath>
+                  </m:oMathPara>
+                </a14:m>
+                <a:endParaRPr lang="pt-BR" sz="2000" i="1" dirty="0"/>
+              </a:p>
+            </p:txBody>
+          </p:sp>
+        </mc:Choice>
+        <mc:Fallback>
+          <p:sp>
+            <p:nvSpPr>
+              <p:cNvPr id="6" name="Espaço Reservado para Conteúdo 5">
+                <a:extLst>
+                  <a:ext uri="{FF2B5EF4-FFF2-40B4-BE49-F238E27FC236}">
+                    <a16:creationId xmlns:a16="http://schemas.microsoft.com/office/drawing/2014/main" id="{8FBB1A52-8588-A75C-3D2C-3BAB73E6CDD1}"/>
+                  </a:ext>
+                </a:extLst>
+              </p:cNvPr>
+              <p:cNvSpPr>
+                <a:spLocks noGrp="1" noRot="1" noChangeAspect="1" noMove="1" noResize="1" noEditPoints="1" noAdjustHandles="1" noChangeArrowheads="1" noChangeShapeType="1" noTextEdit="1"/>
+              </p:cNvSpPr>
+              <p:nvPr>
+                <p:ph idx="1"/>
+              </p:nvPr>
+            </p:nvSpPr>
+            <p:spPr>
+              <a:xfrm>
+                <a:off x="878421" y="1512507"/>
+                <a:ext cx="10130357" cy="5289176"/>
+              </a:xfrm>
+              <a:blipFill>
+                <a:blip r:embed="rId3"/>
+                <a:stretch>
+                  <a:fillRect l="-782" t="-1613"/>
+                </a:stretch>
+              </a:blipFill>
+            </p:spPr>
+            <p:txBody>
+              <a:bodyPr/>
+              <a:lstStyle/>
+              <a:p>
+                <a:r>
+                  <a:rPr lang="pt-BR">
+                    <a:noFill/>
+                  </a:rPr>
+                  <a:t> </a:t>
+                </a:r>
+              </a:p>
+            </p:txBody>
+          </p:sp>
+        </mc:Fallback>
+      </mc:AlternateContent>
+      <p:sp>
+        <p:nvSpPr>
+          <p:cNvPr id="4" name="CaixaDeTexto 3">
+            <a:extLst>
+              <a:ext uri="{FF2B5EF4-FFF2-40B4-BE49-F238E27FC236}">
+                <a16:creationId xmlns:a16="http://schemas.microsoft.com/office/drawing/2014/main" id="{D6105513-FEF5-1CC4-78BD-1B3C8EBD0AB9}"/>
+              </a:ext>
+            </a:extLst>
+          </p:cNvPr>
+          <p:cNvSpPr txBox="1"/>
+          <p:nvPr/>
+        </p:nvSpPr>
+        <p:spPr>
+          <a:xfrm>
+            <a:off x="7917400" y="5845629"/>
+            <a:ext cx="2135585" cy="369332"/>
+          </a:xfrm>
+          <a:prstGeom prst="rect">
+            <a:avLst/>
+          </a:prstGeom>
+          <a:noFill/>
+        </p:spPr>
+        <p:txBody>
+          <a:bodyPr wrap="none" rtlCol="0">
+            <a:spAutoFit/>
+          </a:bodyPr>
+          <a:lstStyle/>
+          <a:p>
+            <a:r>
+              <a:rPr lang="pt-BR" dirty="0"/>
+              <a:t>Operador Laplaciano</a:t>
+            </a:r>
+          </a:p>
+        </p:txBody>
+      </p:sp>
+      <p:cxnSp>
+        <p:nvCxnSpPr>
+          <p:cNvPr id="8" name="Conector de Seta Reta 7">
+            <a:extLst>
+              <a:ext uri="{FF2B5EF4-FFF2-40B4-BE49-F238E27FC236}">
+                <a16:creationId xmlns:a16="http://schemas.microsoft.com/office/drawing/2014/main" id="{CA42074E-6CC7-C7AD-4385-FA8878EA641F}"/>
+              </a:ext>
+            </a:extLst>
+          </p:cNvPr>
+          <p:cNvCxnSpPr/>
+          <p:nvPr/>
+        </p:nvCxnSpPr>
+        <p:spPr>
+          <a:xfrm>
+            <a:off x="6901542" y="6030295"/>
+            <a:ext cx="870857" cy="0"/>
+          </a:xfrm>
+          <a:prstGeom prst="straightConnector1">
+            <a:avLst/>
+          </a:prstGeom>
+          <a:ln>
+            <a:tailEnd type="triangle"/>
+          </a:ln>
+        </p:spPr>
+        <p:style>
+          <a:lnRef idx="1">
+            <a:schemeClr val="accent2"/>
+          </a:lnRef>
+          <a:fillRef idx="0">
+            <a:schemeClr val="accent2"/>
+          </a:fillRef>
+          <a:effectRef idx="0">
+            <a:schemeClr val="accent2"/>
+          </a:effectRef>
+          <a:fontRef idx="minor">
+            <a:schemeClr val="tx1"/>
+          </a:fontRef>
+        </p:style>
+      </p:cxnSp>
+    </p:spTree>
+    <p:extLst>
+      <p:ext uri="{BB962C8B-B14F-4D97-AF65-F5344CB8AC3E}">
+        <p14:creationId xmlns:p14="http://schemas.microsoft.com/office/powerpoint/2010/main" val="437797384"/>
+      </p:ext>
+    </p:extLst>
+  </p:cSld>
+  <p:clrMapOvr>
+    <a:masterClrMapping/>
+  </p:clrMapOvr>
+</p:sld>
+</file>
+
+<file path=ppt/slides/slide12.xml><?xml version="1.0" encoding="utf-8"?>
+<p:sld xmlns:a="http://schemas.openxmlformats.org/drawingml/2006/main" xmlns:r="http://schemas.openxmlformats.org/officeDocument/2006/relationships" xmlns:p="http://schemas.openxmlformats.org/presentationml/2006/main">
+  <p:cSld>
+    <p:spTree>
+      <p:nvGrpSpPr>
+        <p:cNvPr id="1" name="">
+          <a:extLst>
+            <a:ext uri="{FF2B5EF4-FFF2-40B4-BE49-F238E27FC236}">
+              <a16:creationId xmlns:a16="http://schemas.microsoft.com/office/drawing/2014/main" id="{CC4C5601-DF31-6BA4-6318-CE9C2BA2B089}"/>
+            </a:ext>
+          </a:extLst>
+        </p:cNvPr>
+        <p:cNvGrpSpPr/>
+        <p:nvPr/>
+      </p:nvGrpSpPr>
+      <p:grpSpPr>
+        <a:xfrm>
+          <a:off x="0" y="0"/>
+          <a:ext cx="0" cy="0"/>
+          <a:chOff x="0" y="0"/>
+          <a:chExt cx="0" cy="0"/>
+        </a:xfrm>
+      </p:grpSpPr>
+      <p:sp>
+        <p:nvSpPr>
+          <p:cNvPr id="5" name="Retângulo 4">
+            <a:extLst>
+              <a:ext uri="{FF2B5EF4-FFF2-40B4-BE49-F238E27FC236}">
+                <a16:creationId xmlns:a16="http://schemas.microsoft.com/office/drawing/2014/main" id="{F83317CA-E55A-5D1B-22A3-2B4932F6B457}"/>
+              </a:ext>
+            </a:extLst>
+          </p:cNvPr>
+          <p:cNvSpPr/>
+          <p:nvPr/>
+        </p:nvSpPr>
+        <p:spPr>
+          <a:xfrm>
+            <a:off x="0" y="-2"/>
+            <a:ext cx="12192000" cy="1325563"/>
+          </a:xfrm>
+          <a:prstGeom prst="rect">
+            <a:avLst/>
+          </a:prstGeom>
+          <a:solidFill>
+            <a:schemeClr val="accent2"/>
+          </a:solidFill>
+          <a:ln>
+            <a:solidFill>
+              <a:srgbClr val="418AB3"/>
+            </a:solidFill>
+          </a:ln>
+        </p:spPr>
+        <p:style>
+          <a:lnRef idx="2">
+            <a:schemeClr val="accent1">
+              <a:shade val="15000"/>
+            </a:schemeClr>
+          </a:lnRef>
+          <a:fillRef idx="1">
+            <a:schemeClr val="accent1"/>
+          </a:fillRef>
+          <a:effectRef idx="0">
+            <a:schemeClr val="accent1"/>
+          </a:effectRef>
+          <a:fontRef idx="minor">
+            <a:schemeClr val="lt1"/>
+          </a:fontRef>
+        </p:style>
+        <p:txBody>
+          <a:bodyPr rtlCol="0" anchor="ctr"/>
+          <a:lstStyle/>
+          <a:p>
+            <a:pPr algn="ctr"/>
+            <a:endParaRPr lang="pt-BR" dirty="0"/>
+          </a:p>
+        </p:txBody>
+      </p:sp>
+      <p:sp>
+        <p:nvSpPr>
+          <p:cNvPr id="2" name="Título 1">
+            <a:extLst>
+              <a:ext uri="{FF2B5EF4-FFF2-40B4-BE49-F238E27FC236}">
+                <a16:creationId xmlns:a16="http://schemas.microsoft.com/office/drawing/2014/main" id="{C9854834-7A9F-325C-EB92-EEE94067D100}"/>
+              </a:ext>
+            </a:extLst>
+          </p:cNvPr>
+          <p:cNvSpPr>
+            <a:spLocks noGrp="1"/>
+          </p:cNvSpPr>
+          <p:nvPr>
+            <p:ph type="title"/>
+          </p:nvPr>
+        </p:nvSpPr>
+        <p:spPr>
+          <a:xfrm>
+            <a:off x="0" y="-1"/>
+            <a:ext cx="12192000" cy="1325563"/>
+          </a:xfrm>
+        </p:spPr>
+        <p:txBody>
+          <a:bodyPr/>
+          <a:lstStyle/>
+          <a:p>
+            <a:pPr algn="ctr"/>
+            <a:r>
+              <a:rPr lang="pt-BR" dirty="0">
+                <a:solidFill>
+                  <a:schemeClr val="bg1"/>
+                </a:solidFill>
+              </a:rPr>
+              <a:t>Exemplo do Laplaciano</a:t>
+            </a:r>
+          </a:p>
+        </p:txBody>
+      </p:sp>
+      <p:sp>
+        <p:nvSpPr>
+          <p:cNvPr id="12" name="AutoShape 6" descr="Lógica Proposicional x Lógica de Argumento ⋆ Colaborae">
+            <a:extLst>
+              <a:ext uri="{FF2B5EF4-FFF2-40B4-BE49-F238E27FC236}">
+                <a16:creationId xmlns:a16="http://schemas.microsoft.com/office/drawing/2014/main" id="{41B9829E-AC0A-4AE9-D1EF-83D974EB6122}"/>
+              </a:ext>
+            </a:extLst>
+          </p:cNvPr>
+          <p:cNvSpPr>
+            <a:spLocks noChangeAspect="1" noChangeArrowheads="1"/>
+          </p:cNvSpPr>
+          <p:nvPr/>
+        </p:nvSpPr>
+        <p:spPr bwMode="auto">
+          <a:xfrm>
+            <a:off x="5943600" y="-1707776"/>
+            <a:ext cx="5289176" cy="5289176"/>
+          </a:xfrm>
+          <a:prstGeom prst="rect">
+            <a:avLst/>
+          </a:prstGeom>
+          <a:noFill/>
+          <a:extLst>
+            <a:ext uri="{909E8E84-426E-40DD-AFC4-6F175D3DCCD1}">
+              <a14:hiddenFill xmlns:a14="http://schemas.microsoft.com/office/drawing/2010/main">
+                <a:solidFill>
+                  <a:srgbClr val="FFFFFF"/>
+                </a:solidFill>
+              </a14:hiddenFill>
+            </a:ext>
+          </a:extLst>
+        </p:spPr>
+        <p:txBody>
+          <a:bodyPr vert="horz" wrap="square" lIns="91440" tIns="45720" rIns="91440" bIns="45720" numCol="1" anchor="t" anchorCtr="0" compatLnSpc="1">
+            <a:prstTxWarp prst="textNoShape">
+              <a:avLst/>
+            </a:prstTxWarp>
+          </a:bodyPr>
+          <a:lstStyle/>
+          <a:p>
+            <a:endParaRPr lang="pt-BR"/>
+          </a:p>
+        </p:txBody>
+      </p:sp>
+      <mc:AlternateContent xmlns:mc="http://schemas.openxmlformats.org/markup-compatibility/2006">
+        <mc:Choice xmlns:a14="http://schemas.microsoft.com/office/drawing/2010/main" Requires="a14">
+          <p:sp>
+            <p:nvSpPr>
+              <p:cNvPr id="6" name="Espaço Reservado para Conteúdo 5">
+                <a:extLst>
+                  <a:ext uri="{FF2B5EF4-FFF2-40B4-BE49-F238E27FC236}">
+                    <a16:creationId xmlns:a16="http://schemas.microsoft.com/office/drawing/2014/main" id="{0E601399-8387-D7E2-5BEA-89C88FA358CE}"/>
+                  </a:ext>
+                </a:extLst>
+              </p:cNvPr>
+              <p:cNvSpPr>
+                <a:spLocks noGrp="1"/>
+              </p:cNvSpPr>
+              <p:nvPr>
+                <p:ph idx="1"/>
+              </p:nvPr>
+            </p:nvSpPr>
+            <p:spPr>
+              <a:xfrm>
+                <a:off x="404893" y="1752599"/>
+                <a:ext cx="6583736" cy="4855029"/>
+              </a:xfrm>
+            </p:spPr>
+            <p:txBody>
+              <a:bodyPr>
+                <a:normAutofit/>
+              </a:bodyPr>
+              <a:lstStyle/>
+              <a:p>
+                <a:r>
+                  <a:rPr lang="pt-BR" sz="2000" i="1" dirty="0"/>
+                  <a:t>Caso A — intensidade constante:</a:t>
+                </a:r>
+              </a:p>
+              <a:p>
+                <a:pPr lvl="1">
+                  <a:buFont typeface="Courier New" panose="02070309020205020404" pitchFamily="49" charset="0"/>
+                  <a:buChar char="o"/>
+                </a:pPr>
+                <a14:m>
+                  <m:oMath xmlns:m="http://schemas.openxmlformats.org/officeDocument/2006/math">
+                    <m:r>
+                      <a:rPr lang="pt-BR" sz="1800" b="0" i="1" smtClean="0">
+                        <a:latin typeface="Cambria Math" panose="02040503050406030204" pitchFamily="18" charset="0"/>
+                      </a:rPr>
+                      <m:t>𝑓</m:t>
+                    </m:r>
+                    <m:d>
+                      <m:dPr>
+                        <m:ctrlPr>
+                          <a:rPr lang="pt-BR" sz="1800" b="0" i="1" smtClean="0">
+                            <a:latin typeface="Cambria Math" panose="02040503050406030204" pitchFamily="18" charset="0"/>
+                          </a:rPr>
+                        </m:ctrlPr>
+                      </m:dPr>
+                      <m:e>
+                        <m:r>
+                          <a:rPr lang="pt-BR" sz="1800" b="0" i="1" smtClean="0">
+                            <a:latin typeface="Cambria Math" panose="02040503050406030204" pitchFamily="18" charset="0"/>
+                          </a:rPr>
+                          <m:t>𝑥</m:t>
+                        </m:r>
+                      </m:e>
+                    </m:d>
+                    <m:r>
+                      <a:rPr lang="pt-BR" sz="1800" b="0" i="1" smtClean="0">
+                        <a:latin typeface="Cambria Math" panose="02040503050406030204" pitchFamily="18" charset="0"/>
+                      </a:rPr>
+                      <m:t>=50</m:t>
+                    </m:r>
+                  </m:oMath>
+                </a14:m>
+                <a:endParaRPr lang="pt-BR" sz="1800" b="0" dirty="0"/>
+              </a:p>
+              <a:p>
+                <a:pPr lvl="1">
+                  <a:buFont typeface="Courier New" panose="02070309020205020404" pitchFamily="49" charset="0"/>
+                  <a:buChar char="o"/>
+                </a:pPr>
+                <a14:m>
+                  <m:oMath xmlns:m="http://schemas.openxmlformats.org/officeDocument/2006/math">
+                    <m:r>
+                      <a:rPr lang="pt-BR" sz="1800" i="1">
+                        <a:latin typeface="Cambria Math" panose="02040503050406030204" pitchFamily="18" charset="0"/>
+                      </a:rPr>
+                      <m:t>𝑓</m:t>
+                    </m:r>
+                    <m:r>
+                      <a:rPr lang="pt-BR" sz="1800" b="0" i="1" smtClean="0">
+                        <a:latin typeface="Cambria Math" panose="02040503050406030204" pitchFamily="18" charset="0"/>
+                      </a:rPr>
+                      <m:t>′</m:t>
+                    </m:r>
+                    <m:d>
+                      <m:dPr>
+                        <m:ctrlPr>
+                          <a:rPr lang="pt-BR" sz="1800" i="1">
+                            <a:latin typeface="Cambria Math" panose="02040503050406030204" pitchFamily="18" charset="0"/>
+                          </a:rPr>
+                        </m:ctrlPr>
+                      </m:dPr>
+                      <m:e>
+                        <m:r>
+                          <a:rPr lang="pt-BR" sz="1800" i="1">
+                            <a:latin typeface="Cambria Math" panose="02040503050406030204" pitchFamily="18" charset="0"/>
+                          </a:rPr>
+                          <m:t>𝑥</m:t>
+                        </m:r>
+                      </m:e>
+                    </m:d>
+                    <m:r>
+                      <a:rPr lang="pt-BR" sz="1800" i="1">
+                        <a:latin typeface="Cambria Math" panose="02040503050406030204" pitchFamily="18" charset="0"/>
+                      </a:rPr>
+                      <m:t>=</m:t>
+                    </m:r>
+                    <m:r>
+                      <a:rPr lang="pt-BR" sz="1800" b="0" i="1" smtClean="0">
+                        <a:latin typeface="Cambria Math" panose="02040503050406030204" pitchFamily="18" charset="0"/>
+                      </a:rPr>
+                      <m:t>0</m:t>
+                    </m:r>
+                  </m:oMath>
+                </a14:m>
+                <a:endParaRPr lang="pt-BR" sz="1800" dirty="0"/>
+              </a:p>
+              <a:p>
+                <a:pPr lvl="1">
+                  <a:buFont typeface="Courier New" panose="02070309020205020404" pitchFamily="49" charset="0"/>
+                  <a:buChar char="o"/>
+                </a:pPr>
+                <a14:m>
+                  <m:oMath xmlns:m="http://schemas.openxmlformats.org/officeDocument/2006/math">
+                    <m:r>
+                      <a:rPr lang="pt-BR" sz="1800" i="1">
+                        <a:latin typeface="Cambria Math" panose="02040503050406030204" pitchFamily="18" charset="0"/>
+                      </a:rPr>
+                      <m:t>𝑓</m:t>
+                    </m:r>
+                    <m:r>
+                      <a:rPr lang="pt-BR" sz="1800" b="0" i="1" smtClean="0">
+                        <a:latin typeface="Cambria Math" panose="02040503050406030204" pitchFamily="18" charset="0"/>
+                      </a:rPr>
+                      <m:t>′′</m:t>
+                    </m:r>
+                    <m:d>
+                      <m:dPr>
+                        <m:ctrlPr>
+                          <a:rPr lang="pt-BR" sz="1800" i="1">
+                            <a:latin typeface="Cambria Math" panose="02040503050406030204" pitchFamily="18" charset="0"/>
+                          </a:rPr>
+                        </m:ctrlPr>
+                      </m:dPr>
+                      <m:e>
+                        <m:r>
+                          <a:rPr lang="pt-BR" sz="1800" i="1">
+                            <a:latin typeface="Cambria Math" panose="02040503050406030204" pitchFamily="18" charset="0"/>
+                          </a:rPr>
+                          <m:t>𝑥</m:t>
+                        </m:r>
+                      </m:e>
+                    </m:d>
+                    <m:r>
+                      <a:rPr lang="pt-BR" sz="1800" i="1">
+                        <a:latin typeface="Cambria Math" panose="02040503050406030204" pitchFamily="18" charset="0"/>
+                      </a:rPr>
+                      <m:t>=</m:t>
+                    </m:r>
+                    <m:r>
+                      <a:rPr lang="pt-BR" sz="1800" b="0" i="1" smtClean="0">
+                        <a:latin typeface="Cambria Math" panose="02040503050406030204" pitchFamily="18" charset="0"/>
+                      </a:rPr>
+                      <m:t>0</m:t>
+                    </m:r>
+                  </m:oMath>
+                </a14:m>
+                <a:endParaRPr lang="pt-BR" sz="1800" dirty="0"/>
+              </a:p>
+              <a:p>
+                <a:endParaRPr lang="pt-BR" sz="2000" dirty="0"/>
+              </a:p>
+              <a:p>
+                <a:r>
+                  <a:rPr lang="pt-BR" sz="2000" i="1" dirty="0"/>
+                  <a:t>Caso B — intensidade crescendo linearmente:</a:t>
+                </a:r>
+              </a:p>
+              <a:p>
+                <a:pPr lvl="1">
+                  <a:buFont typeface="Courier New" panose="02070309020205020404" pitchFamily="49" charset="0"/>
+                  <a:buChar char="o"/>
+                </a:pPr>
+                <a14:m>
+                  <m:oMath xmlns:m="http://schemas.openxmlformats.org/officeDocument/2006/math">
+                    <m:r>
+                      <a:rPr lang="pt-BR" sz="1800" i="1">
+                        <a:latin typeface="Cambria Math" panose="02040503050406030204" pitchFamily="18" charset="0"/>
+                      </a:rPr>
+                      <m:t>𝑓</m:t>
+                    </m:r>
+                    <m:d>
+                      <m:dPr>
+                        <m:ctrlPr>
+                          <a:rPr lang="pt-BR" sz="1800" i="1">
+                            <a:latin typeface="Cambria Math" panose="02040503050406030204" pitchFamily="18" charset="0"/>
+                          </a:rPr>
+                        </m:ctrlPr>
+                      </m:dPr>
+                      <m:e>
+                        <m:r>
+                          <a:rPr lang="pt-BR" sz="1800" i="1">
+                            <a:latin typeface="Cambria Math" panose="02040503050406030204" pitchFamily="18" charset="0"/>
+                          </a:rPr>
+                          <m:t>𝑥</m:t>
+                        </m:r>
+                      </m:e>
+                    </m:d>
+                    <m:r>
+                      <a:rPr lang="pt-BR" sz="1800" i="1">
+                        <a:latin typeface="Cambria Math" panose="02040503050406030204" pitchFamily="18" charset="0"/>
+                      </a:rPr>
+                      <m:t>=</m:t>
+                    </m:r>
+                    <m:r>
+                      <a:rPr lang="pt-BR" sz="1800" b="0" i="1" smtClean="0">
+                        <a:latin typeface="Cambria Math" panose="02040503050406030204" pitchFamily="18" charset="0"/>
+                      </a:rPr>
+                      <m:t>10</m:t>
+                    </m:r>
+                    <m:r>
+                      <a:rPr lang="pt-BR" sz="1800" b="0" i="1" smtClean="0">
+                        <a:latin typeface="Cambria Math" panose="02040503050406030204" pitchFamily="18" charset="0"/>
+                      </a:rPr>
+                      <m:t>𝑥</m:t>
+                    </m:r>
+                    <m:r>
+                      <a:rPr lang="pt-BR" sz="1800" b="0" i="1" smtClean="0">
+                        <a:latin typeface="Cambria Math" panose="02040503050406030204" pitchFamily="18" charset="0"/>
+                      </a:rPr>
+                      <m:t>+20</m:t>
+                    </m:r>
+                  </m:oMath>
+                </a14:m>
+                <a:endParaRPr lang="pt-BR" sz="1800" dirty="0"/>
+              </a:p>
+              <a:p>
+                <a:pPr lvl="1">
+                  <a:buFont typeface="Courier New" panose="02070309020205020404" pitchFamily="49" charset="0"/>
+                  <a:buChar char="o"/>
+                </a:pPr>
+                <a14:m>
+                  <m:oMath xmlns:m="http://schemas.openxmlformats.org/officeDocument/2006/math">
+                    <m:r>
+                      <a:rPr lang="pt-BR" sz="1800" i="1">
+                        <a:latin typeface="Cambria Math" panose="02040503050406030204" pitchFamily="18" charset="0"/>
+                      </a:rPr>
+                      <m:t>𝑓</m:t>
+                    </m:r>
+                    <m:r>
+                      <a:rPr lang="pt-BR" sz="1800" i="1">
+                        <a:latin typeface="Cambria Math" panose="02040503050406030204" pitchFamily="18" charset="0"/>
+                      </a:rPr>
+                      <m:t>′</m:t>
+                    </m:r>
+                    <m:d>
+                      <m:dPr>
+                        <m:ctrlPr>
+                          <a:rPr lang="pt-BR" sz="1800" i="1">
+                            <a:latin typeface="Cambria Math" panose="02040503050406030204" pitchFamily="18" charset="0"/>
+                          </a:rPr>
+                        </m:ctrlPr>
+                      </m:dPr>
+                      <m:e>
+                        <m:r>
+                          <a:rPr lang="pt-BR" sz="1800" i="1">
+                            <a:latin typeface="Cambria Math" panose="02040503050406030204" pitchFamily="18" charset="0"/>
+                          </a:rPr>
+                          <m:t>𝑥</m:t>
+                        </m:r>
+                      </m:e>
+                    </m:d>
+                    <m:r>
+                      <a:rPr lang="pt-BR" sz="1800" i="1">
+                        <a:latin typeface="Cambria Math" panose="02040503050406030204" pitchFamily="18" charset="0"/>
+                      </a:rPr>
+                      <m:t>=</m:t>
+                    </m:r>
+                    <m:r>
+                      <a:rPr lang="pt-BR" sz="1800" b="0" i="1" smtClean="0">
+                        <a:latin typeface="Cambria Math" panose="02040503050406030204" pitchFamily="18" charset="0"/>
+                      </a:rPr>
+                      <m:t>1</m:t>
+                    </m:r>
+                    <m:r>
+                      <a:rPr lang="pt-BR" sz="1800" i="1">
+                        <a:latin typeface="Cambria Math" panose="02040503050406030204" pitchFamily="18" charset="0"/>
+                      </a:rPr>
+                      <m:t>0</m:t>
+                    </m:r>
+                  </m:oMath>
+                </a14:m>
+                <a:endParaRPr lang="pt-BR" sz="1800" dirty="0"/>
+              </a:p>
+              <a:p>
+                <a:pPr lvl="1">
+                  <a:buFont typeface="Courier New" panose="02070309020205020404" pitchFamily="49" charset="0"/>
+                  <a:buChar char="o"/>
+                </a:pPr>
+                <a14:m>
+                  <m:oMath xmlns:m="http://schemas.openxmlformats.org/officeDocument/2006/math">
+                    <m:r>
+                      <a:rPr lang="pt-BR" sz="1800" i="1">
+                        <a:latin typeface="Cambria Math" panose="02040503050406030204" pitchFamily="18" charset="0"/>
+                      </a:rPr>
+                      <m:t>𝑓</m:t>
+                    </m:r>
+                    <m:r>
+                      <a:rPr lang="pt-BR" sz="1800" i="1">
+                        <a:latin typeface="Cambria Math" panose="02040503050406030204" pitchFamily="18" charset="0"/>
+                      </a:rPr>
+                      <m:t>′′</m:t>
+                    </m:r>
+                    <m:d>
+                      <m:dPr>
+                        <m:ctrlPr>
+                          <a:rPr lang="pt-BR" sz="1800" i="1">
+                            <a:latin typeface="Cambria Math" panose="02040503050406030204" pitchFamily="18" charset="0"/>
+                          </a:rPr>
+                        </m:ctrlPr>
+                      </m:dPr>
+                      <m:e>
+                        <m:r>
+                          <a:rPr lang="pt-BR" sz="1800" i="1">
+                            <a:latin typeface="Cambria Math" panose="02040503050406030204" pitchFamily="18" charset="0"/>
+                          </a:rPr>
+                          <m:t>𝑥</m:t>
+                        </m:r>
+                      </m:e>
+                    </m:d>
+                    <m:r>
+                      <a:rPr lang="pt-BR" sz="1800" i="1">
+                        <a:latin typeface="Cambria Math" panose="02040503050406030204" pitchFamily="18" charset="0"/>
+                      </a:rPr>
+                      <m:t>=</m:t>
+                    </m:r>
+                    <m:r>
+                      <a:rPr lang="pt-BR" sz="1800" i="1">
+                        <a:latin typeface="Cambria Math" panose="02040503050406030204" pitchFamily="18" charset="0"/>
+                      </a:rPr>
+                      <m:t>0</m:t>
+                    </m:r>
+                  </m:oMath>
+                </a14:m>
+                <a:endParaRPr lang="pt-BR" sz="1800" dirty="0"/>
+              </a:p>
+              <a:p>
+                <a:endParaRPr lang="pt-BR" sz="2000" dirty="0"/>
+              </a:p>
+              <a:p>
+                <a:r>
+                  <a:rPr lang="pt-BR" sz="2000" i="1" dirty="0"/>
+                  <a:t>Caso C — intensidade crescendo de forma acelerada:</a:t>
+                </a:r>
+              </a:p>
+              <a:p>
+                <a:pPr lvl="1">
+                  <a:buFont typeface="Courier New" panose="02070309020205020404" pitchFamily="49" charset="0"/>
+                  <a:buChar char="o"/>
+                </a:pPr>
+                <a14:m>
+                  <m:oMath xmlns:m="http://schemas.openxmlformats.org/officeDocument/2006/math">
+                    <m:r>
+                      <a:rPr lang="pt-BR" sz="1800" i="1">
+                        <a:latin typeface="Cambria Math" panose="02040503050406030204" pitchFamily="18" charset="0"/>
+                      </a:rPr>
+                      <m:t>𝑓</m:t>
+                    </m:r>
+                    <m:d>
+                      <m:dPr>
+                        <m:ctrlPr>
+                          <a:rPr lang="pt-BR" sz="1800" i="1">
+                            <a:latin typeface="Cambria Math" panose="02040503050406030204" pitchFamily="18" charset="0"/>
+                          </a:rPr>
+                        </m:ctrlPr>
+                      </m:dPr>
+                      <m:e>
+                        <m:r>
+                          <a:rPr lang="pt-BR" sz="1800" i="1">
+                            <a:latin typeface="Cambria Math" panose="02040503050406030204" pitchFamily="18" charset="0"/>
+                          </a:rPr>
+                          <m:t>𝑥</m:t>
+                        </m:r>
+                      </m:e>
+                    </m:d>
+                    <m:r>
+                      <a:rPr lang="pt-BR" sz="1800" i="1">
+                        <a:latin typeface="Cambria Math" panose="02040503050406030204" pitchFamily="18" charset="0"/>
+                      </a:rPr>
+                      <m:t>=</m:t>
+                    </m:r>
+                    <m:sSup>
+                      <m:sSupPr>
+                        <m:ctrlPr>
+                          <a:rPr lang="pt-BR" sz="1800" b="0" i="1" smtClean="0">
+                            <a:latin typeface="Cambria Math" panose="02040503050406030204" pitchFamily="18" charset="0"/>
+                          </a:rPr>
+                        </m:ctrlPr>
+                      </m:sSupPr>
+                      <m:e>
+                        <m:r>
+                          <a:rPr lang="pt-BR" sz="1800" b="0" i="1" smtClean="0">
+                            <a:latin typeface="Cambria Math" panose="02040503050406030204" pitchFamily="18" charset="0"/>
+                          </a:rPr>
+                          <m:t>𝑥</m:t>
+                        </m:r>
+                      </m:e>
+                      <m:sup>
+                        <m:r>
+                          <a:rPr lang="pt-BR" sz="1800" b="0" i="1" smtClean="0">
+                            <a:latin typeface="Cambria Math" panose="02040503050406030204" pitchFamily="18" charset="0"/>
+                          </a:rPr>
+                          <m:t>2</m:t>
+                        </m:r>
+                      </m:sup>
+                    </m:sSup>
+                    <m:r>
+                      <a:rPr lang="pt-BR" sz="1800" b="0" i="1" smtClean="0">
+                        <a:latin typeface="Cambria Math" panose="02040503050406030204" pitchFamily="18" charset="0"/>
+                      </a:rPr>
+                      <m:t> </m:t>
+                    </m:r>
+                  </m:oMath>
+                </a14:m>
+                <a:endParaRPr lang="pt-BR" sz="1800" dirty="0"/>
+              </a:p>
+              <a:p>
+                <a:pPr lvl="1">
+                  <a:buFont typeface="Courier New" panose="02070309020205020404" pitchFamily="49" charset="0"/>
+                  <a:buChar char="o"/>
+                </a:pPr>
+                <a14:m>
+                  <m:oMath xmlns:m="http://schemas.openxmlformats.org/officeDocument/2006/math">
+                    <m:r>
+                      <a:rPr lang="pt-BR" sz="1800" i="1">
+                        <a:latin typeface="Cambria Math" panose="02040503050406030204" pitchFamily="18" charset="0"/>
+                      </a:rPr>
+                      <m:t>𝑓</m:t>
+                    </m:r>
+                    <m:r>
+                      <a:rPr lang="pt-BR" sz="1800" i="1">
+                        <a:latin typeface="Cambria Math" panose="02040503050406030204" pitchFamily="18" charset="0"/>
+                      </a:rPr>
+                      <m:t>′</m:t>
+                    </m:r>
+                    <m:d>
+                      <m:dPr>
+                        <m:ctrlPr>
+                          <a:rPr lang="pt-BR" sz="1800" i="1">
+                            <a:latin typeface="Cambria Math" panose="02040503050406030204" pitchFamily="18" charset="0"/>
+                          </a:rPr>
+                        </m:ctrlPr>
+                      </m:dPr>
+                      <m:e>
+                        <m:r>
+                          <a:rPr lang="pt-BR" sz="1800" i="1">
+                            <a:latin typeface="Cambria Math" panose="02040503050406030204" pitchFamily="18" charset="0"/>
+                          </a:rPr>
+                          <m:t>𝑥</m:t>
+                        </m:r>
+                      </m:e>
+                    </m:d>
+                    <m:r>
+                      <a:rPr lang="pt-BR" sz="1800" i="1">
+                        <a:latin typeface="Cambria Math" panose="02040503050406030204" pitchFamily="18" charset="0"/>
+                      </a:rPr>
+                      <m:t>=</m:t>
+                    </m:r>
+                    <m:r>
+                      <a:rPr lang="pt-BR" sz="1800" b="0" i="1" smtClean="0">
+                        <a:latin typeface="Cambria Math" panose="02040503050406030204" pitchFamily="18" charset="0"/>
+                      </a:rPr>
+                      <m:t>2</m:t>
+                    </m:r>
+                    <m:r>
+                      <a:rPr lang="pt-BR" sz="1800" b="0" i="1" smtClean="0">
+                        <a:latin typeface="Cambria Math" panose="02040503050406030204" pitchFamily="18" charset="0"/>
+                      </a:rPr>
+                      <m:t>𝑥</m:t>
+                    </m:r>
+                  </m:oMath>
+                </a14:m>
+                <a:endParaRPr lang="pt-BR" sz="1800" dirty="0"/>
+              </a:p>
+              <a:p>
+                <a:pPr lvl="1">
+                  <a:buFont typeface="Courier New" panose="02070309020205020404" pitchFamily="49" charset="0"/>
+                  <a:buChar char="o"/>
+                </a:pPr>
+                <a14:m>
+                  <m:oMath xmlns:m="http://schemas.openxmlformats.org/officeDocument/2006/math">
+                    <m:r>
+                      <a:rPr lang="pt-BR" sz="1800" i="1">
+                        <a:latin typeface="Cambria Math" panose="02040503050406030204" pitchFamily="18" charset="0"/>
+                      </a:rPr>
+                      <m:t>𝑓</m:t>
+                    </m:r>
+                    <m:r>
+                      <a:rPr lang="pt-BR" sz="1800" i="1">
+                        <a:latin typeface="Cambria Math" panose="02040503050406030204" pitchFamily="18" charset="0"/>
+                      </a:rPr>
+                      <m:t>′′</m:t>
+                    </m:r>
+                    <m:d>
+                      <m:dPr>
+                        <m:ctrlPr>
+                          <a:rPr lang="pt-BR" sz="1800" i="1">
+                            <a:latin typeface="Cambria Math" panose="02040503050406030204" pitchFamily="18" charset="0"/>
+                          </a:rPr>
+                        </m:ctrlPr>
+                      </m:dPr>
+                      <m:e>
+                        <m:r>
+                          <a:rPr lang="pt-BR" sz="1800" i="1">
+                            <a:latin typeface="Cambria Math" panose="02040503050406030204" pitchFamily="18" charset="0"/>
+                          </a:rPr>
+                          <m:t>𝑥</m:t>
+                        </m:r>
+                      </m:e>
+                    </m:d>
+                    <m:r>
+                      <a:rPr lang="pt-BR" sz="1800" i="1">
+                        <a:latin typeface="Cambria Math" panose="02040503050406030204" pitchFamily="18" charset="0"/>
+                      </a:rPr>
+                      <m:t>=</m:t>
+                    </m:r>
+                    <m:r>
+                      <a:rPr lang="pt-BR" sz="1800" b="0" i="1" smtClean="0">
+                        <a:latin typeface="Cambria Math" panose="02040503050406030204" pitchFamily="18" charset="0"/>
+                      </a:rPr>
+                      <m:t>2</m:t>
+                    </m:r>
+                  </m:oMath>
+                </a14:m>
+                <a:endParaRPr lang="pt-BR" sz="1800" dirty="0"/>
+              </a:p>
+              <a:p>
+                <a:pPr lvl="1"/>
+                <a:endParaRPr lang="pt-BR" sz="1800" dirty="0"/>
+              </a:p>
+              <a:p>
+                <a:endParaRPr lang="pt-BR" sz="2200" dirty="0"/>
+              </a:p>
+            </p:txBody>
+          </p:sp>
+        </mc:Choice>
+        <mc:Fallback>
+          <p:sp>
+            <p:nvSpPr>
+              <p:cNvPr id="6" name="Espaço Reservado para Conteúdo 5">
+                <a:extLst>
+                  <a:ext uri="{FF2B5EF4-FFF2-40B4-BE49-F238E27FC236}">
+                    <a16:creationId xmlns:a16="http://schemas.microsoft.com/office/drawing/2014/main" id="{0E601399-8387-D7E2-5BEA-89C88FA358CE}"/>
+                  </a:ext>
+                </a:extLst>
+              </p:cNvPr>
+              <p:cNvSpPr>
+                <a:spLocks noGrp="1" noRot="1" noChangeAspect="1" noMove="1" noResize="1" noEditPoints="1" noAdjustHandles="1" noChangeArrowheads="1" noChangeShapeType="1" noTextEdit="1"/>
+              </p:cNvSpPr>
+              <p:nvPr>
+                <p:ph idx="1"/>
+              </p:nvPr>
+            </p:nvSpPr>
+            <p:spPr>
+              <a:xfrm>
+                <a:off x="404893" y="1752599"/>
+                <a:ext cx="6583736" cy="4855029"/>
+              </a:xfrm>
+              <a:blipFill>
+                <a:blip r:embed="rId3"/>
+                <a:stretch>
+                  <a:fillRect l="-833" t="-1255" b="-125"/>
+                </a:stretch>
+              </a:blipFill>
+            </p:spPr>
+            <p:txBody>
+              <a:bodyPr/>
+              <a:lstStyle/>
+              <a:p>
+                <a:r>
+                  <a:rPr lang="pt-BR">
+                    <a:noFill/>
+                  </a:rPr>
+                  <a:t> </a:t>
+                </a:r>
+              </a:p>
+            </p:txBody>
+          </p:sp>
+        </mc:Fallback>
+      </mc:AlternateContent>
+      <p:sp>
+        <p:nvSpPr>
+          <p:cNvPr id="7" name="CaixaDeTexto 6">
+            <a:extLst>
+              <a:ext uri="{FF2B5EF4-FFF2-40B4-BE49-F238E27FC236}">
+                <a16:creationId xmlns:a16="http://schemas.microsoft.com/office/drawing/2014/main" id="{40C9D2A5-1747-B38F-F6FD-87D48932EEEE}"/>
+              </a:ext>
+            </a:extLst>
+          </p:cNvPr>
+          <p:cNvSpPr txBox="1"/>
+          <p:nvPr/>
+        </p:nvSpPr>
+        <p:spPr>
+          <a:xfrm>
+            <a:off x="7247964" y="2096478"/>
+            <a:ext cx="4027714" cy="923330"/>
+          </a:xfrm>
+          <a:prstGeom prst="rect">
+            <a:avLst/>
+          </a:prstGeom>
+          <a:noFill/>
+        </p:spPr>
+        <p:txBody>
+          <a:bodyPr wrap="square" rtlCol="0">
+            <a:spAutoFit/>
+          </a:bodyPr>
+          <a:lstStyle/>
+          <a:p>
+            <a:pPr algn="just"/>
+            <a:r>
+              <a:rPr lang="pt-BR" dirty="0"/>
+              <a:t>A intensidade não muda. Portanto, nem a taxa de variação nem a mudança dessa taxa são diferentes de zero.</a:t>
+            </a:r>
+          </a:p>
+        </p:txBody>
+      </p:sp>
+      <p:sp>
+        <p:nvSpPr>
+          <p:cNvPr id="8" name="CaixaDeTexto 7">
+            <a:extLst>
+              <a:ext uri="{FF2B5EF4-FFF2-40B4-BE49-F238E27FC236}">
+                <a16:creationId xmlns:a16="http://schemas.microsoft.com/office/drawing/2014/main" id="{3542CD4F-B09C-DBED-A7E2-5B38C9FBE72D}"/>
+              </a:ext>
+            </a:extLst>
+          </p:cNvPr>
+          <p:cNvSpPr txBox="1"/>
+          <p:nvPr/>
+        </p:nvSpPr>
+        <p:spPr>
+          <a:xfrm>
+            <a:off x="7205062" y="3881735"/>
+            <a:ext cx="4027714" cy="923330"/>
+          </a:xfrm>
+          <a:prstGeom prst="rect">
+            <a:avLst/>
+          </a:prstGeom>
+          <a:noFill/>
+        </p:spPr>
+        <p:txBody>
+          <a:bodyPr wrap="square" rtlCol="0">
+            <a:spAutoFit/>
+          </a:bodyPr>
+          <a:lstStyle/>
+          <a:p>
+            <a:pPr algn="just"/>
+            <a:r>
+              <a:rPr lang="pt-BR" dirty="0"/>
+              <a:t>A intensidade aumenta constantemente. A primeira derivada é 10, mas essa taxa não muda.</a:t>
+            </a:r>
+          </a:p>
+        </p:txBody>
+      </p:sp>
+      <p:sp>
+        <p:nvSpPr>
+          <p:cNvPr id="9" name="CaixaDeTexto 8">
+            <a:extLst>
+              <a:ext uri="{FF2B5EF4-FFF2-40B4-BE49-F238E27FC236}">
+                <a16:creationId xmlns:a16="http://schemas.microsoft.com/office/drawing/2014/main" id="{938BF1D0-E297-07A9-FBD3-1B7247E4C034}"/>
+              </a:ext>
+            </a:extLst>
+          </p:cNvPr>
+          <p:cNvSpPr txBox="1"/>
+          <p:nvPr/>
+        </p:nvSpPr>
+        <p:spPr>
+          <a:xfrm>
+            <a:off x="7247964" y="5579906"/>
+            <a:ext cx="4409995" cy="923330"/>
+          </a:xfrm>
+          <a:prstGeom prst="rect">
+            <a:avLst/>
+          </a:prstGeom>
+          <a:noFill/>
+        </p:spPr>
+        <p:txBody>
+          <a:bodyPr wrap="square" rtlCol="0">
+            <a:spAutoFit/>
+          </a:bodyPr>
+          <a:lstStyle/>
+          <a:p>
+            <a:pPr algn="just"/>
+            <a:r>
+              <a:rPr lang="pt-BR" dirty="0"/>
+              <a:t>A intensidade aumenta cada vez mais rapidamente. A primeira derivada cresce com x, e a segunda derivada indica essa mudança.</a:t>
+            </a:r>
+          </a:p>
+        </p:txBody>
+      </p:sp>
+      <p:cxnSp>
+        <p:nvCxnSpPr>
+          <p:cNvPr id="11" name="Conector de Seta Reta 10">
+            <a:extLst>
+              <a:ext uri="{FF2B5EF4-FFF2-40B4-BE49-F238E27FC236}">
+                <a16:creationId xmlns:a16="http://schemas.microsoft.com/office/drawing/2014/main" id="{122FDAAC-8266-745B-D253-58D1DEA14C60}"/>
+              </a:ext>
+            </a:extLst>
+          </p:cNvPr>
+          <p:cNvCxnSpPr>
+            <a:cxnSpLocks/>
+          </p:cNvCxnSpPr>
+          <p:nvPr/>
+        </p:nvCxnSpPr>
+        <p:spPr>
+          <a:xfrm>
+            <a:off x="3439886" y="2558143"/>
+            <a:ext cx="3265714" cy="0"/>
+          </a:xfrm>
+          <a:prstGeom prst="straightConnector1">
+            <a:avLst/>
+          </a:prstGeom>
+          <a:ln w="57150">
+            <a:tailEnd type="triangle"/>
+          </a:ln>
+        </p:spPr>
+        <p:style>
+          <a:lnRef idx="1">
+            <a:schemeClr val="accent2"/>
+          </a:lnRef>
+          <a:fillRef idx="0">
+            <a:schemeClr val="accent2"/>
+          </a:fillRef>
+          <a:effectRef idx="0">
+            <a:schemeClr val="accent2"/>
+          </a:effectRef>
+          <a:fontRef idx="minor">
+            <a:schemeClr val="tx1"/>
+          </a:fontRef>
+        </p:style>
+      </p:cxnSp>
+      <p:cxnSp>
+        <p:nvCxnSpPr>
+          <p:cNvPr id="14" name="Conector de Seta Reta 13">
+            <a:extLst>
+              <a:ext uri="{FF2B5EF4-FFF2-40B4-BE49-F238E27FC236}">
+                <a16:creationId xmlns:a16="http://schemas.microsoft.com/office/drawing/2014/main" id="{ABA6F525-4DE1-E729-F3A8-177CED7F0E92}"/>
+              </a:ext>
+            </a:extLst>
+          </p:cNvPr>
+          <p:cNvCxnSpPr>
+            <a:cxnSpLocks/>
+          </p:cNvCxnSpPr>
+          <p:nvPr/>
+        </p:nvCxnSpPr>
+        <p:spPr>
+          <a:xfrm>
+            <a:off x="3439886" y="4343400"/>
+            <a:ext cx="3265714" cy="0"/>
+          </a:xfrm>
+          <a:prstGeom prst="straightConnector1">
+            <a:avLst/>
+          </a:prstGeom>
+          <a:ln w="57150">
+            <a:tailEnd type="triangle"/>
+          </a:ln>
+        </p:spPr>
+        <p:style>
+          <a:lnRef idx="1">
+            <a:schemeClr val="accent2"/>
+          </a:lnRef>
+          <a:fillRef idx="0">
+            <a:schemeClr val="accent2"/>
+          </a:fillRef>
+          <a:effectRef idx="0">
+            <a:schemeClr val="accent2"/>
+          </a:effectRef>
+          <a:fontRef idx="minor">
+            <a:schemeClr val="tx1"/>
+          </a:fontRef>
+        </p:style>
+      </p:cxnSp>
+      <p:cxnSp>
+        <p:nvCxnSpPr>
+          <p:cNvPr id="18" name="Conector de Seta Reta 17">
+            <a:extLst>
+              <a:ext uri="{FF2B5EF4-FFF2-40B4-BE49-F238E27FC236}">
+                <a16:creationId xmlns:a16="http://schemas.microsoft.com/office/drawing/2014/main" id="{D83C791C-CEFF-021E-6C41-42E931D8B04E}"/>
+              </a:ext>
+            </a:extLst>
+          </p:cNvPr>
+          <p:cNvCxnSpPr>
+            <a:cxnSpLocks/>
+          </p:cNvCxnSpPr>
+          <p:nvPr/>
+        </p:nvCxnSpPr>
+        <p:spPr>
+          <a:xfrm>
+            <a:off x="3363686" y="6041571"/>
+            <a:ext cx="3265714" cy="0"/>
+          </a:xfrm>
+          <a:prstGeom prst="straightConnector1">
+            <a:avLst/>
+          </a:prstGeom>
+          <a:ln w="57150">
+            <a:tailEnd type="triangle"/>
+          </a:ln>
+        </p:spPr>
+        <p:style>
+          <a:lnRef idx="1">
+            <a:schemeClr val="accent2"/>
+          </a:lnRef>
+          <a:fillRef idx="0">
+            <a:schemeClr val="accent2"/>
+          </a:fillRef>
+          <a:effectRef idx="0">
+            <a:schemeClr val="accent2"/>
+          </a:effectRef>
+          <a:fontRef idx="minor">
+            <a:schemeClr val="tx1"/>
+          </a:fontRef>
+        </p:style>
+      </p:cxnSp>
+    </p:spTree>
+    <p:extLst>
+      <p:ext uri="{BB962C8B-B14F-4D97-AF65-F5344CB8AC3E}">
+        <p14:creationId xmlns:p14="http://schemas.microsoft.com/office/powerpoint/2010/main" val="2020718519"/>
+      </p:ext>
+    </p:extLst>
+  </p:cSld>
+  <p:clrMapOvr>
+    <a:masterClrMapping/>
+  </p:clrMapOvr>
+</p:sld>
+</file>
+
+<file path=ppt/slides/slide13.xml><?xml version="1.0" encoding="utf-8"?>
+<p:sld xmlns:a="http://schemas.openxmlformats.org/drawingml/2006/main" xmlns:r="http://schemas.openxmlformats.org/officeDocument/2006/relationships" xmlns:p="http://schemas.openxmlformats.org/presentationml/2006/main">
+  <p:cSld>
+    <p:spTree>
+      <p:nvGrpSpPr>
+        <p:cNvPr id="1" name="">
+          <a:extLst>
+            <a:ext uri="{FF2B5EF4-FFF2-40B4-BE49-F238E27FC236}">
+              <a16:creationId xmlns:a16="http://schemas.microsoft.com/office/drawing/2014/main" id="{C1AB754A-045B-10C5-A52D-9D6AA66AD3D3}"/>
+            </a:ext>
+          </a:extLst>
+        </p:cNvPr>
+        <p:cNvGrpSpPr/>
+        <p:nvPr/>
+      </p:nvGrpSpPr>
+      <p:grpSpPr>
+        <a:xfrm>
+          <a:off x="0" y="0"/>
+          <a:ext cx="0" cy="0"/>
+          <a:chOff x="0" y="0"/>
+          <a:chExt cx="0" cy="0"/>
+        </a:xfrm>
+      </p:grpSpPr>
+      <p:sp>
+        <p:nvSpPr>
+          <p:cNvPr id="5" name="Retângulo 4">
+            <a:extLst>
+              <a:ext uri="{FF2B5EF4-FFF2-40B4-BE49-F238E27FC236}">
+                <a16:creationId xmlns:a16="http://schemas.microsoft.com/office/drawing/2014/main" id="{0A15EE61-E4F7-A099-2BC5-F4A5EDF66093}"/>
+              </a:ext>
+            </a:extLst>
+          </p:cNvPr>
+          <p:cNvSpPr/>
+          <p:nvPr/>
+        </p:nvSpPr>
+        <p:spPr>
+          <a:xfrm>
+            <a:off x="0" y="-2"/>
+            <a:ext cx="12192000" cy="1325563"/>
+          </a:xfrm>
+          <a:prstGeom prst="rect">
+            <a:avLst/>
+          </a:prstGeom>
+          <a:solidFill>
+            <a:schemeClr val="accent2"/>
+          </a:solidFill>
+          <a:ln>
+            <a:solidFill>
+              <a:srgbClr val="418AB3"/>
+            </a:solidFill>
+          </a:ln>
+        </p:spPr>
+        <p:style>
+          <a:lnRef idx="2">
+            <a:schemeClr val="accent1">
+              <a:shade val="15000"/>
+            </a:schemeClr>
+          </a:lnRef>
+          <a:fillRef idx="1">
+            <a:schemeClr val="accent1"/>
+          </a:fillRef>
+          <a:effectRef idx="0">
+            <a:schemeClr val="accent1"/>
+          </a:effectRef>
+          <a:fontRef idx="minor">
+            <a:schemeClr val="lt1"/>
+          </a:fontRef>
+        </p:style>
+        <p:txBody>
+          <a:bodyPr rtlCol="0" anchor="ctr"/>
+          <a:lstStyle/>
+          <a:p>
+            <a:pPr algn="ctr"/>
+            <a:endParaRPr lang="pt-BR" dirty="0"/>
+          </a:p>
+        </p:txBody>
+      </p:sp>
+      <p:sp>
+        <p:nvSpPr>
+          <p:cNvPr id="2" name="Título 1">
+            <a:extLst>
+              <a:ext uri="{FF2B5EF4-FFF2-40B4-BE49-F238E27FC236}">
+                <a16:creationId xmlns:a16="http://schemas.microsoft.com/office/drawing/2014/main" id="{EDC3D8E5-E036-277A-831B-E92554E76D96}"/>
+              </a:ext>
+            </a:extLst>
+          </p:cNvPr>
+          <p:cNvSpPr>
+            <a:spLocks noGrp="1"/>
+          </p:cNvSpPr>
+          <p:nvPr>
+            <p:ph type="title"/>
+          </p:nvPr>
+        </p:nvSpPr>
+        <p:spPr>
+          <a:xfrm>
+            <a:off x="0" y="-1"/>
+            <a:ext cx="12192000" cy="1325563"/>
+          </a:xfrm>
+        </p:spPr>
+        <p:txBody>
+          <a:bodyPr/>
+          <a:lstStyle/>
+          <a:p>
+            <a:pPr algn="ctr"/>
+            <a:r>
+              <a:rPr lang="pt-BR" dirty="0">
+                <a:solidFill>
+                  <a:schemeClr val="bg1"/>
+                </a:solidFill>
+              </a:rPr>
+              <a:t>Filtro Laplaciano</a:t>
+            </a:r>
+          </a:p>
+        </p:txBody>
+      </p:sp>
+      <p:sp>
+        <p:nvSpPr>
+          <p:cNvPr id="12" name="AutoShape 6" descr="Lógica Proposicional x Lógica de Argumento ⋆ Colaborae">
+            <a:extLst>
+              <a:ext uri="{FF2B5EF4-FFF2-40B4-BE49-F238E27FC236}">
+                <a16:creationId xmlns:a16="http://schemas.microsoft.com/office/drawing/2014/main" id="{1580FCF1-86B3-E123-D38B-8FCE09513951}"/>
+              </a:ext>
+            </a:extLst>
+          </p:cNvPr>
+          <p:cNvSpPr>
+            <a:spLocks noChangeAspect="1" noChangeArrowheads="1"/>
+          </p:cNvSpPr>
+          <p:nvPr/>
+        </p:nvSpPr>
+        <p:spPr bwMode="auto">
+          <a:xfrm>
+            <a:off x="5943600" y="-1707776"/>
+            <a:ext cx="5289176" cy="5289176"/>
+          </a:xfrm>
+          <a:prstGeom prst="rect">
+            <a:avLst/>
+          </a:prstGeom>
+          <a:noFill/>
+          <a:extLst>
+            <a:ext uri="{909E8E84-426E-40DD-AFC4-6F175D3DCCD1}">
+              <a14:hiddenFill xmlns:a14="http://schemas.microsoft.com/office/drawing/2010/main">
+                <a:solidFill>
+                  <a:srgbClr val="FFFFFF"/>
+                </a:solidFill>
+              </a14:hiddenFill>
+            </a:ext>
+          </a:extLst>
+        </p:spPr>
+        <p:txBody>
+          <a:bodyPr vert="horz" wrap="square" lIns="91440" tIns="45720" rIns="91440" bIns="45720" numCol="1" anchor="t" anchorCtr="0" compatLnSpc="1">
+            <a:prstTxWarp prst="textNoShape">
+              <a:avLst/>
+            </a:prstTxWarp>
+          </a:bodyPr>
+          <a:lstStyle/>
+          <a:p>
+            <a:endParaRPr lang="pt-BR"/>
+          </a:p>
+        </p:txBody>
+      </p:sp>
+      <mc:AlternateContent xmlns:mc="http://schemas.openxmlformats.org/markup-compatibility/2006">
+        <mc:Choice xmlns:a14="http://schemas.microsoft.com/office/drawing/2010/main" Requires="a14">
+          <p:sp>
+            <p:nvSpPr>
+              <p:cNvPr id="6" name="Espaço Reservado para Conteúdo 5">
+                <a:extLst>
+                  <a:ext uri="{FF2B5EF4-FFF2-40B4-BE49-F238E27FC236}">
+                    <a16:creationId xmlns:a16="http://schemas.microsoft.com/office/drawing/2014/main" id="{A287D232-7B58-4D67-F0A5-3E384350A0A7}"/>
+                  </a:ext>
+                </a:extLst>
+              </p:cNvPr>
+              <p:cNvSpPr>
+                <a:spLocks noGrp="1"/>
+              </p:cNvSpPr>
+              <p:nvPr>
+                <p:ph idx="1"/>
+              </p:nvPr>
+            </p:nvSpPr>
+            <p:spPr>
+              <a:xfrm>
+                <a:off x="1655389" y="1650673"/>
+                <a:ext cx="8881222" cy="5159829"/>
+              </a:xfrm>
+            </p:spPr>
+            <p:txBody>
+              <a:bodyPr>
+                <a:normAutofit/>
+              </a:bodyPr>
+              <a:lstStyle/>
+              <a:p>
+                <a:pPr algn="just"/>
+                <a:r>
+                  <a:rPr lang="pt-BR" sz="2200" dirty="0"/>
+                  <a:t>Aproximação das derivadas por meio de diferenças entre os valores dos pixels.</a:t>
+                </a:r>
+              </a:p>
+              <a:p>
+                <a:pPr marL="0" indent="0" algn="just">
+                  <a:buNone/>
+                </a:pPr>
+                <a:endParaRPr lang="pt-BR" sz="2200" dirty="0"/>
+              </a:p>
+              <a:p>
+                <a:pPr algn="just">
+                  <a:buFont typeface="Wingdings" panose="05000000000000000000" pitchFamily="2" charset="2"/>
+                  <a:buChar char="Ø"/>
+                </a:pPr>
+                <a14:m>
+                  <m:oMath xmlns:m="http://schemas.openxmlformats.org/officeDocument/2006/math">
+                    <m:r>
+                      <a:rPr lang="pt-BR" sz="2200" b="0" i="1" smtClean="0">
+                        <a:latin typeface="Cambria Math" panose="02040503050406030204" pitchFamily="18" charset="0"/>
+                        <a:ea typeface="Cambria Math" panose="02040503050406030204" pitchFamily="18" charset="0"/>
+                      </a:rPr>
+                      <m:t>  </m:t>
+                    </m:r>
+                    <m:f>
+                      <m:fPr>
+                        <m:ctrlPr>
+                          <a:rPr lang="pt-BR" sz="2200" i="1">
+                            <a:latin typeface="Cambria Math" panose="02040503050406030204" pitchFamily="18" charset="0"/>
+                            <a:ea typeface="Cambria Math" panose="02040503050406030204" pitchFamily="18" charset="0"/>
+                          </a:rPr>
+                        </m:ctrlPr>
+                      </m:fPr>
+                      <m:num>
+                        <m:sSup>
+                          <m:sSupPr>
+                            <m:ctrlPr>
+                              <a:rPr lang="pt-BR" sz="2200" i="1">
+                                <a:latin typeface="Cambria Math" panose="02040503050406030204" pitchFamily="18" charset="0"/>
+                                <a:ea typeface="Cambria Math" panose="02040503050406030204" pitchFamily="18" charset="0"/>
+                              </a:rPr>
+                            </m:ctrlPr>
+                          </m:sSupPr>
+                          <m:e>
+                            <m:r>
+                              <a:rPr lang="pt-BR" sz="2200" i="1">
+                                <a:latin typeface="Cambria Math" panose="02040503050406030204" pitchFamily="18" charset="0"/>
+                                <a:ea typeface="Cambria Math" panose="02040503050406030204" pitchFamily="18" charset="0"/>
+                              </a:rPr>
+                              <m:t>𝜕</m:t>
+                            </m:r>
+                          </m:e>
+                          <m:sup>
+                            <m:r>
+                              <a:rPr lang="pt-BR" sz="2200" i="1">
+                                <a:latin typeface="Cambria Math" panose="02040503050406030204" pitchFamily="18" charset="0"/>
+                                <a:ea typeface="Cambria Math" panose="02040503050406030204" pitchFamily="18" charset="0"/>
+                              </a:rPr>
+                              <m:t>2</m:t>
+                            </m:r>
+                          </m:sup>
+                        </m:sSup>
+                        <m:r>
+                          <a:rPr lang="pt-BR" sz="2200" i="1">
+                            <a:latin typeface="Cambria Math" panose="02040503050406030204" pitchFamily="18" charset="0"/>
+                            <a:ea typeface="Cambria Math" panose="02040503050406030204" pitchFamily="18" charset="0"/>
+                          </a:rPr>
+                          <m:t>𝐼</m:t>
+                        </m:r>
+                      </m:num>
+                      <m:den>
+                        <m:sSup>
+                          <m:sSupPr>
+                            <m:ctrlPr>
+                              <a:rPr lang="pt-BR" sz="2200" i="1">
+                                <a:latin typeface="Cambria Math" panose="02040503050406030204" pitchFamily="18" charset="0"/>
+                                <a:ea typeface="Cambria Math" panose="02040503050406030204" pitchFamily="18" charset="0"/>
+                              </a:rPr>
+                            </m:ctrlPr>
+                          </m:sSupPr>
+                          <m:e>
+                            <m:r>
+                              <a:rPr lang="pt-BR" sz="2200" i="1">
+                                <a:latin typeface="Cambria Math" panose="02040503050406030204" pitchFamily="18" charset="0"/>
+                                <a:ea typeface="Cambria Math" panose="02040503050406030204" pitchFamily="18" charset="0"/>
+                              </a:rPr>
+                              <m:t>𝜕</m:t>
+                            </m:r>
+                          </m:e>
+                          <m:sup>
+                            <m:r>
+                              <a:rPr lang="pt-BR" sz="2200" i="1">
+                                <a:latin typeface="Cambria Math" panose="02040503050406030204" pitchFamily="18" charset="0"/>
+                                <a:ea typeface="Cambria Math" panose="02040503050406030204" pitchFamily="18" charset="0"/>
+                              </a:rPr>
+                              <m:t>2</m:t>
+                            </m:r>
+                          </m:sup>
+                        </m:sSup>
+                        <m:r>
+                          <a:rPr lang="pt-BR" sz="2200" i="1">
+                            <a:latin typeface="Cambria Math" panose="02040503050406030204" pitchFamily="18" charset="0"/>
+                            <a:ea typeface="Cambria Math" panose="02040503050406030204" pitchFamily="18" charset="0"/>
+                          </a:rPr>
+                          <m:t>𝑥</m:t>
+                        </m:r>
+                      </m:den>
+                    </m:f>
+                    <m:r>
+                      <a:rPr lang="pt-BR" sz="2200" b="0" i="1" smtClean="0">
+                        <a:latin typeface="Cambria Math" panose="02040503050406030204" pitchFamily="18" charset="0"/>
+                        <a:ea typeface="Cambria Math" panose="02040503050406030204" pitchFamily="18" charset="0"/>
+                      </a:rPr>
+                      <m:t> ≈</m:t>
+                    </m:r>
+                    <m:r>
+                      <a:rPr lang="pt-BR" sz="2200" b="0" i="1" smtClean="0">
+                        <a:latin typeface="Cambria Math" panose="02040503050406030204" pitchFamily="18" charset="0"/>
+                        <a:ea typeface="Cambria Math" panose="02040503050406030204" pitchFamily="18" charset="0"/>
+                      </a:rPr>
+                      <m:t>𝐼</m:t>
+                    </m:r>
+                    <m:d>
+                      <m:dPr>
+                        <m:ctrlPr>
+                          <a:rPr lang="pt-BR" sz="2200" b="0" i="1" smtClean="0">
+                            <a:latin typeface="Cambria Math" panose="02040503050406030204" pitchFamily="18" charset="0"/>
+                            <a:ea typeface="Cambria Math" panose="02040503050406030204" pitchFamily="18" charset="0"/>
+                          </a:rPr>
+                        </m:ctrlPr>
+                      </m:dPr>
+                      <m:e>
+                        <m:r>
+                          <a:rPr lang="pt-BR" sz="2200" b="0" i="1" smtClean="0">
+                            <a:latin typeface="Cambria Math" panose="02040503050406030204" pitchFamily="18" charset="0"/>
+                            <a:ea typeface="Cambria Math" panose="02040503050406030204" pitchFamily="18" charset="0"/>
+                          </a:rPr>
+                          <m:t>𝑥</m:t>
+                        </m:r>
+                        <m:r>
+                          <a:rPr lang="pt-BR" sz="2200" b="0" i="1" smtClean="0">
+                            <a:latin typeface="Cambria Math" panose="02040503050406030204" pitchFamily="18" charset="0"/>
+                            <a:ea typeface="Cambria Math" panose="02040503050406030204" pitchFamily="18" charset="0"/>
+                          </a:rPr>
+                          <m:t>+1,</m:t>
+                        </m:r>
+                        <m:r>
+                          <a:rPr lang="pt-BR" sz="2200" b="0" i="1" smtClean="0">
+                            <a:latin typeface="Cambria Math" panose="02040503050406030204" pitchFamily="18" charset="0"/>
+                            <a:ea typeface="Cambria Math" panose="02040503050406030204" pitchFamily="18" charset="0"/>
+                          </a:rPr>
+                          <m:t>𝑦</m:t>
+                        </m:r>
+                      </m:e>
+                    </m:d>
+                    <m:r>
+                      <a:rPr lang="pt-BR" sz="2200" b="0" i="1" smtClean="0">
+                        <a:latin typeface="Cambria Math" panose="02040503050406030204" pitchFamily="18" charset="0"/>
+                        <a:ea typeface="Cambria Math" panose="02040503050406030204" pitchFamily="18" charset="0"/>
+                      </a:rPr>
+                      <m:t> −2</m:t>
+                    </m:r>
+                    <m:r>
+                      <a:rPr lang="pt-BR" sz="2200" b="0" i="1" smtClean="0">
+                        <a:latin typeface="Cambria Math" panose="02040503050406030204" pitchFamily="18" charset="0"/>
+                        <a:ea typeface="Cambria Math" panose="02040503050406030204" pitchFamily="18" charset="0"/>
+                      </a:rPr>
+                      <m:t>𝐼</m:t>
+                    </m:r>
+                    <m:d>
+                      <m:dPr>
+                        <m:ctrlPr>
+                          <a:rPr lang="pt-BR" sz="2200" b="0" i="1" smtClean="0">
+                            <a:latin typeface="Cambria Math" panose="02040503050406030204" pitchFamily="18" charset="0"/>
+                            <a:ea typeface="Cambria Math" panose="02040503050406030204" pitchFamily="18" charset="0"/>
+                          </a:rPr>
+                        </m:ctrlPr>
+                      </m:dPr>
+                      <m:e>
+                        <m:r>
+                          <a:rPr lang="pt-BR" sz="2200" b="0" i="1" smtClean="0">
+                            <a:latin typeface="Cambria Math" panose="02040503050406030204" pitchFamily="18" charset="0"/>
+                            <a:ea typeface="Cambria Math" panose="02040503050406030204" pitchFamily="18" charset="0"/>
+                          </a:rPr>
+                          <m:t>𝑥</m:t>
+                        </m:r>
+                        <m:r>
+                          <a:rPr lang="pt-BR" sz="2200" b="0" i="1" smtClean="0">
+                            <a:latin typeface="Cambria Math" panose="02040503050406030204" pitchFamily="18" charset="0"/>
+                            <a:ea typeface="Cambria Math" panose="02040503050406030204" pitchFamily="18" charset="0"/>
+                          </a:rPr>
+                          <m:t>,</m:t>
+                        </m:r>
+                        <m:r>
+                          <a:rPr lang="pt-BR" sz="2200" b="0" i="1" smtClean="0">
+                            <a:latin typeface="Cambria Math" panose="02040503050406030204" pitchFamily="18" charset="0"/>
+                            <a:ea typeface="Cambria Math" panose="02040503050406030204" pitchFamily="18" charset="0"/>
+                          </a:rPr>
+                          <m:t>𝑦</m:t>
+                        </m:r>
+                      </m:e>
+                    </m:d>
+                    <m:r>
+                      <a:rPr lang="pt-BR" sz="2200" b="0" i="1" smtClean="0">
+                        <a:latin typeface="Cambria Math" panose="02040503050406030204" pitchFamily="18" charset="0"/>
+                        <a:ea typeface="Cambria Math" panose="02040503050406030204" pitchFamily="18" charset="0"/>
+                      </a:rPr>
+                      <m:t>+</m:t>
+                    </m:r>
+                    <m:r>
+                      <a:rPr lang="pt-BR" sz="2200" b="0" i="1" smtClean="0">
+                        <a:latin typeface="Cambria Math" panose="02040503050406030204" pitchFamily="18" charset="0"/>
+                        <a:ea typeface="Cambria Math" panose="02040503050406030204" pitchFamily="18" charset="0"/>
+                      </a:rPr>
+                      <m:t>𝐼</m:t>
+                    </m:r>
+                    <m:r>
+                      <a:rPr lang="pt-BR" sz="2200" b="0" i="1" smtClean="0">
+                        <a:latin typeface="Cambria Math" panose="02040503050406030204" pitchFamily="18" charset="0"/>
+                        <a:ea typeface="Cambria Math" panose="02040503050406030204" pitchFamily="18" charset="0"/>
+                      </a:rPr>
+                      <m:t>(</m:t>
+                    </m:r>
+                    <m:r>
+                      <a:rPr lang="pt-BR" sz="2200" b="0" i="1" smtClean="0">
+                        <a:latin typeface="Cambria Math" panose="02040503050406030204" pitchFamily="18" charset="0"/>
+                        <a:ea typeface="Cambria Math" panose="02040503050406030204" pitchFamily="18" charset="0"/>
+                      </a:rPr>
+                      <m:t>𝑥</m:t>
+                    </m:r>
+                    <m:r>
+                      <a:rPr lang="pt-BR" sz="2200" b="0" i="1" smtClean="0">
+                        <a:latin typeface="Cambria Math" panose="02040503050406030204" pitchFamily="18" charset="0"/>
+                        <a:ea typeface="Cambria Math" panose="02040503050406030204" pitchFamily="18" charset="0"/>
+                      </a:rPr>
+                      <m:t> −1,</m:t>
+                    </m:r>
+                    <m:r>
+                      <a:rPr lang="pt-BR" sz="2200" b="0" i="1" smtClean="0">
+                        <a:latin typeface="Cambria Math" panose="02040503050406030204" pitchFamily="18" charset="0"/>
+                        <a:ea typeface="Cambria Math" panose="02040503050406030204" pitchFamily="18" charset="0"/>
+                      </a:rPr>
+                      <m:t>𝑦</m:t>
+                    </m:r>
+                    <m:r>
+                      <a:rPr lang="pt-BR" sz="2200" b="0" i="1" smtClean="0">
+                        <a:latin typeface="Cambria Math" panose="02040503050406030204" pitchFamily="18" charset="0"/>
+                        <a:ea typeface="Cambria Math" panose="02040503050406030204" pitchFamily="18" charset="0"/>
+                      </a:rPr>
+                      <m:t>)</m:t>
+                    </m:r>
+                  </m:oMath>
+                </a14:m>
+                <a:endParaRPr lang="pt-BR" sz="2200" dirty="0"/>
+              </a:p>
+              <a:p>
+                <a:pPr algn="just">
+                  <a:buFont typeface="Wingdings" panose="05000000000000000000" pitchFamily="2" charset="2"/>
+                  <a:buChar char="Ø"/>
+                </a:pPr>
+                <a:endParaRPr lang="pt-BR" sz="2200" i="1" dirty="0">
+                  <a:latin typeface="Cambria Math" panose="02040503050406030204" pitchFamily="18" charset="0"/>
+                  <a:ea typeface="Cambria Math" panose="02040503050406030204" pitchFamily="18" charset="0"/>
+                </a:endParaRPr>
+              </a:p>
+              <a:p>
+                <a:pPr algn="just">
+                  <a:buFont typeface="Wingdings" panose="05000000000000000000" pitchFamily="2" charset="2"/>
+                  <a:buChar char="Ø"/>
+                </a:pPr>
+                <a14:m>
+                  <m:oMath xmlns:m="http://schemas.openxmlformats.org/officeDocument/2006/math">
+                    <m:r>
+                      <a:rPr lang="pt-BR" sz="2200" b="0" i="1" smtClean="0">
+                        <a:latin typeface="Cambria Math" panose="02040503050406030204" pitchFamily="18" charset="0"/>
+                        <a:ea typeface="Cambria Math" panose="02040503050406030204" pitchFamily="18" charset="0"/>
+                      </a:rPr>
+                      <m:t>  </m:t>
+                    </m:r>
+                    <m:f>
+                      <m:fPr>
+                        <m:ctrlPr>
+                          <a:rPr lang="pt-BR" sz="2200" i="1">
+                            <a:latin typeface="Cambria Math" panose="02040503050406030204" pitchFamily="18" charset="0"/>
+                            <a:ea typeface="Cambria Math" panose="02040503050406030204" pitchFamily="18" charset="0"/>
+                          </a:rPr>
+                        </m:ctrlPr>
+                      </m:fPr>
+                      <m:num>
+                        <m:sSup>
+                          <m:sSupPr>
+                            <m:ctrlPr>
+                              <a:rPr lang="pt-BR" sz="2200" i="1">
+                                <a:latin typeface="Cambria Math" panose="02040503050406030204" pitchFamily="18" charset="0"/>
+                                <a:ea typeface="Cambria Math" panose="02040503050406030204" pitchFamily="18" charset="0"/>
+                              </a:rPr>
+                            </m:ctrlPr>
+                          </m:sSupPr>
+                          <m:e>
+                            <m:r>
+                              <a:rPr lang="pt-BR" sz="2200" i="1">
+                                <a:latin typeface="Cambria Math" panose="02040503050406030204" pitchFamily="18" charset="0"/>
+                                <a:ea typeface="Cambria Math" panose="02040503050406030204" pitchFamily="18" charset="0"/>
+                              </a:rPr>
+                              <m:t>𝜕</m:t>
+                            </m:r>
+                          </m:e>
+                          <m:sup>
+                            <m:r>
+                              <a:rPr lang="pt-BR" sz="2200" i="1">
+                                <a:latin typeface="Cambria Math" panose="02040503050406030204" pitchFamily="18" charset="0"/>
+                                <a:ea typeface="Cambria Math" panose="02040503050406030204" pitchFamily="18" charset="0"/>
+                              </a:rPr>
+                              <m:t>2</m:t>
+                            </m:r>
+                          </m:sup>
+                        </m:sSup>
+                        <m:r>
+                          <a:rPr lang="pt-BR" sz="2200" i="1">
+                            <a:latin typeface="Cambria Math" panose="02040503050406030204" pitchFamily="18" charset="0"/>
+                            <a:ea typeface="Cambria Math" panose="02040503050406030204" pitchFamily="18" charset="0"/>
+                          </a:rPr>
+                          <m:t>𝐼</m:t>
+                        </m:r>
+                      </m:num>
+                      <m:den>
+                        <m:sSup>
+                          <m:sSupPr>
+                            <m:ctrlPr>
+                              <a:rPr lang="pt-BR" sz="2200" i="1">
+                                <a:latin typeface="Cambria Math" panose="02040503050406030204" pitchFamily="18" charset="0"/>
+                                <a:ea typeface="Cambria Math" panose="02040503050406030204" pitchFamily="18" charset="0"/>
+                              </a:rPr>
+                            </m:ctrlPr>
+                          </m:sSupPr>
+                          <m:e>
+                            <m:r>
+                              <a:rPr lang="pt-BR" sz="2200" i="1">
+                                <a:latin typeface="Cambria Math" panose="02040503050406030204" pitchFamily="18" charset="0"/>
+                                <a:ea typeface="Cambria Math" panose="02040503050406030204" pitchFamily="18" charset="0"/>
+                              </a:rPr>
+                              <m:t>𝜕</m:t>
+                            </m:r>
+                          </m:e>
+                          <m:sup>
+                            <m:r>
+                              <a:rPr lang="pt-BR" sz="2200" i="1">
+                                <a:latin typeface="Cambria Math" panose="02040503050406030204" pitchFamily="18" charset="0"/>
+                                <a:ea typeface="Cambria Math" panose="02040503050406030204" pitchFamily="18" charset="0"/>
+                              </a:rPr>
+                              <m:t>2</m:t>
+                            </m:r>
+                          </m:sup>
+                        </m:sSup>
+                        <m:r>
+                          <a:rPr lang="pt-BR" sz="2200" b="0" i="1" smtClean="0">
+                            <a:latin typeface="Cambria Math" panose="02040503050406030204" pitchFamily="18" charset="0"/>
+                            <a:ea typeface="Cambria Math" panose="02040503050406030204" pitchFamily="18" charset="0"/>
+                          </a:rPr>
+                          <m:t>𝑦</m:t>
+                        </m:r>
+                      </m:den>
+                    </m:f>
+                    <m:r>
+                      <a:rPr lang="pt-BR" sz="2200" i="1">
+                        <a:latin typeface="Cambria Math" panose="02040503050406030204" pitchFamily="18" charset="0"/>
+                        <a:ea typeface="Cambria Math" panose="02040503050406030204" pitchFamily="18" charset="0"/>
+                      </a:rPr>
+                      <m:t> ≈</m:t>
+                    </m:r>
+                    <m:r>
+                      <a:rPr lang="pt-BR" sz="2200" i="1">
+                        <a:latin typeface="Cambria Math" panose="02040503050406030204" pitchFamily="18" charset="0"/>
+                        <a:ea typeface="Cambria Math" panose="02040503050406030204" pitchFamily="18" charset="0"/>
+                      </a:rPr>
+                      <m:t>𝐼</m:t>
+                    </m:r>
+                    <m:d>
+                      <m:dPr>
+                        <m:ctrlPr>
+                          <a:rPr lang="pt-BR" sz="2200" i="1">
+                            <a:latin typeface="Cambria Math" panose="02040503050406030204" pitchFamily="18" charset="0"/>
+                            <a:ea typeface="Cambria Math" panose="02040503050406030204" pitchFamily="18" charset="0"/>
+                          </a:rPr>
+                        </m:ctrlPr>
+                      </m:dPr>
+                      <m:e>
+                        <m:r>
+                          <a:rPr lang="pt-BR" sz="2200" i="1">
+                            <a:latin typeface="Cambria Math" panose="02040503050406030204" pitchFamily="18" charset="0"/>
+                            <a:ea typeface="Cambria Math" panose="02040503050406030204" pitchFamily="18" charset="0"/>
+                          </a:rPr>
+                          <m:t>𝑥</m:t>
+                        </m:r>
+                        <m:r>
+                          <a:rPr lang="pt-BR" sz="2200" i="1">
+                            <a:latin typeface="Cambria Math" panose="02040503050406030204" pitchFamily="18" charset="0"/>
+                            <a:ea typeface="Cambria Math" panose="02040503050406030204" pitchFamily="18" charset="0"/>
+                          </a:rPr>
+                          <m:t>,</m:t>
+                        </m:r>
+                        <m:r>
+                          <a:rPr lang="pt-BR" sz="2200" i="1">
+                            <a:latin typeface="Cambria Math" panose="02040503050406030204" pitchFamily="18" charset="0"/>
+                            <a:ea typeface="Cambria Math" panose="02040503050406030204" pitchFamily="18" charset="0"/>
+                          </a:rPr>
+                          <m:t>𝑦</m:t>
+                        </m:r>
+                        <m:r>
+                          <a:rPr lang="pt-BR" sz="2200" b="0" i="1" smtClean="0">
+                            <a:latin typeface="Cambria Math" panose="02040503050406030204" pitchFamily="18" charset="0"/>
+                            <a:ea typeface="Cambria Math" panose="02040503050406030204" pitchFamily="18" charset="0"/>
+                          </a:rPr>
+                          <m:t>+1</m:t>
+                        </m:r>
+                      </m:e>
+                    </m:d>
+                    <m:r>
+                      <a:rPr lang="pt-BR" sz="2200" i="1">
+                        <a:latin typeface="Cambria Math" panose="02040503050406030204" pitchFamily="18" charset="0"/>
+                        <a:ea typeface="Cambria Math" panose="02040503050406030204" pitchFamily="18" charset="0"/>
+                      </a:rPr>
+                      <m:t> −2</m:t>
+                    </m:r>
+                    <m:r>
+                      <a:rPr lang="pt-BR" sz="2200" i="1">
+                        <a:latin typeface="Cambria Math" panose="02040503050406030204" pitchFamily="18" charset="0"/>
+                        <a:ea typeface="Cambria Math" panose="02040503050406030204" pitchFamily="18" charset="0"/>
+                      </a:rPr>
+                      <m:t>𝐼</m:t>
+                    </m:r>
+                    <m:d>
+                      <m:dPr>
+                        <m:ctrlPr>
+                          <a:rPr lang="pt-BR" sz="2200" i="1">
+                            <a:latin typeface="Cambria Math" panose="02040503050406030204" pitchFamily="18" charset="0"/>
+                            <a:ea typeface="Cambria Math" panose="02040503050406030204" pitchFamily="18" charset="0"/>
+                          </a:rPr>
+                        </m:ctrlPr>
+                      </m:dPr>
+                      <m:e>
+                        <m:r>
+                          <a:rPr lang="pt-BR" sz="2200" i="1">
+                            <a:latin typeface="Cambria Math" panose="02040503050406030204" pitchFamily="18" charset="0"/>
+                            <a:ea typeface="Cambria Math" panose="02040503050406030204" pitchFamily="18" charset="0"/>
+                          </a:rPr>
+                          <m:t>𝑥</m:t>
+                        </m:r>
+                        <m:r>
+                          <a:rPr lang="pt-BR" sz="2200" i="1">
+                            <a:latin typeface="Cambria Math" panose="02040503050406030204" pitchFamily="18" charset="0"/>
+                            <a:ea typeface="Cambria Math" panose="02040503050406030204" pitchFamily="18" charset="0"/>
+                          </a:rPr>
+                          <m:t>,</m:t>
+                        </m:r>
+                        <m:r>
+                          <a:rPr lang="pt-BR" sz="2200" i="1">
+                            <a:latin typeface="Cambria Math" panose="02040503050406030204" pitchFamily="18" charset="0"/>
+                            <a:ea typeface="Cambria Math" panose="02040503050406030204" pitchFamily="18" charset="0"/>
+                          </a:rPr>
+                          <m:t>𝑦</m:t>
+                        </m:r>
+                      </m:e>
+                    </m:d>
+                    <m:r>
+                      <a:rPr lang="pt-BR" sz="2200" i="1">
+                        <a:latin typeface="Cambria Math" panose="02040503050406030204" pitchFamily="18" charset="0"/>
+                        <a:ea typeface="Cambria Math" panose="02040503050406030204" pitchFamily="18" charset="0"/>
+                      </a:rPr>
+                      <m:t>+</m:t>
+                    </m:r>
+                    <m:r>
+                      <a:rPr lang="pt-BR" sz="2200" i="1">
+                        <a:latin typeface="Cambria Math" panose="02040503050406030204" pitchFamily="18" charset="0"/>
+                        <a:ea typeface="Cambria Math" panose="02040503050406030204" pitchFamily="18" charset="0"/>
+                      </a:rPr>
+                      <m:t>𝐼</m:t>
+                    </m:r>
+                    <m:d>
+                      <m:dPr>
+                        <m:ctrlPr>
+                          <a:rPr lang="pt-BR" sz="2200" i="1">
+                            <a:latin typeface="Cambria Math" panose="02040503050406030204" pitchFamily="18" charset="0"/>
+                            <a:ea typeface="Cambria Math" panose="02040503050406030204" pitchFamily="18" charset="0"/>
+                          </a:rPr>
+                        </m:ctrlPr>
+                      </m:dPr>
+                      <m:e>
+                        <m:r>
+                          <a:rPr lang="pt-BR" sz="2200" i="1">
+                            <a:latin typeface="Cambria Math" panose="02040503050406030204" pitchFamily="18" charset="0"/>
+                            <a:ea typeface="Cambria Math" panose="02040503050406030204" pitchFamily="18" charset="0"/>
+                          </a:rPr>
+                          <m:t>𝑥</m:t>
+                        </m:r>
+                        <m:r>
+                          <a:rPr lang="pt-BR" sz="2200" i="1">
+                            <a:latin typeface="Cambria Math" panose="02040503050406030204" pitchFamily="18" charset="0"/>
+                            <a:ea typeface="Cambria Math" panose="02040503050406030204" pitchFamily="18" charset="0"/>
+                          </a:rPr>
+                          <m:t>,</m:t>
+                        </m:r>
+                        <m:r>
+                          <a:rPr lang="pt-BR" sz="2200" i="1">
+                            <a:latin typeface="Cambria Math" panose="02040503050406030204" pitchFamily="18" charset="0"/>
+                            <a:ea typeface="Cambria Math" panose="02040503050406030204" pitchFamily="18" charset="0"/>
+                          </a:rPr>
+                          <m:t>𝑦</m:t>
+                        </m:r>
+                        <m:r>
+                          <a:rPr lang="pt-BR" sz="2200" b="0" i="1" smtClean="0">
+                            <a:latin typeface="Cambria Math" panose="02040503050406030204" pitchFamily="18" charset="0"/>
+                            <a:ea typeface="Cambria Math" panose="02040503050406030204" pitchFamily="18" charset="0"/>
+                          </a:rPr>
+                          <m:t>−1</m:t>
+                        </m:r>
+                      </m:e>
+                    </m:d>
+                  </m:oMath>
+                </a14:m>
+                <a:endParaRPr lang="pt-BR" sz="2200" dirty="0">
+                  <a:ea typeface="Cambria Math" panose="02040503050406030204" pitchFamily="18" charset="0"/>
+                </a:endParaRPr>
+              </a:p>
+              <a:p>
+                <a:pPr algn="just">
+                  <a:buFont typeface="Wingdings" panose="05000000000000000000" pitchFamily="2" charset="2"/>
+                  <a:buChar char="Ø"/>
+                </a:pPr>
+                <a:endParaRPr lang="pt-BR" sz="2200" dirty="0"/>
+              </a:p>
+              <a:p>
+                <a:pPr algn="just">
+                  <a:buFont typeface="Wingdings" panose="05000000000000000000" pitchFamily="2" charset="2"/>
+                  <a:buChar char="Ø"/>
+                </a:pPr>
+                <a:endParaRPr lang="pt-BR" sz="2200" dirty="0"/>
+              </a:p>
+              <a:p>
+                <a:pPr algn="just">
+                  <a:buFont typeface="Wingdings" panose="05000000000000000000" pitchFamily="2" charset="2"/>
+                  <a:buChar char="Ø"/>
+                </a:pPr>
+                <a:r>
+                  <a:rPr lang="pt-BR" sz="2200" dirty="0"/>
+                  <a:t>  </a:t>
+                </a:r>
+                <a:r>
+                  <a:rPr lang="pt-BR" sz="2200" i="1" dirty="0"/>
+                  <a:t>Somatória final:</a:t>
+                </a:r>
+              </a:p>
+              <a:p>
+                <a:pPr algn="just">
+                  <a:buFont typeface="Wingdings" panose="05000000000000000000" pitchFamily="2" charset="2"/>
+                  <a:buChar char="Ø"/>
+                </a:pPr>
+                <a14:m>
+                  <m:oMath xmlns:m="http://schemas.openxmlformats.org/officeDocument/2006/math">
+                    <m:r>
+                      <a:rPr lang="pt-BR" sz="2200" b="0" i="1" smtClean="0">
+                        <a:latin typeface="Cambria Math" panose="02040503050406030204" pitchFamily="18" charset="0"/>
+                        <a:ea typeface="Cambria Math" panose="02040503050406030204" pitchFamily="18" charset="0"/>
+                      </a:rPr>
+                      <m:t>  </m:t>
+                    </m:r>
+                    <m:sSup>
+                      <m:sSupPr>
+                        <m:ctrlPr>
+                          <a:rPr lang="pt-BR" sz="2200" b="0" i="1" smtClean="0">
+                            <a:latin typeface="Cambria Math" panose="02040503050406030204" pitchFamily="18" charset="0"/>
+                            <a:ea typeface="Cambria Math" panose="02040503050406030204" pitchFamily="18" charset="0"/>
+                          </a:rPr>
+                        </m:ctrlPr>
+                      </m:sSupPr>
+                      <m:e>
+                        <m:r>
+                          <m:rPr>
+                            <m:sty m:val="p"/>
+                          </m:rPr>
+                          <a:rPr lang="pt-BR" sz="2200" b="0" i="1" smtClean="0">
+                            <a:latin typeface="Cambria Math" panose="02040503050406030204" pitchFamily="18" charset="0"/>
+                            <a:ea typeface="Cambria Math" panose="02040503050406030204" pitchFamily="18" charset="0"/>
+                          </a:rPr>
+                          <m:t>∇</m:t>
+                        </m:r>
+                      </m:e>
+                      <m:sup>
+                        <m:r>
+                          <a:rPr lang="pt-BR" sz="2200" b="0" i="1" smtClean="0">
+                            <a:latin typeface="Cambria Math" panose="02040503050406030204" pitchFamily="18" charset="0"/>
+                            <a:ea typeface="Cambria Math" panose="02040503050406030204" pitchFamily="18" charset="0"/>
+                          </a:rPr>
+                          <m:t>2</m:t>
+                        </m:r>
+                      </m:sup>
+                    </m:sSup>
+                    <m:r>
+                      <a:rPr lang="pt-BR" sz="2200" b="0" i="1" smtClean="0">
+                        <a:latin typeface="Cambria Math" panose="02040503050406030204" pitchFamily="18" charset="0"/>
+                        <a:ea typeface="Cambria Math" panose="02040503050406030204" pitchFamily="18" charset="0"/>
+                      </a:rPr>
+                      <m:t>𝐼</m:t>
+                    </m:r>
+                    <m:r>
+                      <a:rPr lang="pt-BR" sz="2200" i="1">
+                        <a:latin typeface="Cambria Math" panose="02040503050406030204" pitchFamily="18" charset="0"/>
+                        <a:ea typeface="Cambria Math" panose="02040503050406030204" pitchFamily="18" charset="0"/>
+                      </a:rPr>
+                      <m:t>≈</m:t>
+                    </m:r>
+                    <m:r>
+                      <a:rPr lang="pt-BR" sz="2200" i="1">
+                        <a:latin typeface="Cambria Math" panose="02040503050406030204" pitchFamily="18" charset="0"/>
+                        <a:ea typeface="Cambria Math" panose="02040503050406030204" pitchFamily="18" charset="0"/>
+                      </a:rPr>
+                      <m:t>𝐼</m:t>
+                    </m:r>
+                    <m:d>
+                      <m:dPr>
+                        <m:ctrlPr>
+                          <a:rPr lang="pt-BR" sz="2200" i="1">
+                            <a:latin typeface="Cambria Math" panose="02040503050406030204" pitchFamily="18" charset="0"/>
+                            <a:ea typeface="Cambria Math" panose="02040503050406030204" pitchFamily="18" charset="0"/>
+                          </a:rPr>
+                        </m:ctrlPr>
+                      </m:dPr>
+                      <m:e>
+                        <m:r>
+                          <a:rPr lang="pt-BR" sz="2200" i="1">
+                            <a:latin typeface="Cambria Math" panose="02040503050406030204" pitchFamily="18" charset="0"/>
+                            <a:ea typeface="Cambria Math" panose="02040503050406030204" pitchFamily="18" charset="0"/>
+                          </a:rPr>
+                          <m:t>𝑥</m:t>
+                        </m:r>
+                        <m:r>
+                          <a:rPr lang="pt-BR" sz="2200" i="1">
+                            <a:latin typeface="Cambria Math" panose="02040503050406030204" pitchFamily="18" charset="0"/>
+                            <a:ea typeface="Cambria Math" panose="02040503050406030204" pitchFamily="18" charset="0"/>
+                          </a:rPr>
+                          <m:t>,</m:t>
+                        </m:r>
+                        <m:r>
+                          <a:rPr lang="pt-BR" sz="2200" i="1">
+                            <a:latin typeface="Cambria Math" panose="02040503050406030204" pitchFamily="18" charset="0"/>
+                            <a:ea typeface="Cambria Math" panose="02040503050406030204" pitchFamily="18" charset="0"/>
+                          </a:rPr>
+                          <m:t>𝑦</m:t>
+                        </m:r>
+                        <m:r>
+                          <a:rPr lang="pt-BR" sz="2200" i="1">
+                            <a:latin typeface="Cambria Math" panose="02040503050406030204" pitchFamily="18" charset="0"/>
+                            <a:ea typeface="Cambria Math" panose="02040503050406030204" pitchFamily="18" charset="0"/>
+                          </a:rPr>
+                          <m:t>+1</m:t>
+                        </m:r>
+                      </m:e>
+                    </m:d>
+                    <m:r>
+                      <a:rPr lang="pt-BR" sz="2200" i="1">
+                        <a:latin typeface="Cambria Math" panose="02040503050406030204" pitchFamily="18" charset="0"/>
+                        <a:ea typeface="Cambria Math" panose="02040503050406030204" pitchFamily="18" charset="0"/>
+                      </a:rPr>
+                      <m:t> +</m:t>
+                    </m:r>
+                    <m:r>
+                      <a:rPr lang="pt-BR" sz="2200" i="1">
+                        <a:latin typeface="Cambria Math" panose="02040503050406030204" pitchFamily="18" charset="0"/>
+                        <a:ea typeface="Cambria Math" panose="02040503050406030204" pitchFamily="18" charset="0"/>
+                      </a:rPr>
+                      <m:t>𝐼</m:t>
+                    </m:r>
+                    <m:d>
+                      <m:dPr>
+                        <m:ctrlPr>
+                          <a:rPr lang="pt-BR" sz="2200" i="1">
+                            <a:latin typeface="Cambria Math" panose="02040503050406030204" pitchFamily="18" charset="0"/>
+                            <a:ea typeface="Cambria Math" panose="02040503050406030204" pitchFamily="18" charset="0"/>
+                          </a:rPr>
+                        </m:ctrlPr>
+                      </m:dPr>
+                      <m:e>
+                        <m:r>
+                          <a:rPr lang="pt-BR" sz="2200" i="1">
+                            <a:latin typeface="Cambria Math" panose="02040503050406030204" pitchFamily="18" charset="0"/>
+                            <a:ea typeface="Cambria Math" panose="02040503050406030204" pitchFamily="18" charset="0"/>
+                          </a:rPr>
+                          <m:t>𝑥</m:t>
+                        </m:r>
+                        <m:r>
+                          <a:rPr lang="pt-BR" sz="2200" i="1">
+                            <a:latin typeface="Cambria Math" panose="02040503050406030204" pitchFamily="18" charset="0"/>
+                            <a:ea typeface="Cambria Math" panose="02040503050406030204" pitchFamily="18" charset="0"/>
+                          </a:rPr>
+                          <m:t>,</m:t>
+                        </m:r>
+                        <m:r>
+                          <a:rPr lang="pt-BR" sz="2200" i="1">
+                            <a:latin typeface="Cambria Math" panose="02040503050406030204" pitchFamily="18" charset="0"/>
+                            <a:ea typeface="Cambria Math" panose="02040503050406030204" pitchFamily="18" charset="0"/>
+                          </a:rPr>
+                          <m:t>𝑦</m:t>
+                        </m:r>
+                        <m:r>
+                          <a:rPr lang="pt-BR" sz="2200" i="1">
+                            <a:latin typeface="Cambria Math" panose="02040503050406030204" pitchFamily="18" charset="0"/>
+                            <a:ea typeface="Cambria Math" panose="02040503050406030204" pitchFamily="18" charset="0"/>
+                          </a:rPr>
+                          <m:t>−1</m:t>
+                        </m:r>
+                      </m:e>
+                    </m:d>
+                    <m:r>
+                      <a:rPr lang="pt-BR" sz="2200" b="0" i="1" smtClean="0">
+                        <a:latin typeface="Cambria Math" panose="02040503050406030204" pitchFamily="18" charset="0"/>
+                        <a:ea typeface="Cambria Math" panose="02040503050406030204" pitchFamily="18" charset="0"/>
+                      </a:rPr>
+                      <m:t> −4</m:t>
+                    </m:r>
+                    <m:r>
+                      <a:rPr lang="pt-BR" sz="2200" b="0" i="1" smtClean="0">
+                        <a:latin typeface="Cambria Math" panose="02040503050406030204" pitchFamily="18" charset="0"/>
+                        <a:ea typeface="Cambria Math" panose="02040503050406030204" pitchFamily="18" charset="0"/>
+                      </a:rPr>
+                      <m:t>𝐼</m:t>
+                    </m:r>
+                    <m:d>
+                      <m:dPr>
+                        <m:ctrlPr>
+                          <a:rPr lang="pt-BR" sz="2200" b="0" i="1" smtClean="0">
+                            <a:latin typeface="Cambria Math" panose="02040503050406030204" pitchFamily="18" charset="0"/>
+                            <a:ea typeface="Cambria Math" panose="02040503050406030204" pitchFamily="18" charset="0"/>
+                          </a:rPr>
+                        </m:ctrlPr>
+                      </m:dPr>
+                      <m:e>
+                        <m:r>
+                          <a:rPr lang="pt-BR" sz="2200" b="0" i="1" smtClean="0">
+                            <a:latin typeface="Cambria Math" panose="02040503050406030204" pitchFamily="18" charset="0"/>
+                            <a:ea typeface="Cambria Math" panose="02040503050406030204" pitchFamily="18" charset="0"/>
+                          </a:rPr>
+                          <m:t>𝑥</m:t>
+                        </m:r>
+                        <m:r>
+                          <a:rPr lang="pt-BR" sz="2200" b="0" i="1" smtClean="0">
+                            <a:latin typeface="Cambria Math" panose="02040503050406030204" pitchFamily="18" charset="0"/>
+                            <a:ea typeface="Cambria Math" panose="02040503050406030204" pitchFamily="18" charset="0"/>
+                          </a:rPr>
+                          <m:t>,</m:t>
+                        </m:r>
+                        <m:r>
+                          <a:rPr lang="pt-BR" sz="2200" b="0" i="1" smtClean="0">
+                            <a:latin typeface="Cambria Math" panose="02040503050406030204" pitchFamily="18" charset="0"/>
+                            <a:ea typeface="Cambria Math" panose="02040503050406030204" pitchFamily="18" charset="0"/>
+                          </a:rPr>
+                          <m:t>𝑦</m:t>
+                        </m:r>
+                      </m:e>
+                    </m:d>
+                    <m:r>
+                      <a:rPr lang="pt-BR" sz="2200" b="0" i="1" smtClean="0">
+                        <a:latin typeface="Cambria Math" panose="02040503050406030204" pitchFamily="18" charset="0"/>
+                        <a:ea typeface="Cambria Math" panose="02040503050406030204" pitchFamily="18" charset="0"/>
+                      </a:rPr>
+                      <m:t>+ </m:t>
+                    </m:r>
+                    <m:r>
+                      <a:rPr lang="pt-BR" sz="2200" i="1">
+                        <a:latin typeface="Cambria Math" panose="02040503050406030204" pitchFamily="18" charset="0"/>
+                        <a:ea typeface="Cambria Math" panose="02040503050406030204" pitchFamily="18" charset="0"/>
+                      </a:rPr>
+                      <m:t>𝐼</m:t>
+                    </m:r>
+                    <m:d>
+                      <m:dPr>
+                        <m:ctrlPr>
+                          <a:rPr lang="pt-BR" sz="2200" i="1">
+                            <a:latin typeface="Cambria Math" panose="02040503050406030204" pitchFamily="18" charset="0"/>
+                            <a:ea typeface="Cambria Math" panose="02040503050406030204" pitchFamily="18" charset="0"/>
+                          </a:rPr>
+                        </m:ctrlPr>
+                      </m:dPr>
+                      <m:e>
+                        <m:r>
+                          <a:rPr lang="pt-BR" sz="2200" i="1">
+                            <a:latin typeface="Cambria Math" panose="02040503050406030204" pitchFamily="18" charset="0"/>
+                            <a:ea typeface="Cambria Math" panose="02040503050406030204" pitchFamily="18" charset="0"/>
+                          </a:rPr>
+                          <m:t>𝑥</m:t>
+                        </m:r>
+                        <m:r>
+                          <a:rPr lang="pt-BR" sz="2200" i="1">
+                            <a:latin typeface="Cambria Math" panose="02040503050406030204" pitchFamily="18" charset="0"/>
+                            <a:ea typeface="Cambria Math" panose="02040503050406030204" pitchFamily="18" charset="0"/>
+                          </a:rPr>
+                          <m:t>,</m:t>
+                        </m:r>
+                        <m:r>
+                          <a:rPr lang="pt-BR" sz="2200" i="1">
+                            <a:latin typeface="Cambria Math" panose="02040503050406030204" pitchFamily="18" charset="0"/>
+                            <a:ea typeface="Cambria Math" panose="02040503050406030204" pitchFamily="18" charset="0"/>
+                          </a:rPr>
+                          <m:t>𝑦</m:t>
+                        </m:r>
+                        <m:r>
+                          <a:rPr lang="pt-BR" sz="2200" i="1">
+                            <a:latin typeface="Cambria Math" panose="02040503050406030204" pitchFamily="18" charset="0"/>
+                            <a:ea typeface="Cambria Math" panose="02040503050406030204" pitchFamily="18" charset="0"/>
+                          </a:rPr>
+                          <m:t>+1</m:t>
+                        </m:r>
+                      </m:e>
+                    </m:d>
+                    <m:r>
+                      <a:rPr lang="pt-BR" sz="2200" i="1">
+                        <a:latin typeface="Cambria Math" panose="02040503050406030204" pitchFamily="18" charset="0"/>
+                        <a:ea typeface="Cambria Math" panose="02040503050406030204" pitchFamily="18" charset="0"/>
+                      </a:rPr>
+                      <m:t>+</m:t>
+                    </m:r>
+                    <m:r>
+                      <a:rPr lang="pt-BR" sz="2200" i="1">
+                        <a:latin typeface="Cambria Math" panose="02040503050406030204" pitchFamily="18" charset="0"/>
+                        <a:ea typeface="Cambria Math" panose="02040503050406030204" pitchFamily="18" charset="0"/>
+                      </a:rPr>
+                      <m:t>𝐼</m:t>
+                    </m:r>
+                    <m:d>
+                      <m:dPr>
+                        <m:ctrlPr>
+                          <a:rPr lang="pt-BR" sz="2200" i="1">
+                            <a:latin typeface="Cambria Math" panose="02040503050406030204" pitchFamily="18" charset="0"/>
+                            <a:ea typeface="Cambria Math" panose="02040503050406030204" pitchFamily="18" charset="0"/>
+                          </a:rPr>
+                        </m:ctrlPr>
+                      </m:dPr>
+                      <m:e>
+                        <m:r>
+                          <a:rPr lang="pt-BR" sz="2200" i="1">
+                            <a:latin typeface="Cambria Math" panose="02040503050406030204" pitchFamily="18" charset="0"/>
+                            <a:ea typeface="Cambria Math" panose="02040503050406030204" pitchFamily="18" charset="0"/>
+                          </a:rPr>
+                          <m:t>𝑥</m:t>
+                        </m:r>
+                        <m:r>
+                          <a:rPr lang="pt-BR" sz="2200" i="1">
+                            <a:latin typeface="Cambria Math" panose="02040503050406030204" pitchFamily="18" charset="0"/>
+                            <a:ea typeface="Cambria Math" panose="02040503050406030204" pitchFamily="18" charset="0"/>
+                          </a:rPr>
+                          <m:t>,</m:t>
+                        </m:r>
+                        <m:r>
+                          <a:rPr lang="pt-BR" sz="2200" i="1">
+                            <a:latin typeface="Cambria Math" panose="02040503050406030204" pitchFamily="18" charset="0"/>
+                            <a:ea typeface="Cambria Math" panose="02040503050406030204" pitchFamily="18" charset="0"/>
+                          </a:rPr>
+                          <m:t>𝑦</m:t>
+                        </m:r>
+                        <m:r>
+                          <a:rPr lang="pt-BR" sz="2200" i="1">
+                            <a:latin typeface="Cambria Math" panose="02040503050406030204" pitchFamily="18" charset="0"/>
+                            <a:ea typeface="Cambria Math" panose="02040503050406030204" pitchFamily="18" charset="0"/>
+                          </a:rPr>
+                          <m:t>−1</m:t>
+                        </m:r>
+                      </m:e>
+                    </m:d>
+                  </m:oMath>
+                </a14:m>
+                <a:endParaRPr lang="pt-BR" sz="2200" dirty="0"/>
+              </a:p>
+              <a:p>
+                <a:pPr marL="0" indent="0" algn="just">
+                  <a:buNone/>
+                </a:pPr>
+                <a:endParaRPr lang="pt-BR" sz="2200" dirty="0"/>
+              </a:p>
+            </p:txBody>
+          </p:sp>
+        </mc:Choice>
+        <mc:Fallback>
+          <p:sp>
+            <p:nvSpPr>
+              <p:cNvPr id="6" name="Espaço Reservado para Conteúdo 5">
+                <a:extLst>
+                  <a:ext uri="{FF2B5EF4-FFF2-40B4-BE49-F238E27FC236}">
+                    <a16:creationId xmlns:a16="http://schemas.microsoft.com/office/drawing/2014/main" id="{A287D232-7B58-4D67-F0A5-3E384350A0A7}"/>
+                  </a:ext>
+                </a:extLst>
+              </p:cNvPr>
+              <p:cNvSpPr>
+                <a:spLocks noGrp="1" noRot="1" noChangeAspect="1" noMove="1" noResize="1" noEditPoints="1" noAdjustHandles="1" noChangeArrowheads="1" noChangeShapeType="1" noTextEdit="1"/>
+              </p:cNvSpPr>
+              <p:nvPr>
+                <p:ph idx="1"/>
+              </p:nvPr>
+            </p:nvSpPr>
+            <p:spPr>
+              <a:xfrm>
+                <a:off x="1655389" y="1650673"/>
+                <a:ext cx="8881222" cy="5159829"/>
+              </a:xfrm>
+              <a:blipFill>
+                <a:blip r:embed="rId3"/>
+                <a:stretch>
+                  <a:fillRect l="-824" t="-1537" r="-962"/>
+                </a:stretch>
+              </a:blipFill>
+            </p:spPr>
+            <p:txBody>
+              <a:bodyPr/>
+              <a:lstStyle/>
+              <a:p>
+                <a:r>
+                  <a:rPr lang="pt-BR">
+                    <a:noFill/>
+                  </a:rPr>
+                  <a:t> </a:t>
+                </a:r>
+              </a:p>
+            </p:txBody>
+          </p:sp>
+        </mc:Fallback>
+      </mc:AlternateContent>
+      <p:pic>
+        <p:nvPicPr>
+          <p:cNvPr id="3" name="Imagem 2">
+            <a:extLst>
+              <a:ext uri="{FF2B5EF4-FFF2-40B4-BE49-F238E27FC236}">
+                <a16:creationId xmlns:a16="http://schemas.microsoft.com/office/drawing/2014/main" id="{75757C76-A843-9CDB-7F5D-C40D27B133E6}"/>
+              </a:ext>
+            </a:extLst>
+          </p:cNvPr>
+          <p:cNvPicPr>
+            <a:picLocks noChangeAspect="1"/>
+          </p:cNvPicPr>
+          <p:nvPr/>
+        </p:nvPicPr>
+        <p:blipFill>
+          <a:blip r:embed="rId4"/>
+          <a:srcRect r="49286"/>
+          <a:stretch>
+            <a:fillRect/>
+          </a:stretch>
+        </p:blipFill>
+        <p:spPr>
+          <a:xfrm>
+            <a:off x="7732299" y="2352346"/>
+            <a:ext cx="3044558" cy="2854981"/>
+          </a:xfrm>
+          <a:prstGeom prst="rect">
+            <a:avLst/>
+          </a:prstGeom>
+        </p:spPr>
       </p:pic>
     </p:spTree>
     <p:extLst>
       <p:ext uri="{BB962C8B-B14F-4D97-AF65-F5344CB8AC3E}">
-        <p14:creationId xmlns:p14="http://schemas.microsoft.com/office/powerpoint/2010/main" val="320246296"/>
+        <p14:creationId xmlns:p14="http://schemas.microsoft.com/office/powerpoint/2010/main" val="3771206992"/>
+      </p:ext>
+    </p:extLst>
+  </p:cSld>
+  <p:clrMapOvr>
+    <a:masterClrMapping/>
+  </p:clrMapOvr>
+</p:sld>
+</file>
+
+<file path=ppt/slides/slide14.xml><?xml version="1.0" encoding="utf-8"?>
+<p:sld xmlns:a="http://schemas.openxmlformats.org/drawingml/2006/main" xmlns:r="http://schemas.openxmlformats.org/officeDocument/2006/relationships" xmlns:p="http://schemas.openxmlformats.org/presentationml/2006/main">
+  <p:cSld>
+    <p:spTree>
+      <p:nvGrpSpPr>
+        <p:cNvPr id="1" name="">
+          <a:extLst>
+            <a:ext uri="{FF2B5EF4-FFF2-40B4-BE49-F238E27FC236}">
+              <a16:creationId xmlns:a16="http://schemas.microsoft.com/office/drawing/2014/main" id="{5347826A-84BD-CF35-B417-E49663F215CE}"/>
+            </a:ext>
+          </a:extLst>
+        </p:cNvPr>
+        <p:cNvGrpSpPr/>
+        <p:nvPr/>
+      </p:nvGrpSpPr>
+      <p:grpSpPr>
+        <a:xfrm>
+          <a:off x="0" y="0"/>
+          <a:ext cx="0" cy="0"/>
+          <a:chOff x="0" y="0"/>
+          <a:chExt cx="0" cy="0"/>
+        </a:xfrm>
+      </p:grpSpPr>
+      <p:sp>
+        <p:nvSpPr>
+          <p:cNvPr id="5" name="Retângulo 4">
+            <a:extLst>
+              <a:ext uri="{FF2B5EF4-FFF2-40B4-BE49-F238E27FC236}">
+                <a16:creationId xmlns:a16="http://schemas.microsoft.com/office/drawing/2014/main" id="{97757602-32A1-91E2-3344-3FA1DF673165}"/>
+              </a:ext>
+            </a:extLst>
+          </p:cNvPr>
+          <p:cNvSpPr/>
+          <p:nvPr/>
+        </p:nvSpPr>
+        <p:spPr>
+          <a:xfrm>
+            <a:off x="0" y="-2"/>
+            <a:ext cx="12192000" cy="1325563"/>
+          </a:xfrm>
+          <a:prstGeom prst="rect">
+            <a:avLst/>
+          </a:prstGeom>
+          <a:solidFill>
+            <a:schemeClr val="accent2"/>
+          </a:solidFill>
+          <a:ln>
+            <a:solidFill>
+              <a:srgbClr val="418AB3"/>
+            </a:solidFill>
+          </a:ln>
+        </p:spPr>
+        <p:style>
+          <a:lnRef idx="2">
+            <a:schemeClr val="accent1">
+              <a:shade val="15000"/>
+            </a:schemeClr>
+          </a:lnRef>
+          <a:fillRef idx="1">
+            <a:schemeClr val="accent1"/>
+          </a:fillRef>
+          <a:effectRef idx="0">
+            <a:schemeClr val="accent1"/>
+          </a:effectRef>
+          <a:fontRef idx="minor">
+            <a:schemeClr val="lt1"/>
+          </a:fontRef>
+        </p:style>
+        <p:txBody>
+          <a:bodyPr rtlCol="0" anchor="ctr"/>
+          <a:lstStyle/>
+          <a:p>
+            <a:pPr algn="ctr"/>
+            <a:endParaRPr lang="pt-BR" dirty="0"/>
+          </a:p>
+        </p:txBody>
+      </p:sp>
+      <p:sp>
+        <p:nvSpPr>
+          <p:cNvPr id="2" name="Título 1">
+            <a:extLst>
+              <a:ext uri="{FF2B5EF4-FFF2-40B4-BE49-F238E27FC236}">
+                <a16:creationId xmlns:a16="http://schemas.microsoft.com/office/drawing/2014/main" id="{CBC0A379-A171-032D-F1A4-BFE8837372F5}"/>
+              </a:ext>
+            </a:extLst>
+          </p:cNvPr>
+          <p:cNvSpPr>
+            <a:spLocks noGrp="1"/>
+          </p:cNvSpPr>
+          <p:nvPr>
+            <p:ph type="title"/>
+          </p:nvPr>
+        </p:nvSpPr>
+        <p:spPr>
+          <a:xfrm>
+            <a:off x="0" y="-1"/>
+            <a:ext cx="12192000" cy="1325563"/>
+          </a:xfrm>
+        </p:spPr>
+        <p:txBody>
+          <a:bodyPr/>
+          <a:lstStyle/>
+          <a:p>
+            <a:pPr algn="ctr"/>
+            <a:r>
+              <a:rPr lang="pt-BR" dirty="0">
+                <a:solidFill>
+                  <a:schemeClr val="bg1"/>
+                </a:solidFill>
+              </a:rPr>
+              <a:t>Filtro Laplaciano</a:t>
+            </a:r>
+          </a:p>
+        </p:txBody>
+      </p:sp>
+      <p:sp>
+        <p:nvSpPr>
+          <p:cNvPr id="12" name="AutoShape 6" descr="Lógica Proposicional x Lógica de Argumento ⋆ Colaborae">
+            <a:extLst>
+              <a:ext uri="{FF2B5EF4-FFF2-40B4-BE49-F238E27FC236}">
+                <a16:creationId xmlns:a16="http://schemas.microsoft.com/office/drawing/2014/main" id="{F0E46628-3D39-2EB6-63C8-63ABF39159D1}"/>
+              </a:ext>
+            </a:extLst>
+          </p:cNvPr>
+          <p:cNvSpPr>
+            <a:spLocks noChangeAspect="1" noChangeArrowheads="1"/>
+          </p:cNvSpPr>
+          <p:nvPr/>
+        </p:nvSpPr>
+        <p:spPr bwMode="auto">
+          <a:xfrm>
+            <a:off x="5943600" y="-1707776"/>
+            <a:ext cx="5289176" cy="5289176"/>
+          </a:xfrm>
+          <a:prstGeom prst="rect">
+            <a:avLst/>
+          </a:prstGeom>
+          <a:noFill/>
+          <a:extLst>
+            <a:ext uri="{909E8E84-426E-40DD-AFC4-6F175D3DCCD1}">
+              <a14:hiddenFill xmlns:a14="http://schemas.microsoft.com/office/drawing/2010/main">
+                <a:solidFill>
+                  <a:srgbClr val="FFFFFF"/>
+                </a:solidFill>
+              </a14:hiddenFill>
+            </a:ext>
+          </a:extLst>
+        </p:spPr>
+        <p:txBody>
+          <a:bodyPr vert="horz" wrap="square" lIns="91440" tIns="45720" rIns="91440" bIns="45720" numCol="1" anchor="t" anchorCtr="0" compatLnSpc="1">
+            <a:prstTxWarp prst="textNoShape">
+              <a:avLst/>
+            </a:prstTxWarp>
+          </a:bodyPr>
+          <a:lstStyle/>
+          <a:p>
+            <a:endParaRPr lang="pt-BR"/>
+          </a:p>
+        </p:txBody>
+      </p:sp>
+      <p:sp>
+        <p:nvSpPr>
+          <p:cNvPr id="6" name="Espaço Reservado para Conteúdo 5">
+            <a:extLst>
+              <a:ext uri="{FF2B5EF4-FFF2-40B4-BE49-F238E27FC236}">
+                <a16:creationId xmlns:a16="http://schemas.microsoft.com/office/drawing/2014/main" id="{8CAD6CCD-16D7-3450-61A4-2D7956730342}"/>
+              </a:ext>
+            </a:extLst>
+          </p:cNvPr>
+          <p:cNvSpPr>
+            <a:spLocks noGrp="1"/>
+          </p:cNvSpPr>
+          <p:nvPr>
+            <p:ph idx="1"/>
+          </p:nvPr>
+        </p:nvSpPr>
+        <p:spPr>
+          <a:xfrm>
+            <a:off x="1993607" y="1523999"/>
+            <a:ext cx="8204786" cy="5159829"/>
+          </a:xfrm>
+        </p:spPr>
+        <p:txBody>
+          <a:bodyPr>
+            <a:normAutofit/>
+          </a:bodyPr>
+          <a:lstStyle/>
+          <a:p>
+            <a:pPr algn="just"/>
+            <a:r>
+              <a:rPr lang="pt-BR" sz="2200" dirty="0"/>
+              <a:t>No espaço bidimensional, o seguinte kernel será produzido:</a:t>
+            </a:r>
+          </a:p>
+          <a:p>
+            <a:pPr algn="just"/>
+            <a:endParaRPr lang="pt-BR" sz="2200" dirty="0"/>
+          </a:p>
+          <a:p>
+            <a:pPr algn="just"/>
+            <a:endParaRPr lang="pt-BR" sz="2200" dirty="0"/>
+          </a:p>
+          <a:p>
+            <a:pPr algn="just"/>
+            <a:endParaRPr lang="pt-BR" sz="2200" dirty="0"/>
+          </a:p>
+          <a:p>
+            <a:pPr algn="just"/>
+            <a:endParaRPr lang="pt-BR" sz="2200" dirty="0"/>
+          </a:p>
+          <a:p>
+            <a:pPr algn="just"/>
+            <a:endParaRPr lang="pt-BR" sz="2200" dirty="0"/>
+          </a:p>
+          <a:p>
+            <a:pPr algn="just"/>
+            <a:endParaRPr lang="pt-BR" sz="2200" dirty="0"/>
+          </a:p>
+          <a:p>
+            <a:pPr algn="just"/>
+            <a:r>
+              <a:rPr lang="pt-BR" sz="2200" b="1" i="1" dirty="0" err="1"/>
+              <a:t>Obs</a:t>
+            </a:r>
+            <a:r>
+              <a:rPr lang="pt-BR" sz="2200" b="1" i="1" dirty="0"/>
+              <a:t>:</a:t>
+            </a:r>
+            <a:r>
+              <a:rPr lang="pt-BR" sz="2200" dirty="0"/>
+              <a:t> Alguns autores utilizam a versão com o sinal invertido, onde o centro é positivo e os vizinhos são negativos.</a:t>
+            </a:r>
+          </a:p>
+          <a:p>
+            <a:pPr algn="just"/>
+            <a:endParaRPr lang="pt-BR" sz="2200" dirty="0"/>
+          </a:p>
+          <a:p>
+            <a:pPr algn="just"/>
+            <a:r>
+              <a:rPr lang="pt-BR" sz="2200" b="1" dirty="0" err="1"/>
+              <a:t>Obs</a:t>
+            </a:r>
+            <a:r>
+              <a:rPr lang="pt-BR" sz="2200" b="1" dirty="0"/>
+              <a:t>:</a:t>
+            </a:r>
+            <a:r>
+              <a:rPr lang="pt-BR" sz="2200" dirty="0"/>
+              <a:t> O kernel com 8 conexões considera uma vizinhança mais ampla em termos de direções, mas não significa que seja sempre melhor</a:t>
+            </a:r>
+          </a:p>
+          <a:p>
+            <a:pPr algn="just"/>
+            <a:endParaRPr lang="pt-BR" sz="2200" dirty="0"/>
+          </a:p>
+        </p:txBody>
+      </p:sp>
+      <p:pic>
+        <p:nvPicPr>
+          <p:cNvPr id="4" name="Imagem 3">
+            <a:extLst>
+              <a:ext uri="{FF2B5EF4-FFF2-40B4-BE49-F238E27FC236}">
+                <a16:creationId xmlns:a16="http://schemas.microsoft.com/office/drawing/2014/main" id="{604D2C55-961E-04E2-B406-86AAD180F668}"/>
+              </a:ext>
+            </a:extLst>
+          </p:cNvPr>
+          <p:cNvPicPr>
+            <a:picLocks noChangeAspect="1"/>
+          </p:cNvPicPr>
+          <p:nvPr/>
+        </p:nvPicPr>
+        <p:blipFill>
+          <a:blip r:embed="rId3"/>
+          <a:stretch>
+            <a:fillRect/>
+          </a:stretch>
+        </p:blipFill>
+        <p:spPr>
+          <a:xfrm>
+            <a:off x="3976686" y="2198913"/>
+            <a:ext cx="4046221" cy="1959429"/>
+          </a:xfrm>
+          <a:prstGeom prst="rect">
+            <a:avLst/>
+          </a:prstGeom>
+        </p:spPr>
+      </p:pic>
+    </p:spTree>
+    <p:extLst>
+      <p:ext uri="{BB962C8B-B14F-4D97-AF65-F5344CB8AC3E}">
+        <p14:creationId xmlns:p14="http://schemas.microsoft.com/office/powerpoint/2010/main" val="3987635029"/>
+      </p:ext>
+    </p:extLst>
+  </p:cSld>
+  <p:clrMapOvr>
+    <a:masterClrMapping/>
+  </p:clrMapOvr>
+</p:sld>
+</file>
+
+<file path=ppt/slides/slide15.xml><?xml version="1.0" encoding="utf-8"?>
+<p:sld xmlns:a="http://schemas.openxmlformats.org/drawingml/2006/main" xmlns:r="http://schemas.openxmlformats.org/officeDocument/2006/relationships" xmlns:p="http://schemas.openxmlformats.org/presentationml/2006/main">
+  <p:cSld>
+    <p:spTree>
+      <p:nvGrpSpPr>
+        <p:cNvPr id="1" name="">
+          <a:extLst>
+            <a:ext uri="{FF2B5EF4-FFF2-40B4-BE49-F238E27FC236}">
+              <a16:creationId xmlns:a16="http://schemas.microsoft.com/office/drawing/2014/main" id="{D8C8B2CB-2580-81C3-2E3F-A5046910B876}"/>
+            </a:ext>
+          </a:extLst>
+        </p:cNvPr>
+        <p:cNvGrpSpPr/>
+        <p:nvPr/>
+      </p:nvGrpSpPr>
+      <p:grpSpPr>
+        <a:xfrm>
+          <a:off x="0" y="0"/>
+          <a:ext cx="0" cy="0"/>
+          <a:chOff x="0" y="0"/>
+          <a:chExt cx="0" cy="0"/>
+        </a:xfrm>
+      </p:grpSpPr>
+      <p:sp>
+        <p:nvSpPr>
+          <p:cNvPr id="5" name="Retângulo 4">
+            <a:extLst>
+              <a:ext uri="{FF2B5EF4-FFF2-40B4-BE49-F238E27FC236}">
+                <a16:creationId xmlns:a16="http://schemas.microsoft.com/office/drawing/2014/main" id="{375DCD6A-1285-C5E4-4007-5E6E7186759E}"/>
+              </a:ext>
+            </a:extLst>
+          </p:cNvPr>
+          <p:cNvSpPr/>
+          <p:nvPr/>
+        </p:nvSpPr>
+        <p:spPr>
+          <a:xfrm>
+            <a:off x="0" y="-2"/>
+            <a:ext cx="12192000" cy="1325563"/>
+          </a:xfrm>
+          <a:prstGeom prst="rect">
+            <a:avLst/>
+          </a:prstGeom>
+          <a:solidFill>
+            <a:schemeClr val="accent2"/>
+          </a:solidFill>
+          <a:ln>
+            <a:solidFill>
+              <a:srgbClr val="418AB3"/>
+            </a:solidFill>
+          </a:ln>
+        </p:spPr>
+        <p:style>
+          <a:lnRef idx="2">
+            <a:schemeClr val="accent1">
+              <a:shade val="15000"/>
+            </a:schemeClr>
+          </a:lnRef>
+          <a:fillRef idx="1">
+            <a:schemeClr val="accent1"/>
+          </a:fillRef>
+          <a:effectRef idx="0">
+            <a:schemeClr val="accent1"/>
+          </a:effectRef>
+          <a:fontRef idx="minor">
+            <a:schemeClr val="lt1"/>
+          </a:fontRef>
+        </p:style>
+        <p:txBody>
+          <a:bodyPr rtlCol="0" anchor="ctr"/>
+          <a:lstStyle/>
+          <a:p>
+            <a:pPr algn="ctr"/>
+            <a:endParaRPr lang="pt-BR" dirty="0"/>
+          </a:p>
+        </p:txBody>
+      </p:sp>
+      <p:sp>
+        <p:nvSpPr>
+          <p:cNvPr id="2" name="Título 1">
+            <a:extLst>
+              <a:ext uri="{FF2B5EF4-FFF2-40B4-BE49-F238E27FC236}">
+                <a16:creationId xmlns:a16="http://schemas.microsoft.com/office/drawing/2014/main" id="{718110AF-97A3-7287-6348-F67681BAB9B9}"/>
+              </a:ext>
+            </a:extLst>
+          </p:cNvPr>
+          <p:cNvSpPr>
+            <a:spLocks noGrp="1"/>
+          </p:cNvSpPr>
+          <p:nvPr>
+            <p:ph type="title"/>
+          </p:nvPr>
+        </p:nvSpPr>
+        <p:spPr>
+          <a:xfrm>
+            <a:off x="0" y="-1"/>
+            <a:ext cx="12192000" cy="1325563"/>
+          </a:xfrm>
+        </p:spPr>
+        <p:txBody>
+          <a:bodyPr/>
+          <a:lstStyle/>
+          <a:p>
+            <a:pPr algn="ctr"/>
+            <a:r>
+              <a:rPr lang="pt-BR" dirty="0">
+                <a:solidFill>
+                  <a:schemeClr val="bg1"/>
+                </a:solidFill>
+              </a:rPr>
+              <a:t>Filtro Laplaciano</a:t>
+            </a:r>
+          </a:p>
+        </p:txBody>
+      </p:sp>
+      <p:sp>
+        <p:nvSpPr>
+          <p:cNvPr id="12" name="AutoShape 6" descr="Lógica Proposicional x Lógica de Argumento ⋆ Colaborae">
+            <a:extLst>
+              <a:ext uri="{FF2B5EF4-FFF2-40B4-BE49-F238E27FC236}">
+                <a16:creationId xmlns:a16="http://schemas.microsoft.com/office/drawing/2014/main" id="{6660E43F-91CC-07A2-744E-DE7AE989F8AD}"/>
+              </a:ext>
+            </a:extLst>
+          </p:cNvPr>
+          <p:cNvSpPr>
+            <a:spLocks noChangeAspect="1" noChangeArrowheads="1"/>
+          </p:cNvSpPr>
+          <p:nvPr/>
+        </p:nvSpPr>
+        <p:spPr bwMode="auto">
+          <a:xfrm>
+            <a:off x="5943600" y="-1707776"/>
+            <a:ext cx="5289176" cy="5289176"/>
+          </a:xfrm>
+          <a:prstGeom prst="rect">
+            <a:avLst/>
+          </a:prstGeom>
+          <a:noFill/>
+          <a:extLst>
+            <a:ext uri="{909E8E84-426E-40DD-AFC4-6F175D3DCCD1}">
+              <a14:hiddenFill xmlns:a14="http://schemas.microsoft.com/office/drawing/2010/main">
+                <a:solidFill>
+                  <a:srgbClr val="FFFFFF"/>
+                </a:solidFill>
+              </a14:hiddenFill>
+            </a:ext>
+          </a:extLst>
+        </p:spPr>
+        <p:txBody>
+          <a:bodyPr vert="horz" wrap="square" lIns="91440" tIns="45720" rIns="91440" bIns="45720" numCol="1" anchor="t" anchorCtr="0" compatLnSpc="1">
+            <a:prstTxWarp prst="textNoShape">
+              <a:avLst/>
+            </a:prstTxWarp>
+          </a:bodyPr>
+          <a:lstStyle/>
+          <a:p>
+            <a:endParaRPr lang="pt-BR"/>
+          </a:p>
+        </p:txBody>
+      </p:sp>
+      <p:sp>
+        <p:nvSpPr>
+          <p:cNvPr id="6" name="Espaço Reservado para Conteúdo 5">
+            <a:extLst>
+              <a:ext uri="{FF2B5EF4-FFF2-40B4-BE49-F238E27FC236}">
+                <a16:creationId xmlns:a16="http://schemas.microsoft.com/office/drawing/2014/main" id="{1C0E4BE7-3507-02C2-91D7-48ADA77219B7}"/>
+              </a:ext>
+            </a:extLst>
+          </p:cNvPr>
+          <p:cNvSpPr>
+            <a:spLocks noGrp="1"/>
+          </p:cNvSpPr>
+          <p:nvPr>
+            <p:ph idx="1"/>
+          </p:nvPr>
+        </p:nvSpPr>
+        <p:spPr>
+          <a:xfrm>
+            <a:off x="1600580" y="1925629"/>
+            <a:ext cx="8686040" cy="502583"/>
+          </a:xfrm>
+        </p:spPr>
+        <p:txBody>
+          <a:bodyPr>
+            <a:normAutofit/>
+          </a:bodyPr>
+          <a:lstStyle/>
+          <a:p>
+            <a:pPr algn="just"/>
+            <a:r>
+              <a:rPr lang="pt-BR" sz="2200" dirty="0"/>
+              <a:t>Exemplo de aplicação do realce da imagem, utilizando o filtro laplaciano:</a:t>
+            </a:r>
+          </a:p>
+          <a:p>
+            <a:pPr algn="just"/>
+            <a:endParaRPr lang="pt-BR" sz="2200" dirty="0"/>
+          </a:p>
+          <a:p>
+            <a:pPr algn="just"/>
+            <a:endParaRPr lang="pt-BR" sz="2200" dirty="0"/>
+          </a:p>
+          <a:p>
+            <a:pPr algn="just"/>
+            <a:endParaRPr lang="pt-BR" sz="2200" dirty="0"/>
+          </a:p>
+        </p:txBody>
+      </p:sp>
+      <p:grpSp>
+        <p:nvGrpSpPr>
+          <p:cNvPr id="8" name="Agrupar 7">
+            <a:extLst>
+              <a:ext uri="{FF2B5EF4-FFF2-40B4-BE49-F238E27FC236}">
+                <a16:creationId xmlns:a16="http://schemas.microsoft.com/office/drawing/2014/main" id="{11F7454D-90E7-B297-C895-D1F96ED911A9}"/>
+              </a:ext>
+            </a:extLst>
+          </p:cNvPr>
+          <p:cNvGrpSpPr/>
+          <p:nvPr/>
+        </p:nvGrpSpPr>
+        <p:grpSpPr>
+          <a:xfrm>
+            <a:off x="489399" y="2458105"/>
+            <a:ext cx="11213201" cy="2826016"/>
+            <a:chOff x="212739" y="3213529"/>
+            <a:chExt cx="10444477" cy="2694896"/>
+          </a:xfrm>
+        </p:grpSpPr>
+        <p:pic>
+          <p:nvPicPr>
+            <p:cNvPr id="3" name="Imagem 2">
+              <a:extLst>
+                <a:ext uri="{FF2B5EF4-FFF2-40B4-BE49-F238E27FC236}">
+                  <a16:creationId xmlns:a16="http://schemas.microsoft.com/office/drawing/2014/main" id="{33BAAF15-C91E-633D-8E40-7F6C2D711C48}"/>
+                </a:ext>
+              </a:extLst>
+            </p:cNvPr>
+            <p:cNvPicPr>
+              <a:picLocks noChangeAspect="1"/>
+            </p:cNvPicPr>
+            <p:nvPr/>
+          </p:nvPicPr>
+          <p:blipFill>
+            <a:blip r:embed="rId3"/>
+            <a:srcRect t="49881"/>
+            <a:stretch>
+              <a:fillRect/>
+            </a:stretch>
+          </p:blipFill>
+          <p:spPr>
+            <a:xfrm>
+              <a:off x="4859418" y="3213529"/>
+              <a:ext cx="5797798" cy="2694895"/>
+            </a:xfrm>
+            <a:prstGeom prst="rect">
+              <a:avLst/>
+            </a:prstGeom>
+          </p:spPr>
+        </p:pic>
+        <p:pic>
+          <p:nvPicPr>
+            <p:cNvPr id="7" name="Imagem 6">
+              <a:extLst>
+                <a:ext uri="{FF2B5EF4-FFF2-40B4-BE49-F238E27FC236}">
+                  <a16:creationId xmlns:a16="http://schemas.microsoft.com/office/drawing/2014/main" id="{716F2007-E523-6634-747E-662B3F3AD49A}"/>
+                </a:ext>
+              </a:extLst>
+            </p:cNvPr>
+            <p:cNvPicPr>
+              <a:picLocks noChangeAspect="1"/>
+            </p:cNvPicPr>
+            <p:nvPr/>
+          </p:nvPicPr>
+          <p:blipFill>
+            <a:blip r:embed="rId3"/>
+            <a:srcRect l="-164" r="164" b="49881"/>
+            <a:stretch>
+              <a:fillRect/>
+            </a:stretch>
+          </p:blipFill>
+          <p:spPr>
+            <a:xfrm>
+              <a:off x="212739" y="3213530"/>
+              <a:ext cx="5797798" cy="2694895"/>
+            </a:xfrm>
+            <a:prstGeom prst="rect">
+              <a:avLst/>
+            </a:prstGeom>
+          </p:spPr>
+        </p:pic>
+      </p:grpSp>
+    </p:spTree>
+    <p:extLst>
+      <p:ext uri="{BB962C8B-B14F-4D97-AF65-F5344CB8AC3E}">
+        <p14:creationId xmlns:p14="http://schemas.microsoft.com/office/powerpoint/2010/main" val="2296426756"/>
       </p:ext>
     </p:extLst>
   </p:cSld>
@@ -10325,8 +14478,8 @@
           </a:p>
         </p:txBody>
       </p:sp>
-      <mc:AlternateContent xmlns:mc="http://schemas.openxmlformats.org/markup-compatibility/2006">
-        <mc:Choice xmlns:a14="http://schemas.microsoft.com/office/drawing/2010/main" Requires="a14">
+      <mc:AlternateContent xmlns:mc="http://schemas.openxmlformats.org/markup-compatibility/2006" xmlns:a14="http://schemas.microsoft.com/office/drawing/2010/main">
+        <mc:Choice Requires="a14">
           <p:sp>
             <p:nvSpPr>
               <p:cNvPr id="6" name="Espaço Reservado para Conteúdo 5">
@@ -10655,7 +14808,7 @@
             </p:txBody>
           </p:sp>
         </mc:Choice>
-        <mc:Fallback>
+        <mc:Fallback xmlns="">
           <p:sp>
             <p:nvSpPr>
               <p:cNvPr id="6" name="Espaço Reservado para Conteúdo 5">
